--- a/presentation/harvey_ai_attorney_adoption.pptx
+++ b/presentation/harvey_ai_attorney_adoption.pptx
@@ -5,28 +5,31 @@
     <p:sldMasterId id="2147483702" r:id="rId1"/>
   </p:sldMasterIdLst>
   <p:notesMasterIdLst>
-    <p:notesMasterId r:id="rId21"/>
+    <p:notesMasterId r:id="rId24"/>
   </p:notesMasterIdLst>
   <p:sldIdLst>
     <p:sldId id="256" r:id="rId2"/>
     <p:sldId id="257" r:id="rId3"/>
     <p:sldId id="258" r:id="rId4"/>
     <p:sldId id="259" r:id="rId5"/>
-    <p:sldId id="266" r:id="rId6"/>
-    <p:sldId id="267" r:id="rId7"/>
-    <p:sldId id="274" r:id="rId8"/>
-    <p:sldId id="275" r:id="rId9"/>
-    <p:sldId id="276" r:id="rId10"/>
-    <p:sldId id="277" r:id="rId11"/>
-    <p:sldId id="278" r:id="rId12"/>
-    <p:sldId id="279" r:id="rId13"/>
-    <p:sldId id="280" r:id="rId14"/>
-    <p:sldId id="260" r:id="rId15"/>
-    <p:sldId id="261" r:id="rId16"/>
-    <p:sldId id="262" r:id="rId17"/>
-    <p:sldId id="263" r:id="rId18"/>
-    <p:sldId id="264" r:id="rId19"/>
-    <p:sldId id="265" r:id="rId20"/>
+    <p:sldId id="281" r:id="rId6"/>
+    <p:sldId id="266" r:id="rId7"/>
+    <p:sldId id="267" r:id="rId8"/>
+    <p:sldId id="274" r:id="rId9"/>
+    <p:sldId id="282" r:id="rId10"/>
+    <p:sldId id="275" r:id="rId11"/>
+    <p:sldId id="276" r:id="rId12"/>
+    <p:sldId id="277" r:id="rId13"/>
+    <p:sldId id="278" r:id="rId14"/>
+    <p:sldId id="279" r:id="rId15"/>
+    <p:sldId id="283" r:id="rId16"/>
+    <p:sldId id="280" r:id="rId17"/>
+    <p:sldId id="260" r:id="rId18"/>
+    <p:sldId id="261" r:id="rId19"/>
+    <p:sldId id="262" r:id="rId20"/>
+    <p:sldId id="263" r:id="rId21"/>
+    <p:sldId id="264" r:id="rId22"/>
+    <p:sldId id="265" r:id="rId23"/>
   </p:sldIdLst>
   <p:sldSz cx="9144000" cy="5143500" type="screen16x9"/>
   <p:notesSz cx="5143500" cy="9144000"/>
@@ -383,7 +386,21 @@
             <p:ph type="sldImg"/>
           </p:nvPr>
         </p:nvSpPr>
-        <p:spPr/>
+        <p:spPr>
+          <a:xfrm>
+            <a:off x="-171450" y="1143000"/>
+            <a:ext cx="5486400" cy="3086100"/>
+          </a:xfrm>
+          <a:prstGeom prst="rect">
+            <a:avLst/>
+          </a:prstGeom>
+          <a:noFill/>
+          <a:ln w="12700">
+            <a:solidFill>
+              <a:prstClr val="black"/>
+            </a:solidFill>
+          </a:ln>
+        </p:spPr>
       </p:sp>
       <p:sp>
         <p:nvSpPr>
@@ -395,14 +412,814 @@
             <p:ph type="body" idx="1"/>
           </p:nvPr>
         </p:nvSpPr>
+        <p:spPr>
+          <a:xfrm>
+            <a:off x="514350" y="4400550"/>
+            <a:ext cx="4114800" cy="3600450"/>
+          </a:xfrm>
+          <a:prstGeom prst="rect">
+            <a:avLst/>
+          </a:prstGeom>
+        </p:spPr>
+        <p:txBody>
+          <a:bodyPr/>
+          <a:lstStyle/>
+          <a:p>
+            <a:r>
+              <a:rPr lang="en-US" dirty="0"/>
+              <a:t>This is an example of the extracted text view.</a:t>
+            </a:r>
+          </a:p>
+        </p:txBody>
+      </p:sp>
+    </p:spTree>
+    <p:extLst>
+      <p:ext uri="{BB962C8B-B14F-4D97-AF65-F5344CB8AC3E}">
+        <p14:creationId xmlns:p14="http://schemas.microsoft.com/office/powerpoint/2010/main" val="1272802657"/>
+      </p:ext>
+    </p:extLst>
+  </p:cSld>
+  <p:clrMapOvr>
+    <a:masterClrMapping/>
+  </p:clrMapOvr>
+</p:notes>
+</file>
+
+<file path=ppt/notesSlides/notesSlide11.xml><?xml version="1.0" encoding="utf-8"?>
+<p:notes xmlns:a="http://schemas.openxmlformats.org/drawingml/2006/main" xmlns:r="http://schemas.openxmlformats.org/officeDocument/2006/relationships" xmlns:p="http://schemas.openxmlformats.org/presentationml/2006/main">
+  <p:cSld>
+    <p:spTree>
+      <p:nvGrpSpPr>
+        <p:cNvPr id="1" name=""/>
+        <p:cNvGrpSpPr/>
+        <p:nvPr/>
+      </p:nvGrpSpPr>
+      <p:grpSpPr>
+        <a:xfrm>
+          <a:off x="0" y="0"/>
+          <a:ext cx="0" cy="0"/>
+          <a:chOff x="0" y="0"/>
+          <a:chExt cx="0" cy="0"/>
+        </a:xfrm>
+      </p:grpSpPr>
+      <p:sp>
+        <p:nvSpPr>
+          <p:cNvPr id="2" name="Slide Image Placeholder 1"/>
+          <p:cNvSpPr>
+            <a:spLocks noGrp="1" noRot="1" noChangeAspect="1"/>
+          </p:cNvSpPr>
+          <p:nvPr>
+            <p:ph type="sldImg"/>
+          </p:nvPr>
+        </p:nvSpPr>
+        <p:spPr>
+          <a:xfrm>
+            <a:off x="-171450" y="1143000"/>
+            <a:ext cx="5486400" cy="3086100"/>
+          </a:xfrm>
+          <a:prstGeom prst="rect">
+            <a:avLst/>
+          </a:prstGeom>
+          <a:noFill/>
+          <a:ln w="12700">
+            <a:solidFill>
+              <a:prstClr val="black"/>
+            </a:solidFill>
+          </a:ln>
+        </p:spPr>
+      </p:sp>
+      <p:sp>
+        <p:nvSpPr>
+          <p:cNvPr id="3" name="Notes Placeholder 2"/>
+          <p:cNvSpPr>
+            <a:spLocks noGrp="1"/>
+          </p:cNvSpPr>
+          <p:nvPr>
+            <p:ph type="body" idx="1"/>
+          </p:nvPr>
+        </p:nvSpPr>
+        <p:spPr>
+          <a:xfrm>
+            <a:off x="514350" y="4400550"/>
+            <a:ext cx="4114800" cy="3600450"/>
+          </a:xfrm>
+          <a:prstGeom prst="rect">
+            <a:avLst/>
+          </a:prstGeom>
+        </p:spPr>
+        <p:txBody>
+          <a:bodyPr/>
+          <a:lstStyle/>
+          <a:p>
+            <a:r>
+              <a:rPr lang="en-US" dirty="0"/>
+              <a:t>Next we click on </a:t>
+            </a:r>
+            <a:r>
+              <a:rPr lang="en-US" dirty="0" err="1"/>
+              <a:t>Anlaysis</a:t>
+            </a:r>
+            <a:r>
+              <a:rPr lang="en-US" dirty="0"/>
+              <a:t>, and click start analysis button.</a:t>
+            </a:r>
+          </a:p>
+          <a:p>
+            <a:endParaRPr lang="en-US" dirty="0"/>
+          </a:p>
+          <a:p>
+            <a:r>
+              <a:rPr lang="en-US" dirty="0"/>
+              <a:t>You'll see a loading screen like this.</a:t>
+            </a:r>
+          </a:p>
+          <a:p>
+            <a:endParaRPr lang="en-US" dirty="0"/>
+          </a:p>
+        </p:txBody>
+      </p:sp>
+    </p:spTree>
+    <p:extLst>
+      <p:ext uri="{BB962C8B-B14F-4D97-AF65-F5344CB8AC3E}">
+        <p14:creationId xmlns:p14="http://schemas.microsoft.com/office/powerpoint/2010/main" val="1446387072"/>
+      </p:ext>
+    </p:extLst>
+  </p:cSld>
+  <p:clrMapOvr>
+    <a:masterClrMapping/>
+  </p:clrMapOvr>
+</p:notes>
+</file>
+
+<file path=ppt/notesSlides/notesSlide12.xml><?xml version="1.0" encoding="utf-8"?>
+<p:notes xmlns:a="http://schemas.openxmlformats.org/drawingml/2006/main" xmlns:r="http://schemas.openxmlformats.org/officeDocument/2006/relationships" xmlns:p="http://schemas.openxmlformats.org/presentationml/2006/main">
+  <p:cSld>
+    <p:spTree>
+      <p:nvGrpSpPr>
+        <p:cNvPr id="1" name=""/>
+        <p:cNvGrpSpPr/>
+        <p:nvPr/>
+      </p:nvGrpSpPr>
+      <p:grpSpPr>
+        <a:xfrm>
+          <a:off x="0" y="0"/>
+          <a:ext cx="0" cy="0"/>
+          <a:chOff x="0" y="0"/>
+          <a:chExt cx="0" cy="0"/>
+        </a:xfrm>
+      </p:grpSpPr>
+      <p:sp>
+        <p:nvSpPr>
+          <p:cNvPr id="2" name="Slide Image Placeholder 1"/>
+          <p:cNvSpPr>
+            <a:spLocks noGrp="1" noRot="1" noChangeAspect="1"/>
+          </p:cNvSpPr>
+          <p:nvPr>
+            <p:ph type="sldImg"/>
+          </p:nvPr>
+        </p:nvSpPr>
+        <p:spPr>
+          <a:xfrm>
+            <a:off x="-171450" y="1143000"/>
+            <a:ext cx="5486400" cy="3086100"/>
+          </a:xfrm>
+          <a:prstGeom prst="rect">
+            <a:avLst/>
+          </a:prstGeom>
+          <a:noFill/>
+          <a:ln w="12700">
+            <a:solidFill>
+              <a:prstClr val="black"/>
+            </a:solidFill>
+          </a:ln>
+        </p:spPr>
+      </p:sp>
+      <p:sp>
+        <p:nvSpPr>
+          <p:cNvPr id="3" name="Notes Placeholder 2"/>
+          <p:cNvSpPr>
+            <a:spLocks noGrp="1"/>
+          </p:cNvSpPr>
+          <p:nvPr>
+            <p:ph type="body" idx="1"/>
+          </p:nvPr>
+        </p:nvSpPr>
+        <p:spPr>
+          <a:xfrm>
+            <a:off x="514350" y="4400550"/>
+            <a:ext cx="4114800" cy="3600450"/>
+          </a:xfrm>
+          <a:prstGeom prst="rect">
+            <a:avLst/>
+          </a:prstGeom>
+        </p:spPr>
+        <p:txBody>
+          <a:bodyPr/>
+          <a:lstStyle/>
+          <a:p>
+            <a:r>
+              <a:rPr lang="en-US" dirty="0"/>
+              <a:t>Once it starts to load, text will begin to stream live.  This is the actual analysis.  It will complete by itself and then you click - "View Analysis"</a:t>
+            </a:r>
+          </a:p>
+          <a:p>
+            <a:endParaRPr lang="en-US" dirty="0"/>
+          </a:p>
+        </p:txBody>
+      </p:sp>
+    </p:spTree>
+    <p:extLst>
+      <p:ext uri="{BB962C8B-B14F-4D97-AF65-F5344CB8AC3E}">
+        <p14:creationId xmlns:p14="http://schemas.microsoft.com/office/powerpoint/2010/main" val="84522104"/>
+      </p:ext>
+    </p:extLst>
+  </p:cSld>
+  <p:clrMapOvr>
+    <a:masterClrMapping/>
+  </p:clrMapOvr>
+</p:notes>
+</file>
+
+<file path=ppt/notesSlides/notesSlide13.xml><?xml version="1.0" encoding="utf-8"?>
+<p:notes xmlns:a="http://schemas.openxmlformats.org/drawingml/2006/main" xmlns:r="http://schemas.openxmlformats.org/officeDocument/2006/relationships" xmlns:p="http://schemas.openxmlformats.org/presentationml/2006/main">
+  <p:cSld>
+    <p:spTree>
+      <p:nvGrpSpPr>
+        <p:cNvPr id="1" name=""/>
+        <p:cNvGrpSpPr/>
+        <p:nvPr/>
+      </p:nvGrpSpPr>
+      <p:grpSpPr>
+        <a:xfrm>
+          <a:off x="0" y="0"/>
+          <a:ext cx="0" cy="0"/>
+          <a:chOff x="0" y="0"/>
+          <a:chExt cx="0" cy="0"/>
+        </a:xfrm>
+      </p:grpSpPr>
+      <p:sp>
+        <p:nvSpPr>
+          <p:cNvPr id="2" name="Slide Image Placeholder 1"/>
+          <p:cNvSpPr>
+            <a:spLocks noGrp="1" noRot="1" noChangeAspect="1"/>
+          </p:cNvSpPr>
+          <p:nvPr>
+            <p:ph type="sldImg"/>
+          </p:nvPr>
+        </p:nvSpPr>
+        <p:spPr>
+          <a:xfrm>
+            <a:off x="-171450" y="1143000"/>
+            <a:ext cx="5486400" cy="3086100"/>
+          </a:xfrm>
+          <a:prstGeom prst="rect">
+            <a:avLst/>
+          </a:prstGeom>
+          <a:noFill/>
+          <a:ln w="12700">
+            <a:solidFill>
+              <a:prstClr val="black"/>
+            </a:solidFill>
+          </a:ln>
+        </p:spPr>
+      </p:sp>
+      <p:sp>
+        <p:nvSpPr>
+          <p:cNvPr id="3" name="Notes Placeholder 2"/>
+          <p:cNvSpPr>
+            <a:spLocks noGrp="1"/>
+          </p:cNvSpPr>
+          <p:nvPr>
+            <p:ph type="body" idx="1"/>
+          </p:nvPr>
+        </p:nvSpPr>
+        <p:spPr>
+          <a:xfrm>
+            <a:off x="514350" y="4400550"/>
+            <a:ext cx="4114800" cy="3600450"/>
+          </a:xfrm>
+          <a:prstGeom prst="rect">
+            <a:avLst/>
+          </a:prstGeom>
+        </p:spPr>
+        <p:txBody>
+          <a:bodyPr/>
+          <a:lstStyle/>
+          <a:p>
+            <a:r>
+              <a:rPr lang="en-US" dirty="0"/>
+              <a:t>These are the Analysis Results.  From here you can view a variety of things - Case Analysis, Full Analysis (which is the full streaming document on the previous screen)</a:t>
+            </a:r>
+          </a:p>
+          <a:p>
+            <a:r>
+              <a:rPr lang="en-US" dirty="0"/>
+              <a:t>Document review</a:t>
+            </a:r>
+          </a:p>
+          <a:p>
+            <a:r>
+              <a:rPr lang="en-US" dirty="0"/>
+              <a:t>and Generate Letters is where we'll go next.</a:t>
+            </a:r>
+          </a:p>
+          <a:p>
+            <a:endParaRPr lang="en-US" dirty="0"/>
+          </a:p>
+        </p:txBody>
+      </p:sp>
+    </p:spTree>
+    <p:extLst>
+      <p:ext uri="{BB962C8B-B14F-4D97-AF65-F5344CB8AC3E}">
+        <p14:creationId xmlns:p14="http://schemas.microsoft.com/office/powerpoint/2010/main" val="4071885991"/>
+      </p:ext>
+    </p:extLst>
+  </p:cSld>
+  <p:clrMapOvr>
+    <a:masterClrMapping/>
+  </p:clrMapOvr>
+</p:notes>
+</file>
+
+<file path=ppt/notesSlides/notesSlide14.xml><?xml version="1.0" encoding="utf-8"?>
+<p:notes xmlns:a="http://schemas.openxmlformats.org/drawingml/2006/main" xmlns:r="http://schemas.openxmlformats.org/officeDocument/2006/relationships" xmlns:p="http://schemas.openxmlformats.org/presentationml/2006/main">
+  <p:cSld>
+    <p:spTree>
+      <p:nvGrpSpPr>
+        <p:cNvPr id="1" name=""/>
+        <p:cNvGrpSpPr/>
+        <p:nvPr/>
+      </p:nvGrpSpPr>
+      <p:grpSpPr>
+        <a:xfrm>
+          <a:off x="0" y="0"/>
+          <a:ext cx="0" cy="0"/>
+          <a:chOff x="0" y="0"/>
+          <a:chExt cx="0" cy="0"/>
+        </a:xfrm>
+      </p:grpSpPr>
+      <p:sp>
+        <p:nvSpPr>
+          <p:cNvPr id="2" name="Slide Image Placeholder 1"/>
+          <p:cNvSpPr>
+            <a:spLocks noGrp="1" noRot="1" noChangeAspect="1"/>
+          </p:cNvSpPr>
+          <p:nvPr>
+            <p:ph type="sldImg"/>
+          </p:nvPr>
+        </p:nvSpPr>
+        <p:spPr>
+          <a:xfrm>
+            <a:off x="-171450" y="1143000"/>
+            <a:ext cx="5486400" cy="3086100"/>
+          </a:xfrm>
+          <a:prstGeom prst="rect">
+            <a:avLst/>
+          </a:prstGeom>
+          <a:noFill/>
+          <a:ln w="12700">
+            <a:solidFill>
+              <a:prstClr val="black"/>
+            </a:solidFill>
+          </a:ln>
+        </p:spPr>
+      </p:sp>
+      <p:sp>
+        <p:nvSpPr>
+          <p:cNvPr id="3" name="Notes Placeholder 2"/>
+          <p:cNvSpPr>
+            <a:spLocks noGrp="1"/>
+          </p:cNvSpPr>
+          <p:nvPr>
+            <p:ph type="body" idx="1"/>
+          </p:nvPr>
+        </p:nvSpPr>
+        <p:spPr>
+          <a:xfrm>
+            <a:off x="514350" y="4400550"/>
+            <a:ext cx="4114800" cy="3600450"/>
+          </a:xfrm>
+          <a:prstGeom prst="rect">
+            <a:avLst/>
+          </a:prstGeom>
+        </p:spPr>
+        <p:txBody>
+          <a:bodyPr/>
+          <a:lstStyle/>
+          <a:p>
+            <a:r>
+              <a:rPr lang="en-US" dirty="0"/>
+              <a:t>On this page, you would simply click Generate Letter, and it will begin to generate.  They can be a bit wordy, we will refine that later, but for now, it's better to have more to work with than not enough.  If need be you can copy this letter and ask Chat to make it more concise or whatever you need..</a:t>
+            </a:r>
+          </a:p>
+        </p:txBody>
+      </p:sp>
+    </p:spTree>
+    <p:extLst>
+      <p:ext uri="{BB962C8B-B14F-4D97-AF65-F5344CB8AC3E}">
+        <p14:creationId xmlns:p14="http://schemas.microsoft.com/office/powerpoint/2010/main" val="3993626410"/>
+      </p:ext>
+    </p:extLst>
+  </p:cSld>
+  <p:clrMapOvr>
+    <a:masterClrMapping/>
+  </p:clrMapOvr>
+</p:notes>
+</file>
+
+<file path=ppt/notesSlides/notesSlide15.xml><?xml version="1.0" encoding="utf-8"?>
+<p:notes xmlns:a="http://schemas.openxmlformats.org/drawingml/2006/main" xmlns:r="http://schemas.openxmlformats.org/officeDocument/2006/relationships" xmlns:p="http://schemas.openxmlformats.org/presentationml/2006/main">
+  <p:cSld>
+    <p:spTree>
+      <p:nvGrpSpPr>
+        <p:cNvPr id="1" name=""/>
+        <p:cNvGrpSpPr/>
+        <p:nvPr/>
+      </p:nvGrpSpPr>
+      <p:grpSpPr>
+        <a:xfrm>
+          <a:off x="0" y="0"/>
+          <a:ext cx="0" cy="0"/>
+          <a:chOff x="0" y="0"/>
+          <a:chExt cx="0" cy="0"/>
+        </a:xfrm>
+      </p:grpSpPr>
+      <p:sp>
+        <p:nvSpPr>
+          <p:cNvPr id="2" name="Slide Image Placeholder 1"/>
+          <p:cNvSpPr>
+            <a:spLocks noGrp="1" noRot="1" noChangeAspect="1"/>
+          </p:cNvSpPr>
+          <p:nvPr>
+            <p:ph type="sldImg"/>
+          </p:nvPr>
+        </p:nvSpPr>
+        <p:spPr>
+          <a:xfrm>
+            <a:off x="-171450" y="1143000"/>
+            <a:ext cx="5486400" cy="3086100"/>
+          </a:xfrm>
+          <a:prstGeom prst="rect">
+            <a:avLst/>
+          </a:prstGeom>
+          <a:noFill/>
+          <a:ln w="12700">
+            <a:solidFill>
+              <a:prstClr val="black"/>
+            </a:solidFill>
+          </a:ln>
+        </p:spPr>
+      </p:sp>
+      <p:sp>
+        <p:nvSpPr>
+          <p:cNvPr id="3" name="Notes Placeholder 2"/>
+          <p:cNvSpPr>
+            <a:spLocks noGrp="1"/>
+          </p:cNvSpPr>
+          <p:nvPr>
+            <p:ph type="body" idx="1"/>
+          </p:nvPr>
+        </p:nvSpPr>
+        <p:spPr>
+          <a:xfrm>
+            <a:off x="514350" y="4400550"/>
+            <a:ext cx="4114800" cy="3600450"/>
+          </a:xfrm>
+          <a:prstGeom prst="rect">
+            <a:avLst/>
+          </a:prstGeom>
+        </p:spPr>
+        <p:txBody>
+          <a:bodyPr/>
+          <a:lstStyle/>
+          <a:p>
+            <a:r>
+              <a:rPr lang="en-US" dirty="0"/>
+              <a:t>Below the Findings Letter Section is a demand letter section, here you can select the opposing party you want to direct the letter to, and then press calculate to update the demand amount based on the case analysis.  And the update Specific Demands and response deadline as needed- then click Generate Letter to Party to have a demand letter generated.</a:t>
+            </a:r>
+          </a:p>
+        </p:txBody>
+      </p:sp>
+    </p:spTree>
+    <p:extLst>
+      <p:ext uri="{BB962C8B-B14F-4D97-AF65-F5344CB8AC3E}">
+        <p14:creationId xmlns:p14="http://schemas.microsoft.com/office/powerpoint/2010/main" val="172015655"/>
+      </p:ext>
+    </p:extLst>
+  </p:cSld>
+  <p:clrMapOvr>
+    <a:masterClrMapping/>
+  </p:clrMapOvr>
+</p:notes>
+</file>
+
+<file path=ppt/notesSlides/notesSlide16.xml><?xml version="1.0" encoding="utf-8"?>
+<p:notes xmlns:a="http://schemas.openxmlformats.org/drawingml/2006/main" xmlns:r="http://schemas.openxmlformats.org/officeDocument/2006/relationships" xmlns:p="http://schemas.openxmlformats.org/presentationml/2006/main">
+  <p:cSld>
+    <p:spTree>
+      <p:nvGrpSpPr>
+        <p:cNvPr id="1" name=""/>
+        <p:cNvGrpSpPr/>
+        <p:nvPr/>
+      </p:nvGrpSpPr>
+      <p:grpSpPr>
+        <a:xfrm>
+          <a:off x="0" y="0"/>
+          <a:ext cx="0" cy="0"/>
+          <a:chOff x="0" y="0"/>
+          <a:chExt cx="0" cy="0"/>
+        </a:xfrm>
+      </p:grpSpPr>
+      <p:sp>
+        <p:nvSpPr>
+          <p:cNvPr id="2" name="Slide Image Placeholder 1"/>
+          <p:cNvSpPr>
+            <a:spLocks noGrp="1" noRot="1" noChangeAspect="1"/>
+          </p:cNvSpPr>
+          <p:nvPr>
+            <p:ph type="sldImg"/>
+          </p:nvPr>
+        </p:nvSpPr>
+        <p:spPr>
+          <a:xfrm>
+            <a:off x="-171450" y="1143000"/>
+            <a:ext cx="5486400" cy="3086100"/>
+          </a:xfrm>
+          <a:prstGeom prst="rect">
+            <a:avLst/>
+          </a:prstGeom>
+          <a:noFill/>
+          <a:ln w="12700">
+            <a:solidFill>
+              <a:prstClr val="black"/>
+            </a:solidFill>
+          </a:ln>
+        </p:spPr>
+      </p:sp>
+      <p:sp>
+        <p:nvSpPr>
+          <p:cNvPr id="3" name="Notes Placeholder 2"/>
+          <p:cNvSpPr>
+            <a:spLocks noGrp="1"/>
+          </p:cNvSpPr>
+          <p:nvPr>
+            <p:ph type="body" idx="1"/>
+          </p:nvPr>
+        </p:nvSpPr>
+        <p:spPr>
+          <a:xfrm>
+            <a:off x="514350" y="4400550"/>
+            <a:ext cx="4114800" cy="3600450"/>
+          </a:xfrm>
+          <a:prstGeom prst="rect">
+            <a:avLst/>
+          </a:prstGeom>
+        </p:spPr>
+        <p:txBody>
+          <a:bodyPr/>
+          <a:lstStyle/>
+          <a:p>
+            <a:r>
+              <a:rPr lang="en-US" dirty="0"/>
+              <a:t>I've also added a Case Chat assistant that has complete context of the case documents and case analysis. You can ask it any question.  You can use this to compress your generated findings letter by pasting it in and asking it to compress it.  It can also answer any questions about the case.</a:t>
+            </a:r>
+          </a:p>
+        </p:txBody>
+      </p:sp>
+    </p:spTree>
+    <p:extLst>
+      <p:ext uri="{BB962C8B-B14F-4D97-AF65-F5344CB8AC3E}">
+        <p14:creationId xmlns:p14="http://schemas.microsoft.com/office/powerpoint/2010/main" val="1828450278"/>
+      </p:ext>
+    </p:extLst>
+  </p:cSld>
+  <p:clrMapOvr>
+    <a:masterClrMapping/>
+  </p:clrMapOvr>
+</p:notes>
+</file>
+
+<file path=ppt/notesSlides/notesSlide17.xml><?xml version="1.0" encoding="utf-8"?>
+<p:notes xmlns:a="http://schemas.openxmlformats.org/drawingml/2006/main" xmlns:r="http://schemas.openxmlformats.org/officeDocument/2006/relationships" xmlns:p="http://schemas.openxmlformats.org/presentationml/2006/main">
+  <p:cSld>
+    <p:spTree>
+      <p:nvGrpSpPr>
+        <p:cNvPr id="1" name=""/>
+        <p:cNvGrpSpPr/>
+        <p:nvPr/>
+      </p:nvGrpSpPr>
+      <p:grpSpPr>
+        <a:xfrm>
+          <a:off x="0" y="0"/>
+          <a:ext cx="0" cy="0"/>
+          <a:chOff x="0" y="0"/>
+          <a:chExt cx="0" cy="0"/>
+        </a:xfrm>
+      </p:grpSpPr>
+      <p:sp>
+        <p:nvSpPr>
+          <p:cNvPr id="2" name="Slide Image Placeholder 1"/>
+          <p:cNvSpPr>
+            <a:spLocks noGrp="1" noRot="1" noChangeAspect="1"/>
+          </p:cNvSpPr>
+          <p:nvPr>
+            <p:ph type="sldImg"/>
+          </p:nvPr>
+        </p:nvSpPr>
         <p:spPr/>
+      </p:sp>
+      <p:sp>
+        <p:nvSpPr>
+          <p:cNvPr id="3" name="Notes Placeholder 2"/>
+          <p:cNvSpPr>
+            <a:spLocks noGrp="1"/>
+          </p:cNvSpPr>
+          <p:nvPr>
+            <p:ph type="body" idx="1"/>
+          </p:nvPr>
+        </p:nvSpPr>
+        <p:spPr/>
         <p:txBody>
           <a:bodyPr/>
           <a:lstStyle/>
           <a:p>
             <a:r>
               <a:rPr lang="en-US" dirty="0"/>
-              <a:t>The system is live. Please log in after this meeting and try it out. Trust the system to handle the reading, but verify the output before you send it.</a:t>
+              <a:t>For best results, upload core documents first: intake forms, police reports, contracts, and key correspondence. The system handles files up to 50MB each.</a:t>
+            </a:r>
+          </a:p>
+        </p:txBody>
+      </p:sp>
+      <p:sp>
+        <p:nvSpPr>
+          <p:cNvPr id="4" name="Slide Number Placeholder 3"/>
+          <p:cNvSpPr>
+            <a:spLocks noGrp="1"/>
+          </p:cNvSpPr>
+          <p:nvPr>
+            <p:ph type="sldNum" sz="quarter" idx="10"/>
+          </p:nvPr>
+        </p:nvSpPr>
+        <p:spPr/>
+        <p:txBody>
+          <a:bodyPr/>
+          <a:lstStyle/>
+          <a:p>
+            <a:fld id="{F7021451-1387-4CA6-816F-3879F97B5CBC}" type="slidenum">
+              <a:rPr lang="en-US"/>
+              <a:t>17</a:t>
+            </a:fld>
+            <a:endParaRPr lang="en-US"/>
+          </a:p>
+        </p:txBody>
+      </p:sp>
+    </p:spTree>
+    <p:extLst>
+      <p:ext uri="{BB962C8B-B14F-4D97-AF65-F5344CB8AC3E}">
+        <p14:creationId xmlns:p14="http://schemas.microsoft.com/office/powerpoint/2010/main" val="1024086991"/>
+      </p:ext>
+    </p:extLst>
+  </p:cSld>
+  <p:clrMapOvr>
+    <a:masterClrMapping/>
+  </p:clrMapOvr>
+</p:notes>
+</file>
+
+<file path=ppt/notesSlides/notesSlide18.xml><?xml version="1.0" encoding="utf-8"?>
+<p:notes xmlns:a="http://schemas.openxmlformats.org/drawingml/2006/main" xmlns:r="http://schemas.openxmlformats.org/officeDocument/2006/relationships" xmlns:p="http://schemas.openxmlformats.org/presentationml/2006/main">
+  <p:cSld>
+    <p:spTree>
+      <p:nvGrpSpPr>
+        <p:cNvPr id="1" name=""/>
+        <p:cNvGrpSpPr/>
+        <p:nvPr/>
+      </p:nvGrpSpPr>
+      <p:grpSpPr>
+        <a:xfrm>
+          <a:off x="0" y="0"/>
+          <a:ext cx="0" cy="0"/>
+          <a:chOff x="0" y="0"/>
+          <a:chExt cx="0" cy="0"/>
+        </a:xfrm>
+      </p:grpSpPr>
+      <p:sp>
+        <p:nvSpPr>
+          <p:cNvPr id="2" name="Slide Image Placeholder 1"/>
+          <p:cNvSpPr>
+            <a:spLocks noGrp="1" noRot="1" noChangeAspect="1"/>
+          </p:cNvSpPr>
+          <p:nvPr>
+            <p:ph type="sldImg"/>
+          </p:nvPr>
+        </p:nvSpPr>
+        <p:spPr/>
+      </p:sp>
+      <p:sp>
+        <p:nvSpPr>
+          <p:cNvPr id="3" name="Notes Placeholder 2"/>
+          <p:cNvSpPr>
+            <a:spLocks noGrp="1"/>
+          </p:cNvSpPr>
+          <p:nvPr>
+            <p:ph type="body" idx="1"/>
+          </p:nvPr>
+        </p:nvSpPr>
+        <p:spPr/>
+        <p:txBody>
+          <a:bodyPr/>
+          <a:lstStyle/>
+          <a:p>
+            <a:r>
+              <a:rPr lang="en-US" dirty="0"/>
+              <a:t>This is the most critical feature for trust. You do not have to guess where a fact came from. You can audit the AI's work by clicking the citations.</a:t>
+            </a:r>
+          </a:p>
+        </p:txBody>
+      </p:sp>
+      <p:sp>
+        <p:nvSpPr>
+          <p:cNvPr id="4" name="Slide Number Placeholder 3"/>
+          <p:cNvSpPr>
+            <a:spLocks noGrp="1"/>
+          </p:cNvSpPr>
+          <p:nvPr>
+            <p:ph type="sldNum" sz="quarter" idx="10"/>
+          </p:nvPr>
+        </p:nvSpPr>
+        <p:spPr/>
+        <p:txBody>
+          <a:bodyPr/>
+          <a:lstStyle/>
+          <a:p>
+            <a:fld id="{F7021451-1387-4CA6-816F-3879F97B5CBC}" type="slidenum">
+              <a:rPr lang="en-US"/>
+              <a:t>18</a:t>
+            </a:fld>
+            <a:endParaRPr lang="en-US"/>
+          </a:p>
+        </p:txBody>
+      </p:sp>
+    </p:spTree>
+    <p:extLst>
+      <p:ext uri="{BB962C8B-B14F-4D97-AF65-F5344CB8AC3E}">
+        <p14:creationId xmlns:p14="http://schemas.microsoft.com/office/powerpoint/2010/main" val="1024086991"/>
+      </p:ext>
+    </p:extLst>
+  </p:cSld>
+  <p:clrMapOvr>
+    <a:masterClrMapping/>
+  </p:clrMapOvr>
+</p:notes>
+</file>
+
+<file path=ppt/notesSlides/notesSlide19.xml><?xml version="1.0" encoding="utf-8"?>
+<p:notes xmlns:a="http://schemas.openxmlformats.org/drawingml/2006/main" xmlns:r="http://schemas.openxmlformats.org/officeDocument/2006/relationships" xmlns:p="http://schemas.openxmlformats.org/presentationml/2006/main">
+  <p:cSld>
+    <p:spTree>
+      <p:nvGrpSpPr>
+        <p:cNvPr id="1" name=""/>
+        <p:cNvGrpSpPr/>
+        <p:nvPr/>
+      </p:nvGrpSpPr>
+      <p:grpSpPr>
+        <a:xfrm>
+          <a:off x="0" y="0"/>
+          <a:ext cx="0" cy="0"/>
+          <a:chOff x="0" y="0"/>
+          <a:chExt cx="0" cy="0"/>
+        </a:xfrm>
+      </p:grpSpPr>
+      <p:sp>
+        <p:nvSpPr>
+          <p:cNvPr id="2" name="Slide Image Placeholder 1"/>
+          <p:cNvSpPr>
+            <a:spLocks noGrp="1" noRot="1" noChangeAspect="1"/>
+          </p:cNvSpPr>
+          <p:nvPr>
+            <p:ph type="sldImg"/>
+          </p:nvPr>
+        </p:nvSpPr>
+        <p:spPr/>
+      </p:sp>
+      <p:sp>
+        <p:nvSpPr>
+          <p:cNvPr id="3" name="Notes Placeholder 2"/>
+          <p:cNvSpPr>
+            <a:spLocks noGrp="1"/>
+          </p:cNvSpPr>
+          <p:nvPr>
+            <p:ph type="body" idx="1"/>
+          </p:nvPr>
+        </p:nvSpPr>
+        <p:spPr/>
+        <p:txBody>
+          <a:bodyPr/>
+          <a:lstStyle/>
+          <a:p>
+            <a:r>
+              <a:rPr lang="en-US" dirty="0"/>
+              <a:t>The system prevents the AI from inventing laws. However, it cannot replace your judgment on whether a law is appropriate for the case strategy. You are the final decision-maker.</a:t>
             </a:r>
           </a:p>
         </p:txBody>
@@ -530,6 +1347,267 @@
 </p:notes>
 </file>
 
+<file path=ppt/notesSlides/notesSlide20.xml><?xml version="1.0" encoding="utf-8"?>
+<p:notes xmlns:a="http://schemas.openxmlformats.org/drawingml/2006/main" xmlns:r="http://schemas.openxmlformats.org/officeDocument/2006/relationships" xmlns:p="http://schemas.openxmlformats.org/presentationml/2006/main">
+  <p:cSld>
+    <p:spTree>
+      <p:nvGrpSpPr>
+        <p:cNvPr id="1" name=""/>
+        <p:cNvGrpSpPr/>
+        <p:nvPr/>
+      </p:nvGrpSpPr>
+      <p:grpSpPr>
+        <a:xfrm>
+          <a:off x="0" y="0"/>
+          <a:ext cx="0" cy="0"/>
+          <a:chOff x="0" y="0"/>
+          <a:chExt cx="0" cy="0"/>
+        </a:xfrm>
+      </p:grpSpPr>
+      <p:sp>
+        <p:nvSpPr>
+          <p:cNvPr id="2" name="Slide Image Placeholder 1"/>
+          <p:cNvSpPr>
+            <a:spLocks noGrp="1" noRot="1" noChangeAspect="1"/>
+          </p:cNvSpPr>
+          <p:nvPr>
+            <p:ph type="sldImg"/>
+          </p:nvPr>
+        </p:nvSpPr>
+        <p:spPr/>
+      </p:sp>
+      <p:sp>
+        <p:nvSpPr>
+          <p:cNvPr id="3" name="Notes Placeholder 2"/>
+          <p:cNvSpPr>
+            <a:spLocks noGrp="1"/>
+          </p:cNvSpPr>
+          <p:nvPr>
+            <p:ph type="body" idx="1"/>
+          </p:nvPr>
+        </p:nvSpPr>
+        <p:spPr/>
+        <p:txBody>
+          <a:bodyPr/>
+          <a:lstStyle/>
+          <a:p>
+            <a:r>
+              <a:rPr lang="en-US" dirty="0"/>
+              <a:t>Do not use this for federal cases or criminal law. The legal validation corpus does not cover those areas, and results will be unreliable.</a:t>
+            </a:r>
+          </a:p>
+        </p:txBody>
+      </p:sp>
+      <p:sp>
+        <p:nvSpPr>
+          <p:cNvPr id="4" name="Slide Number Placeholder 3"/>
+          <p:cNvSpPr>
+            <a:spLocks noGrp="1"/>
+          </p:cNvSpPr>
+          <p:nvPr>
+            <p:ph type="sldNum" sz="quarter" idx="10"/>
+          </p:nvPr>
+        </p:nvSpPr>
+        <p:spPr/>
+        <p:txBody>
+          <a:bodyPr/>
+          <a:lstStyle/>
+          <a:p>
+            <a:fld id="{F7021451-1387-4CA6-816F-3879F97B5CBC}" type="slidenum">
+              <a:rPr lang="en-US"/>
+              <a:t>20</a:t>
+            </a:fld>
+            <a:endParaRPr lang="en-US"/>
+          </a:p>
+        </p:txBody>
+      </p:sp>
+    </p:spTree>
+    <p:extLst>
+      <p:ext uri="{BB962C8B-B14F-4D97-AF65-F5344CB8AC3E}">
+        <p14:creationId xmlns:p14="http://schemas.microsoft.com/office/powerpoint/2010/main" val="1024086991"/>
+      </p:ext>
+    </p:extLst>
+  </p:cSld>
+  <p:clrMapOvr>
+    <a:masterClrMapping/>
+  </p:clrMapOvr>
+</p:notes>
+</file>
+
+<file path=ppt/notesSlides/notesSlide21.xml><?xml version="1.0" encoding="utf-8"?>
+<p:notes xmlns:a="http://schemas.openxmlformats.org/drawingml/2006/main" xmlns:r="http://schemas.openxmlformats.org/officeDocument/2006/relationships" xmlns:p="http://schemas.openxmlformats.org/presentationml/2006/main">
+  <p:cSld>
+    <p:spTree>
+      <p:nvGrpSpPr>
+        <p:cNvPr id="1" name=""/>
+        <p:cNvGrpSpPr/>
+        <p:nvPr/>
+      </p:nvGrpSpPr>
+      <p:grpSpPr>
+        <a:xfrm>
+          <a:off x="0" y="0"/>
+          <a:ext cx="0" cy="0"/>
+          <a:chOff x="0" y="0"/>
+          <a:chExt cx="0" cy="0"/>
+        </a:xfrm>
+      </p:grpSpPr>
+      <p:sp>
+        <p:nvSpPr>
+          <p:cNvPr id="2" name="Slide Image Placeholder 1"/>
+          <p:cNvSpPr>
+            <a:spLocks noGrp="1" noRot="1" noChangeAspect="1"/>
+          </p:cNvSpPr>
+          <p:nvPr>
+            <p:ph type="sldImg"/>
+          </p:nvPr>
+        </p:nvSpPr>
+        <p:spPr/>
+      </p:sp>
+      <p:sp>
+        <p:nvSpPr>
+          <p:cNvPr id="3" name="Notes Placeholder 2"/>
+          <p:cNvSpPr>
+            <a:spLocks noGrp="1"/>
+          </p:cNvSpPr>
+          <p:nvPr>
+            <p:ph type="body" idx="1"/>
+          </p:nvPr>
+        </p:nvSpPr>
+        <p:spPr/>
+        <p:txBody>
+          <a:bodyPr/>
+          <a:lstStyle/>
+          <a:p>
+            <a:r>
+              <a:rPr lang="en-US" dirty="0"/>
+              <a:t>We expect every attorney to log in and create a test case this week. Success is defined by using this on real client matters to reduce your intake time.</a:t>
+            </a:r>
+          </a:p>
+        </p:txBody>
+      </p:sp>
+      <p:sp>
+        <p:nvSpPr>
+          <p:cNvPr id="4" name="Slide Number Placeholder 3"/>
+          <p:cNvSpPr>
+            <a:spLocks noGrp="1"/>
+          </p:cNvSpPr>
+          <p:nvPr>
+            <p:ph type="sldNum" sz="quarter" idx="10"/>
+          </p:nvPr>
+        </p:nvSpPr>
+        <p:spPr/>
+        <p:txBody>
+          <a:bodyPr/>
+          <a:lstStyle/>
+          <a:p>
+            <a:fld id="{F7021451-1387-4CA6-816F-3879F97B5CBC}" type="slidenum">
+              <a:rPr lang="en-US"/>
+              <a:t>21</a:t>
+            </a:fld>
+            <a:endParaRPr lang="en-US"/>
+          </a:p>
+        </p:txBody>
+      </p:sp>
+    </p:spTree>
+    <p:extLst>
+      <p:ext uri="{BB962C8B-B14F-4D97-AF65-F5344CB8AC3E}">
+        <p14:creationId xmlns:p14="http://schemas.microsoft.com/office/powerpoint/2010/main" val="1024086991"/>
+      </p:ext>
+    </p:extLst>
+  </p:cSld>
+  <p:clrMapOvr>
+    <a:masterClrMapping/>
+  </p:clrMapOvr>
+</p:notes>
+</file>
+
+<file path=ppt/notesSlides/notesSlide22.xml><?xml version="1.0" encoding="utf-8"?>
+<p:notes xmlns:a="http://schemas.openxmlformats.org/drawingml/2006/main" xmlns:r="http://schemas.openxmlformats.org/officeDocument/2006/relationships" xmlns:p="http://schemas.openxmlformats.org/presentationml/2006/main">
+  <p:cSld>
+    <p:spTree>
+      <p:nvGrpSpPr>
+        <p:cNvPr id="1" name=""/>
+        <p:cNvGrpSpPr/>
+        <p:nvPr/>
+      </p:nvGrpSpPr>
+      <p:grpSpPr>
+        <a:xfrm>
+          <a:off x="0" y="0"/>
+          <a:ext cx="0" cy="0"/>
+          <a:chOff x="0" y="0"/>
+          <a:chExt cx="0" cy="0"/>
+        </a:xfrm>
+      </p:grpSpPr>
+      <p:sp>
+        <p:nvSpPr>
+          <p:cNvPr id="2" name="Slide Image Placeholder 1"/>
+          <p:cNvSpPr>
+            <a:spLocks noGrp="1" noRot="1" noChangeAspect="1"/>
+          </p:cNvSpPr>
+          <p:nvPr>
+            <p:ph type="sldImg"/>
+          </p:nvPr>
+        </p:nvSpPr>
+        <p:spPr/>
+      </p:sp>
+      <p:sp>
+        <p:nvSpPr>
+          <p:cNvPr id="3" name="Notes Placeholder 2"/>
+          <p:cNvSpPr>
+            <a:spLocks noGrp="1"/>
+          </p:cNvSpPr>
+          <p:nvPr>
+            <p:ph type="body" idx="1"/>
+          </p:nvPr>
+        </p:nvSpPr>
+        <p:spPr/>
+        <p:txBody>
+          <a:bodyPr/>
+          <a:lstStyle/>
+          <a:p>
+            <a:r>
+              <a:rPr lang="en-US" dirty="0"/>
+              <a:t>The system is live. Please log in after this meeting and try it out. Trust the system to handle the reading, but verify the output before you send it.</a:t>
+            </a:r>
+          </a:p>
+        </p:txBody>
+      </p:sp>
+      <p:sp>
+        <p:nvSpPr>
+          <p:cNvPr id="4" name="Slide Number Placeholder 3"/>
+          <p:cNvSpPr>
+            <a:spLocks noGrp="1"/>
+          </p:cNvSpPr>
+          <p:nvPr>
+            <p:ph type="sldNum" sz="quarter" idx="10"/>
+          </p:nvPr>
+        </p:nvSpPr>
+        <p:spPr/>
+        <p:txBody>
+          <a:bodyPr/>
+          <a:lstStyle/>
+          <a:p>
+            <a:fld id="{F7021451-1387-4CA6-816F-3879F97B5CBC}" type="slidenum">
+              <a:rPr lang="en-US"/>
+              <a:t>22</a:t>
+            </a:fld>
+            <a:endParaRPr lang="en-US"/>
+          </a:p>
+        </p:txBody>
+      </p:sp>
+    </p:spTree>
+    <p:extLst>
+      <p:ext uri="{BB962C8B-B14F-4D97-AF65-F5344CB8AC3E}">
+        <p14:creationId xmlns:p14="http://schemas.microsoft.com/office/powerpoint/2010/main" val="1024086991"/>
+      </p:ext>
+    </p:extLst>
+  </p:cSld>
+  <p:clrMapOvr>
+    <a:masterClrMapping/>
+  </p:clrMapOvr>
+</p:notes>
+</file>
+
 <file path=ppt/notesSlides/notesSlide3.xml><?xml version="1.0" encoding="utf-8"?>
 <p:notes xmlns:a="http://schemas.openxmlformats.org/drawingml/2006/main" xmlns:r="http://schemas.openxmlformats.org/officeDocument/2006/relationships" xmlns:p="http://schemas.openxmlformats.org/presentationml/2006/main">
   <p:cSld>
@@ -731,7 +1809,21 @@
             <p:ph type="sldImg"/>
           </p:nvPr>
         </p:nvSpPr>
-        <p:spPr/>
+        <p:spPr>
+          <a:xfrm>
+            <a:off x="-171450" y="1143000"/>
+            <a:ext cx="5486400" cy="3086100"/>
+          </a:xfrm>
+          <a:prstGeom prst="rect">
+            <a:avLst/>
+          </a:prstGeom>
+          <a:noFill/>
+          <a:ln w="12700">
+            <a:solidFill>
+              <a:prstClr val="black"/>
+            </a:solidFill>
+          </a:ln>
+        </p:spPr>
       </p:sp>
       <p:sp>
         <p:nvSpPr>
@@ -743,45 +1835,67 @@
             <p:ph type="body" idx="1"/>
           </p:nvPr>
         </p:nvSpPr>
-        <p:spPr/>
+        <p:spPr>
+          <a:xfrm>
+            <a:off x="514350" y="4400550"/>
+            <a:ext cx="4114800" cy="3600450"/>
+          </a:xfrm>
+          <a:prstGeom prst="rect">
+            <a:avLst/>
+          </a:prstGeom>
+        </p:spPr>
         <p:txBody>
           <a:bodyPr/>
           <a:lstStyle/>
           <a:p>
             <a:r>
               <a:rPr lang="en-US" dirty="0"/>
-              <a:t>For best results, upload core documents first: intake forms, police reports, contracts, and key correspondence. The system handles files up to 50MB each.</a:t>
-            </a:r>
-          </a:p>
-        </p:txBody>
-      </p:sp>
-      <p:sp>
-        <p:nvSpPr>
-          <p:cNvPr id="4" name="Slide Number Placeholder 3"/>
-          <p:cNvSpPr>
-            <a:spLocks noGrp="1"/>
-          </p:cNvSpPr>
-          <p:nvPr>
-            <p:ph type="sldNum" sz="quarter" idx="10"/>
-          </p:nvPr>
-        </p:nvSpPr>
-        <p:spPr/>
-        <p:txBody>
-          <a:bodyPr/>
-          <a:lstStyle/>
-          <a:p>
-            <a:fld id="{F7021451-1387-4CA6-816F-3879F97B5CBC}" type="slidenum">
-              <a:rPr lang="en-US"/>
-              <a:t>14</a:t>
-            </a:fld>
-            <a:endParaRPr lang="en-US"/>
+              <a:t>This is your dashboard, it shows all recent cases, and allows you to create a new case.</a:t>
+            </a:r>
+          </a:p>
+          <a:p>
+            <a:endParaRPr lang="en-US" dirty="0"/>
+          </a:p>
+          <a:p>
+            <a:pPr marL="0" marR="0" lvl="0" indent="0" algn="l" defTabSz="914400" rtl="0" eaLnBrk="1" fontAlgn="auto" latinLnBrk="0" hangingPunct="1">
+              <a:lnSpc>
+                <a:spcPct val="100000"/>
+              </a:lnSpc>
+              <a:spcBef>
+                <a:spcPts val="0"/>
+              </a:spcBef>
+              <a:spcAft>
+                <a:spcPts val="0"/>
+              </a:spcAft>
+              <a:buClrTx/>
+              <a:buSzTx/>
+              <a:buFontTx/>
+              <a:buNone/>
+              <a:tabLst/>
+              <a:defRPr/>
+            </a:pPr>
+            <a:r>
+              <a:rPr lang="en-US" dirty="0"/>
+              <a:t>To start you want to make sure to connect to Clio by clicking the </a:t>
+            </a:r>
+            <a:r>
+              <a:rPr lang="en-US" dirty="0" err="1"/>
+              <a:t>Cio</a:t>
+            </a:r>
+            <a:r>
+              <a:rPr lang="en-US" dirty="0"/>
+              <a:t> button on the top right of the screen.  Once it is lit green, that indicates that it is connected.  Then you can click the "New Case" button.</a:t>
+            </a:r>
+          </a:p>
+          <a:p>
+            <a:endParaRPr lang="en-US" dirty="0"/>
           </a:p>
         </p:txBody>
       </p:sp>
     </p:spTree>
     <p:extLst>
       <p:ext uri="{BB962C8B-B14F-4D97-AF65-F5344CB8AC3E}">
-        <p14:creationId xmlns:p14="http://schemas.microsoft.com/office/powerpoint/2010/main" val="1024086991"/>
+        <p14:creationId xmlns:p14="http://schemas.microsoft.com/office/powerpoint/2010/main" val="3484939394"/>
       </p:ext>
     </p:extLst>
   </p:cSld>
@@ -818,7 +1932,21 @@
             <p:ph type="sldImg"/>
           </p:nvPr>
         </p:nvSpPr>
-        <p:spPr/>
+        <p:spPr>
+          <a:xfrm>
+            <a:off x="-171450" y="1143000"/>
+            <a:ext cx="5486400" cy="3086100"/>
+          </a:xfrm>
+          <a:prstGeom prst="rect">
+            <a:avLst/>
+          </a:prstGeom>
+          <a:noFill/>
+          <a:ln w="12700">
+            <a:solidFill>
+              <a:prstClr val="black"/>
+            </a:solidFill>
+          </a:ln>
+        </p:spPr>
       </p:sp>
       <p:sp>
         <p:nvSpPr>
@@ -830,45 +1958,30 @@
             <p:ph type="body" idx="1"/>
           </p:nvPr>
         </p:nvSpPr>
-        <p:spPr/>
+        <p:spPr>
+          <a:xfrm>
+            <a:off x="514350" y="4400550"/>
+            <a:ext cx="4114800" cy="3600450"/>
+          </a:xfrm>
+          <a:prstGeom prst="rect">
+            <a:avLst/>
+          </a:prstGeom>
+        </p:spPr>
         <p:txBody>
           <a:bodyPr/>
           <a:lstStyle/>
           <a:p>
             <a:r>
               <a:rPr lang="en-US" dirty="0"/>
-              <a:t>This is the most critical feature for trust. You do not have to guess where a fact came from. You can audit the AI's work by clicking the citations.</a:t>
-            </a:r>
-          </a:p>
-        </p:txBody>
-      </p:sp>
-      <p:sp>
-        <p:nvSpPr>
-          <p:cNvPr id="4" name="Slide Number Placeholder 3"/>
-          <p:cNvSpPr>
-            <a:spLocks noGrp="1"/>
-          </p:cNvSpPr>
-          <p:nvPr>
-            <p:ph type="sldNum" sz="quarter" idx="10"/>
-          </p:nvPr>
-        </p:nvSpPr>
-        <p:spPr/>
-        <p:txBody>
-          <a:bodyPr/>
-          <a:lstStyle/>
-          <a:p>
-            <a:fld id="{F7021451-1387-4CA6-816F-3879F97B5CBC}" type="slidenum">
-              <a:rPr lang="en-US"/>
-              <a:t>15</a:t>
-            </a:fld>
-            <a:endParaRPr lang="en-US"/>
+              <a:t>Here you can type the name of the client and it will search Clio for that case.  Find it on the bottom (some clients may have multiple cases) and then click "Create Case".</a:t>
+            </a:r>
           </a:p>
         </p:txBody>
       </p:sp>
     </p:spTree>
     <p:extLst>
       <p:ext uri="{BB962C8B-B14F-4D97-AF65-F5344CB8AC3E}">
-        <p14:creationId xmlns:p14="http://schemas.microsoft.com/office/powerpoint/2010/main" val="1024086991"/>
+        <p14:creationId xmlns:p14="http://schemas.microsoft.com/office/powerpoint/2010/main" val="18425180"/>
       </p:ext>
     </p:extLst>
   </p:cSld>
@@ -905,7 +2018,21 @@
             <p:ph type="sldImg"/>
           </p:nvPr>
         </p:nvSpPr>
-        <p:spPr/>
+        <p:spPr>
+          <a:xfrm>
+            <a:off x="-171450" y="1143000"/>
+            <a:ext cx="5486400" cy="3086100"/>
+          </a:xfrm>
+          <a:prstGeom prst="rect">
+            <a:avLst/>
+          </a:prstGeom>
+          <a:noFill/>
+          <a:ln w="12700">
+            <a:solidFill>
+              <a:prstClr val="black"/>
+            </a:solidFill>
+          </a:ln>
+        </p:spPr>
       </p:sp>
       <p:sp>
         <p:nvSpPr>
@@ -917,45 +2044,48 @@
             <p:ph type="body" idx="1"/>
           </p:nvPr>
         </p:nvSpPr>
-        <p:spPr/>
+        <p:spPr>
+          <a:xfrm>
+            <a:off x="514350" y="4400550"/>
+            <a:ext cx="4114800" cy="3600450"/>
+          </a:xfrm>
+          <a:prstGeom prst="rect">
+            <a:avLst/>
+          </a:prstGeom>
+        </p:spPr>
         <p:txBody>
           <a:bodyPr/>
           <a:lstStyle/>
           <a:p>
             <a:r>
               <a:rPr lang="en-US" dirty="0"/>
-              <a:t>The system prevents the AI from inventing laws. However, it cannot replace your judgment on whether a law is appropriate for the case strategy. You are the final decision-maker.</a:t>
-            </a:r>
-          </a:p>
-        </p:txBody>
-      </p:sp>
-      <p:sp>
-        <p:nvSpPr>
-          <p:cNvPr id="4" name="Slide Number Placeholder 3"/>
-          <p:cNvSpPr>
-            <a:spLocks noGrp="1"/>
-          </p:cNvSpPr>
-          <p:nvPr>
-            <p:ph type="sldNum" sz="quarter" idx="10"/>
-          </p:nvPr>
-        </p:nvSpPr>
-        <p:spPr/>
-        <p:txBody>
-          <a:bodyPr/>
-          <a:lstStyle/>
-          <a:p>
-            <a:fld id="{F7021451-1387-4CA6-816F-3879F97B5CBC}" type="slidenum">
-              <a:rPr lang="en-US"/>
-              <a:t>16</a:t>
-            </a:fld>
-            <a:endParaRPr lang="en-US"/>
+              <a:t>You'll get a confirmation - click ok - and then it will begin importing the documents from Clio.  There are some things here to note. </a:t>
+            </a:r>
+            <a:br>
+              <a:rPr lang="en-US" dirty="0"/>
+            </a:br>
+            <a:endParaRPr lang="en-US" dirty="0"/>
+          </a:p>
+          <a:p>
+            <a:r>
+              <a:rPr lang="en-US" dirty="0"/>
+              <a:t>Once complete it will let you know if there were any documents that didn't load - mainly because they are very large.  In the case that this happens, you may need to use. </a:t>
+            </a:r>
+            <a:r>
+              <a:rPr lang="en-US" dirty="0" err="1"/>
+              <a:t>seperate</a:t>
+            </a:r>
+            <a:r>
+              <a:rPr lang="en-US" dirty="0"/>
+              <a:t> tool to compress the pdf and you can manually upload it on a later screen.</a:t>
+            </a:r>
           </a:p>
         </p:txBody>
       </p:sp>
     </p:spTree>
     <p:extLst>
       <p:ext uri="{BB962C8B-B14F-4D97-AF65-F5344CB8AC3E}">
-        <p14:creationId xmlns:p14="http://schemas.microsoft.com/office/powerpoint/2010/main" val="1024086991"/>
+        <p14:creationId xmlns:p14="http://schemas.microsoft.com/office/powerpoint/2010/main" val="2723781723"/>
       </p:ext>
     </p:extLst>
   </p:cSld>
@@ -992,7 +2122,21 @@
             <p:ph type="sldImg"/>
           </p:nvPr>
         </p:nvSpPr>
-        <p:spPr/>
+        <p:spPr>
+          <a:xfrm>
+            <a:off x="-171450" y="1143000"/>
+            <a:ext cx="5486400" cy="3086100"/>
+          </a:xfrm>
+          <a:prstGeom prst="rect">
+            <a:avLst/>
+          </a:prstGeom>
+          <a:noFill/>
+          <a:ln w="12700">
+            <a:solidFill>
+              <a:prstClr val="black"/>
+            </a:solidFill>
+          </a:ln>
+        </p:spPr>
       </p:sp>
       <p:sp>
         <p:nvSpPr>
@@ -1004,45 +2148,57 @@
             <p:ph type="body" idx="1"/>
           </p:nvPr>
         </p:nvSpPr>
-        <p:spPr/>
+        <p:spPr>
+          <a:xfrm>
+            <a:off x="514350" y="4400550"/>
+            <a:ext cx="4114800" cy="3600450"/>
+          </a:xfrm>
+          <a:prstGeom prst="rect">
+            <a:avLst/>
+          </a:prstGeom>
+        </p:spPr>
         <p:txBody>
           <a:bodyPr/>
           <a:lstStyle/>
           <a:p>
             <a:r>
               <a:rPr lang="en-US" dirty="0"/>
-              <a:t>Do not use this for federal cases or criminal law. The legal validation corpus does not cover those areas, and results will be unreliable.</a:t>
-            </a:r>
-          </a:p>
-        </p:txBody>
-      </p:sp>
-      <p:sp>
-        <p:nvSpPr>
-          <p:cNvPr id="4" name="Slide Number Placeholder 3"/>
-          <p:cNvSpPr>
-            <a:spLocks noGrp="1"/>
-          </p:cNvSpPr>
-          <p:nvPr>
-            <p:ph type="sldNum" sz="quarter" idx="10"/>
-          </p:nvPr>
-        </p:nvSpPr>
-        <p:spPr/>
-        <p:txBody>
-          <a:bodyPr/>
-          <a:lstStyle/>
-          <a:p>
-            <a:fld id="{F7021451-1387-4CA6-816F-3879F97B5CBC}" type="slidenum">
-              <a:rPr lang="en-US"/>
-              <a:t>17</a:t>
-            </a:fld>
-            <a:endParaRPr lang="en-US"/>
+              <a:t>Once complete you will be brought the the overview screen, here you can review the Overview and Documents for relevant information and understanding. The next step in the process is the Verification Page.</a:t>
+            </a:r>
+          </a:p>
+          <a:p>
+            <a:endParaRPr lang="en-US" dirty="0"/>
+          </a:p>
+          <a:p>
+            <a:r>
+              <a:rPr lang="en-US" dirty="0"/>
+              <a:t>Here you will get a summary of the documents that were imported, it's important to review and make sure that they are all extracted.  </a:t>
+            </a:r>
+          </a:p>
+          <a:p>
+            <a:endParaRPr lang="en-US" dirty="0"/>
+          </a:p>
+          <a:p>
+            <a:r>
+              <a:rPr lang="en-US" dirty="0"/>
+              <a:t>You will want to review and remove any unneeded documents</a:t>
+            </a:r>
+          </a:p>
+          <a:p>
+            <a:endParaRPr lang="en-US" dirty="0"/>
+          </a:p>
+          <a:p>
+            <a:r>
+              <a:rPr lang="en-US" dirty="0"/>
+              <a:t>For some items that were not extracted originally, you will need to click the "Run OCR on ## Docs" button - this will use a special Google Vision API to extract the text from the remaining docs.  </a:t>
+            </a:r>
           </a:p>
         </p:txBody>
       </p:sp>
     </p:spTree>
     <p:extLst>
       <p:ext uri="{BB962C8B-B14F-4D97-AF65-F5344CB8AC3E}">
-        <p14:creationId xmlns:p14="http://schemas.microsoft.com/office/powerpoint/2010/main" val="1024086991"/>
+        <p14:creationId xmlns:p14="http://schemas.microsoft.com/office/powerpoint/2010/main" val="2730227845"/>
       </p:ext>
     </p:extLst>
   </p:cSld>
@@ -1079,7 +2235,21 @@
             <p:ph type="sldImg"/>
           </p:nvPr>
         </p:nvSpPr>
-        <p:spPr/>
+        <p:spPr>
+          <a:xfrm>
+            <a:off x="-171450" y="1143000"/>
+            <a:ext cx="5486400" cy="3086100"/>
+          </a:xfrm>
+          <a:prstGeom prst="rect">
+            <a:avLst/>
+          </a:prstGeom>
+          <a:noFill/>
+          <a:ln w="12700">
+            <a:solidFill>
+              <a:prstClr val="black"/>
+            </a:solidFill>
+          </a:ln>
+        </p:spPr>
       </p:sp>
       <p:sp>
         <p:nvSpPr>
@@ -1091,45 +2261,39 @@
             <p:ph type="body" idx="1"/>
           </p:nvPr>
         </p:nvSpPr>
-        <p:spPr/>
+        <p:spPr>
+          <a:xfrm>
+            <a:off x="514350" y="4400550"/>
+            <a:ext cx="4114800" cy="3600450"/>
+          </a:xfrm>
+          <a:prstGeom prst="rect">
+            <a:avLst/>
+          </a:prstGeom>
+        </p:spPr>
         <p:txBody>
           <a:bodyPr/>
           <a:lstStyle/>
           <a:p>
             <a:r>
               <a:rPr lang="en-US" dirty="0"/>
-              <a:t>We expect every attorney to log in and create a test case this week. Success is defined by using this on real client matters to reduce your intake time.</a:t>
-            </a:r>
-          </a:p>
-        </p:txBody>
-      </p:sp>
-      <p:sp>
-        <p:nvSpPr>
-          <p:cNvPr id="4" name="Slide Number Placeholder 3"/>
-          <p:cNvSpPr>
-            <a:spLocks noGrp="1"/>
-          </p:cNvSpPr>
-          <p:nvPr>
-            <p:ph type="sldNum" sz="quarter" idx="10"/>
-          </p:nvPr>
-        </p:nvSpPr>
-        <p:spPr/>
-        <p:txBody>
-          <a:bodyPr/>
-          <a:lstStyle/>
-          <a:p>
-            <a:fld id="{F7021451-1387-4CA6-816F-3879F97B5CBC}" type="slidenum">
-              <a:rPr lang="en-US"/>
-              <a:t>18</a:t>
-            </a:fld>
-            <a:endParaRPr lang="en-US"/>
+              <a:t>This is to show the documents that weren't extracted correctly.</a:t>
+            </a:r>
+          </a:p>
+          <a:p>
+            <a:endParaRPr lang="en-US" dirty="0"/>
+          </a:p>
+          <a:p>
+            <a:r>
+              <a:rPr lang="en-US" dirty="0"/>
+              <a:t>Once you run the OCR, it will update to show 10/10 or so.  you can click View/Edit to see what was extracted.</a:t>
+            </a:r>
           </a:p>
         </p:txBody>
       </p:sp>
     </p:spTree>
     <p:extLst>
       <p:ext uri="{BB962C8B-B14F-4D97-AF65-F5344CB8AC3E}">
-        <p14:creationId xmlns:p14="http://schemas.microsoft.com/office/powerpoint/2010/main" val="1024086991"/>
+        <p14:creationId xmlns:p14="http://schemas.microsoft.com/office/powerpoint/2010/main" val="1834960411"/>
       </p:ext>
     </p:extLst>
   </p:cSld>
@@ -5503,7 +6667,7 @@
           </p:nvPr>
         </p:nvPicPr>
         <p:blipFill rotWithShape="1">
-          <a:blip r:embed="rId2">
+          <a:blip r:embed="rId3">
             <a:extLst>
               <a:ext uri="{28A0092B-C50C-407E-A947-70E740481C1C}">
                 <a14:useLocalDpi xmlns:a14="http://schemas.microsoft.com/office/drawing/2010/main" val="0"/>
@@ -5582,7 +6746,7 @@
           <p:cNvPr id="3" name="Picture 2" descr="A screenshot of a computer&#10;&#10;AI-generated content may be incorrect.">
             <a:extLst>
               <a:ext uri="{FF2B5EF4-FFF2-40B4-BE49-F238E27FC236}">
-                <a16:creationId xmlns:a16="http://schemas.microsoft.com/office/drawing/2014/main" id="{1BBA9649-FCB6-EF01-B9F9-06206F78A285}"/>
+                <a16:creationId xmlns:a16="http://schemas.microsoft.com/office/drawing/2014/main" id="{70704360-527B-CD3D-CB6A-20BF12D05754}"/>
               </a:ext>
             </a:extLst>
           </p:cNvPr>
@@ -5592,8 +6756,8 @@
           <p:nvPr/>
         </p:nvPicPr>
         <p:blipFill>
-          <a:blip r:embed="rId3"/>
-          <a:srcRect t="18775" b="10008"/>
+          <a:blip r:embed="rId4"/>
+          <a:srcRect t="14363" b="14420"/>
           <a:stretch>
             <a:fillRect/>
           </a:stretch>
@@ -5611,7 +6775,7 @@
     </p:spTree>
     <p:extLst>
       <p:ext uri="{BB962C8B-B14F-4D97-AF65-F5344CB8AC3E}">
-        <p14:creationId xmlns:p14="http://schemas.microsoft.com/office/powerpoint/2010/main" val="2404876087"/>
+        <p14:creationId xmlns:p14="http://schemas.microsoft.com/office/powerpoint/2010/main" val="1975128909"/>
       </p:ext>
     </p:extLst>
   </p:cSld>
@@ -5759,7 +6923,7 @@
           </p:nvPr>
         </p:nvPicPr>
         <p:blipFill rotWithShape="1">
-          <a:blip r:embed="rId2">
+          <a:blip r:embed="rId3">
             <a:extLst>
               <a:ext uri="{28A0092B-C50C-407E-A947-70E740481C1C}">
                 <a14:useLocalDpi xmlns:a14="http://schemas.microsoft.com/office/drawing/2010/main" val="0"/>
@@ -5838,7 +7002,7 @@
           <p:cNvPr id="3" name="Picture 2" descr="A screenshot of a computer&#10;&#10;AI-generated content may be incorrect.">
             <a:extLst>
               <a:ext uri="{FF2B5EF4-FFF2-40B4-BE49-F238E27FC236}">
-                <a16:creationId xmlns:a16="http://schemas.microsoft.com/office/drawing/2014/main" id="{61E9AFA9-E1CE-E833-DDBF-8BB76123F4C6}"/>
+                <a16:creationId xmlns:a16="http://schemas.microsoft.com/office/drawing/2014/main" id="{1AEEA920-9C91-F17C-F60B-1C8612806B4C}"/>
               </a:ext>
             </a:extLst>
           </p:cNvPr>
@@ -5848,7 +7012,7 @@
           <p:nvPr/>
         </p:nvPicPr>
         <p:blipFill>
-          <a:blip r:embed="rId3"/>
+          <a:blip r:embed="rId4"/>
           <a:srcRect b="28783"/>
           <a:stretch>
             <a:fillRect/>
@@ -5867,7 +7031,7 @@
     </p:spTree>
     <p:extLst>
       <p:ext uri="{BB962C8B-B14F-4D97-AF65-F5344CB8AC3E}">
-        <p14:creationId xmlns:p14="http://schemas.microsoft.com/office/powerpoint/2010/main" val="2956878936"/>
+        <p14:creationId xmlns:p14="http://schemas.microsoft.com/office/powerpoint/2010/main" val="649173382"/>
       </p:ext>
     </p:extLst>
   </p:cSld>
@@ -6015,7 +7179,7 @@
           </p:nvPr>
         </p:nvPicPr>
         <p:blipFill rotWithShape="1">
-          <a:blip r:embed="rId2">
+          <a:blip r:embed="rId3">
             <a:extLst>
               <a:ext uri="{28A0092B-C50C-407E-A947-70E740481C1C}">
                 <a14:useLocalDpi xmlns:a14="http://schemas.microsoft.com/office/drawing/2010/main" val="0"/>
@@ -6094,7 +7258,7 @@
           <p:cNvPr id="3" name="Picture 2" descr="A screenshot of a computer&#10;&#10;AI-generated content may be incorrect.">
             <a:extLst>
               <a:ext uri="{FF2B5EF4-FFF2-40B4-BE49-F238E27FC236}">
-                <a16:creationId xmlns:a16="http://schemas.microsoft.com/office/drawing/2014/main" id="{129DBC85-E44B-99E5-1E2D-D9BABD706BC5}"/>
+                <a16:creationId xmlns:a16="http://schemas.microsoft.com/office/drawing/2014/main" id="{1BBA9649-FCB6-EF01-B9F9-06206F78A285}"/>
               </a:ext>
             </a:extLst>
           </p:cNvPr>
@@ -6104,8 +7268,8 @@
           <p:nvPr/>
         </p:nvPicPr>
         <p:blipFill>
-          <a:blip r:embed="rId3"/>
-          <a:srcRect t="24939" b="3844"/>
+          <a:blip r:embed="rId4"/>
+          <a:srcRect t="18775" b="10008"/>
           <a:stretch>
             <a:fillRect/>
           </a:stretch>
@@ -6123,7 +7287,7 @@
     </p:spTree>
     <p:extLst>
       <p:ext uri="{BB962C8B-B14F-4D97-AF65-F5344CB8AC3E}">
-        <p14:creationId xmlns:p14="http://schemas.microsoft.com/office/powerpoint/2010/main" val="2876685361"/>
+        <p14:creationId xmlns:p14="http://schemas.microsoft.com/office/powerpoint/2010/main" val="2404876087"/>
       </p:ext>
     </p:extLst>
   </p:cSld>
@@ -6271,7 +7435,7 @@
           </p:nvPr>
         </p:nvPicPr>
         <p:blipFill rotWithShape="1">
-          <a:blip r:embed="rId2">
+          <a:blip r:embed="rId3">
             <a:extLst>
               <a:ext uri="{28A0092B-C50C-407E-A947-70E740481C1C}">
                 <a14:useLocalDpi xmlns:a14="http://schemas.microsoft.com/office/drawing/2010/main" val="0"/>
@@ -6350,7 +7514,7 @@
           <p:cNvPr id="3" name="Picture 2" descr="A screenshot of a computer&#10;&#10;AI-generated content may be incorrect.">
             <a:extLst>
               <a:ext uri="{FF2B5EF4-FFF2-40B4-BE49-F238E27FC236}">
-                <a16:creationId xmlns:a16="http://schemas.microsoft.com/office/drawing/2014/main" id="{D0524FF6-0C80-9C03-E82D-B818DBD1235E}"/>
+                <a16:creationId xmlns:a16="http://schemas.microsoft.com/office/drawing/2014/main" id="{61E9AFA9-E1CE-E833-DDBF-8BB76123F4C6}"/>
               </a:ext>
             </a:extLst>
           </p:cNvPr>
@@ -6360,8 +7524,8 @@
           <p:nvPr/>
         </p:nvPicPr>
         <p:blipFill>
-          <a:blip r:embed="rId3"/>
-          <a:srcRect t="13329" b="15454"/>
+          <a:blip r:embed="rId4"/>
+          <a:srcRect b="28783"/>
           <a:stretch>
             <a:fillRect/>
           </a:stretch>
@@ -6379,7 +7543,7 @@
     </p:spTree>
     <p:extLst>
       <p:ext uri="{BB962C8B-B14F-4D97-AF65-F5344CB8AC3E}">
-        <p14:creationId xmlns:p14="http://schemas.microsoft.com/office/powerpoint/2010/main" val="3522372011"/>
+        <p14:creationId xmlns:p14="http://schemas.microsoft.com/office/powerpoint/2010/main" val="2956878936"/>
       </p:ext>
     </p:extLst>
   </p:cSld>
@@ -6397,20 +7561,20 @@
         <a:gradFill rotWithShape="1">
           <a:gsLst>
             <a:gs pos="0">
-              <a:schemeClr val="bg1">
+              <a:schemeClr val="bg2">
                 <a:tint val="94000"/>
                 <a:satMod val="80000"/>
                 <a:lumMod val="106000"/>
               </a:schemeClr>
             </a:gs>
             <a:gs pos="100000">
-              <a:schemeClr val="bg1">
+              <a:schemeClr val="bg2">
                 <a:shade val="80000"/>
               </a:schemeClr>
             </a:gs>
           </a:gsLst>
           <a:path path="circle">
-            <a:fillToRect l="50000" t="50000" r="50000" b="50000"/>
+            <a:fillToRect l="43000" r="43000" b="100000"/>
           </a:path>
         </a:gradFill>
         <a:effectLst/>
@@ -6432,10 +7596,10 @@
       </p:grpSpPr>
       <p:sp>
         <p:nvSpPr>
-          <p:cNvPr id="10" name="Rectangle 9">
+          <p:cNvPr id="8" name="Rectangle 7">
             <a:extLst>
               <a:ext uri="{FF2B5EF4-FFF2-40B4-BE49-F238E27FC236}">
-                <a16:creationId xmlns:a16="http://schemas.microsoft.com/office/drawing/2014/main" id="{23522FE7-5A29-4EF6-B1EF-2CA55748A772}"/>
+                <a16:creationId xmlns:a16="http://schemas.microsoft.com/office/drawing/2014/main" id="{6738F172-08B9-4BA5-B753-7D93472C0B11}"/>
               </a:ext>
               <a:ext uri="{C183D7F6-B498-43B3-948B-1728B52AA6E4}">
                 <adec:decorative xmlns:adec="http://schemas.microsoft.com/office/drawing/2017/decorative" val="1"/>
@@ -6505,10 +7669,10 @@
       </p:sp>
       <p:pic>
         <p:nvPicPr>
-          <p:cNvPr id="12" name="Picture 11">
+          <p:cNvPr id="10" name="Picture 9">
             <a:extLst>
               <a:ext uri="{FF2B5EF4-FFF2-40B4-BE49-F238E27FC236}">
-                <a16:creationId xmlns:a16="http://schemas.microsoft.com/office/drawing/2014/main" id="{C2192E09-EBC7-416C-B887-DFF915D7F43D}"/>
+                <a16:creationId xmlns:a16="http://schemas.microsoft.com/office/drawing/2014/main" id="{C900681B-C4FD-40B3-B5BC-C33231614C91}"/>
               </a:ext>
               <a:ext uri="{C183D7F6-B498-43B3-948B-1728B52AA6E4}">
                 <adec:decorative xmlns:adec="http://schemas.microsoft.com/office/drawing/2017/decorative" val="1"/>
@@ -6549,10 +7713,10 @@
       </p:pic>
       <p:cxnSp>
         <p:nvCxnSpPr>
-          <p:cNvPr id="14" name="Straight Connector 13">
+          <p:cNvPr id="12" name="Straight Connector 11">
             <a:extLst>
               <a:ext uri="{FF2B5EF4-FFF2-40B4-BE49-F238E27FC236}">
-                <a16:creationId xmlns:a16="http://schemas.microsoft.com/office/drawing/2014/main" id="{2924498D-E084-44BE-A196-CFCE35564350}"/>
+                <a16:creationId xmlns:a16="http://schemas.microsoft.com/office/drawing/2014/main" id="{FEAACD67-2FB5-4530-9B74-8D946F1CE9E3}"/>
               </a:ext>
               <a:ext uri="{C183D7F6-B498-43B3-948B-1728B52AA6E4}">
                 <adec:decorative xmlns:adec="http://schemas.microsoft.com/office/drawing/2017/decorative" val="1"/>
@@ -6601,249 +7765,46 @@
           </a:fontRef>
         </p:style>
       </p:cxnSp>
-      <p:cxnSp>
-        <p:nvCxnSpPr>
-          <p:cNvPr id="16" name="Straight Connector 15">
+      <p:pic>
+        <p:nvPicPr>
+          <p:cNvPr id="3" name="Picture 2" descr="A screenshot of a computer&#10;&#10;AI-generated content may be incorrect.">
             <a:extLst>
               <a:ext uri="{FF2B5EF4-FFF2-40B4-BE49-F238E27FC236}">
-                <a16:creationId xmlns:a16="http://schemas.microsoft.com/office/drawing/2014/main" id="{14C12901-9FCC-461E-A64A-89B4791235E9}"/>
-              </a:ext>
-              <a:ext uri="{C183D7F6-B498-43B3-948B-1728B52AA6E4}">
-                <adec:decorative xmlns:adec="http://schemas.microsoft.com/office/drawing/2017/decorative" val="1"/>
+                <a16:creationId xmlns:a16="http://schemas.microsoft.com/office/drawing/2014/main" id="{129DBC85-E44B-99E5-1E2D-D9BABD706BC5}"/>
               </a:ext>
             </a:extLst>
           </p:cNvPr>
-          <p:cNvCxnSpPr>
-            <a:cxnSpLocks noGrp="1" noRot="1" noChangeAspect="1" noMove="1" noResize="1" noEditPoints="1" noAdjustHandles="1" noChangeArrowheads="1" noChangeShapeType="1"/>
-          </p:cNvCxnSpPr>
-          <p:nvPr>
-            <p:extLst>
-              <p:ext uri="{386F3935-93C4-4BCD-93E2-E3B085C9AB24}">
-                <p16:designElem xmlns:p16="http://schemas.microsoft.com/office/powerpoint/2015/main" val="1"/>
-              </p:ext>
-            </p:extLst>
-          </p:nvPr>
-        </p:nvCxnSpPr>
-        <p:spPr>
-          <a:xfrm>
-            <a:off x="1090422" y="1385316"/>
-            <a:ext cx="7205641" cy="0"/>
-          </a:xfrm>
-          <a:prstGeom prst="line">
-            <a:avLst/>
-          </a:prstGeom>
-          <a:ln w="31750"/>
-        </p:spPr>
-        <p:style>
-          <a:lnRef idx="3">
-            <a:schemeClr val="accent1"/>
-          </a:lnRef>
-          <a:fillRef idx="0">
-            <a:schemeClr val="accent1"/>
-          </a:fillRef>
-          <a:effectRef idx="2">
-            <a:schemeClr val="accent1"/>
-          </a:effectRef>
-          <a:fontRef idx="minor">
-            <a:schemeClr val="tx1"/>
-          </a:fontRef>
-        </p:style>
-      </p:cxnSp>
-      <p:sp>
-        <p:nvSpPr>
-          <p:cNvPr id="2" name="Text 0"/>
-          <p:cNvSpPr/>
+          <p:cNvPicPr>
+            <a:picLocks noChangeAspect="1"/>
+          </p:cNvPicPr>
           <p:nvPr/>
-        </p:nvSpPr>
-        <p:spPr>
-          <a:xfrm>
-            <a:off x="1088684" y="603389"/>
-            <a:ext cx="7202456" cy="786926"/>
+        </p:nvPicPr>
+        <p:blipFill>
+          <a:blip r:embed="rId4"/>
+          <a:srcRect t="24939" b="3844"/>
+          <a:stretch>
+            <a:fillRect/>
+          </a:stretch>
+        </p:blipFill>
+        <p:spPr>
+          <a:xfrm>
+            <a:off x="20" y="10"/>
+            <a:ext cx="9143980" cy="4590997"/>
           </a:xfrm>
           <a:prstGeom prst="rect">
             <a:avLst/>
           </a:prstGeom>
         </p:spPr>
-        <p:txBody>
-          <a:bodyPr vert="horz" lIns="91440" tIns="45720" rIns="91440" bIns="45720" rtlCol="0" anchor="t">
-            <a:normAutofit/>
-          </a:bodyPr>
-          <a:lstStyle/>
-          <a:p>
-            <a:pPr marL="0" indent="0" defTabSz="914400">
-              <a:lnSpc>
-                <a:spcPct val="90000"/>
-              </a:lnSpc>
-              <a:spcBef>
-                <a:spcPct val="0"/>
-              </a:spcBef>
-              <a:spcAft>
-                <a:spcPts val="600"/>
-              </a:spcAft>
-            </a:pPr>
-            <a:r>
-              <a:rPr lang="en-US" sz="3200" b="0" i="0" kern="1200" cap="all" dirty="0">
-                <a:solidFill>
-                  <a:schemeClr val="tx1"/>
-                </a:solidFill>
-                <a:effectLst/>
-                <a:latin typeface="+mj-lt"/>
-                <a:ea typeface="+mj-ea"/>
-                <a:cs typeface="+mj-cs"/>
-              </a:rPr>
-              <a:t>Supported Documents &amp; Intake</a:t>
-            </a:r>
-          </a:p>
-        </p:txBody>
-      </p:sp>
-      <p:sp>
-        <p:nvSpPr>
-          <p:cNvPr id="3" name="Text 1"/>
-          <p:cNvSpPr/>
-          <p:nvPr/>
-        </p:nvSpPr>
-        <p:spPr>
-          <a:xfrm>
-            <a:off x="1088684" y="1511799"/>
-            <a:ext cx="7202456" cy="2587959"/>
-          </a:xfrm>
-          <a:prstGeom prst="rect">
-            <a:avLst/>
-          </a:prstGeom>
-        </p:spPr>
-        <p:txBody>
-          <a:bodyPr vert="horz" lIns="91440" tIns="45720" rIns="91440" bIns="45720" rtlCol="0" anchor="t">
-            <a:normAutofit/>
-          </a:bodyPr>
-          <a:lstStyle/>
-          <a:p>
-            <a:pPr marL="342900" indent="-228600" defTabSz="914400">
-              <a:lnSpc>
-                <a:spcPct val="120000"/>
-              </a:lnSpc>
-              <a:spcAft>
-                <a:spcPts val="600"/>
-              </a:spcAft>
-              <a:buClr>
-                <a:schemeClr val="accent1"/>
-              </a:buClr>
-              <a:buSzPct val="100000"/>
-              <a:buFont typeface="Arial" panose="020B0604020202020204" pitchFamily="34" charset="0"/>
-              <a:buChar char="•"/>
-            </a:pPr>
-            <a:r>
-              <a:rPr lang="en-US"/>
-              <a:t>Broad format support: PDF, DOCX, TXT, CSV, JPG, PNG, EML, HTML.</a:t>
-            </a:r>
-          </a:p>
-          <a:p>
-            <a:pPr marL="342900" indent="-228600" defTabSz="914400">
-              <a:lnSpc>
-                <a:spcPct val="120000"/>
-              </a:lnSpc>
-              <a:spcAft>
-                <a:spcPts val="600"/>
-              </a:spcAft>
-              <a:buClr>
-                <a:schemeClr val="accent1"/>
-              </a:buClr>
-              <a:buSzPct val="100000"/>
-              <a:buFont typeface="Arial" panose="020B0604020202020204" pitchFamily="34" charset="0"/>
-              <a:buChar char="•"/>
-            </a:pPr>
-            <a:r>
-              <a:rPr lang="en-US"/>
-              <a:t>Integrated OCR processes scanned documents using GPT-4o Vision.</a:t>
-            </a:r>
-          </a:p>
-          <a:p>
-            <a:pPr marL="342900" indent="-228600" defTabSz="914400">
-              <a:lnSpc>
-                <a:spcPct val="120000"/>
-              </a:lnSpc>
-              <a:spcAft>
-                <a:spcPts val="600"/>
-              </a:spcAft>
-              <a:buClr>
-                <a:schemeClr val="accent1"/>
-              </a:buClr>
-              <a:buSzPct val="100000"/>
-              <a:buFont typeface="Arial" panose="020B0604020202020204" pitchFamily="34" charset="0"/>
-              <a:buChar char="•"/>
-            </a:pPr>
-            <a:r>
-              <a:rPr lang="en-US"/>
-              <a:t>Clio integration imports matters and documents directly.</a:t>
-            </a:r>
-          </a:p>
-          <a:p>
-            <a:pPr marL="342900" indent="-228600" defTabSz="914400">
-              <a:lnSpc>
-                <a:spcPct val="120000"/>
-              </a:lnSpc>
-              <a:spcAft>
-                <a:spcPts val="600"/>
-              </a:spcAft>
-              <a:buClr>
-                <a:schemeClr val="accent1"/>
-              </a:buClr>
-              <a:buSzPct val="100000"/>
-              <a:buFont typeface="Arial" panose="020B0604020202020204" pitchFamily="34" charset="0"/>
-              <a:buChar char="•"/>
-            </a:pPr>
-            <a:r>
-              <a:rPr lang="en-US"/>
-              <a:t>Verification Hub fixes or excludes poor-quality documents</a:t>
-            </a:r>
-          </a:p>
-        </p:txBody>
-      </p:sp>
-      <p:sp>
-        <p:nvSpPr>
-          <p:cNvPr id="5" name="Text 3"/>
-          <p:cNvSpPr/>
-          <p:nvPr/>
-        </p:nvSpPr>
-        <p:spPr>
-          <a:xfrm>
-            <a:off x="804724" y="4183716"/>
-            <a:ext cx="7534552" cy="456528"/>
-          </a:xfrm>
-          <a:prstGeom prst="rect">
-            <a:avLst/>
-          </a:prstGeom>
-          <a:noFill/>
-          <a:ln/>
-        </p:spPr>
-        <p:txBody>
-          <a:bodyPr wrap="square" rtlCol="0" anchor="ctr"/>
-          <a:lstStyle/>
-          <a:p>
-            <a:pPr marL="0" indent="0" algn="ctr">
-              <a:spcAft>
-                <a:spcPts val="600"/>
-              </a:spcAft>
-              <a:buNone/>
-            </a:pPr>
-            <a:r>
-              <a:rPr lang="en-US" sz="2000" b="1" dirty="0">
-                <a:solidFill>
-                  <a:srgbClr val="181A31"/>
-                </a:solidFill>
-                <a:latin typeface="Calibri" pitchFamily="34" charset="0"/>
-                <a:ea typeface="Calibri" pitchFamily="34" charset="-122"/>
-                <a:cs typeface="Calibri" pitchFamily="34" charset="-120"/>
-              </a:rPr>
-              <a:t>Upload core documents first: intake forms, police reports, contracts</a:t>
-            </a:r>
-            <a:endParaRPr lang="en-US" sz="2000"/>
-          </a:p>
-        </p:txBody>
-      </p:sp>
+      </p:pic>
     </p:spTree>
+    <p:extLst>
+      <p:ext uri="{BB962C8B-B14F-4D97-AF65-F5344CB8AC3E}">
+        <p14:creationId xmlns:p14="http://schemas.microsoft.com/office/powerpoint/2010/main" val="2876685361"/>
+      </p:ext>
+    </p:extLst>
   </p:cSld>
   <p:clrMapOvr>
-    <a:overrideClrMapping bg1="dk1" tx1="lt1" bg2="dk2" tx2="lt2" accent1="accent1" accent2="accent2" accent3="accent3" accent4="accent4" accent5="accent5" accent6="accent6" hlink="hlink" folHlink="folHlink"/>
+    <a:masterClrMapping/>
   </p:clrMapOvr>
 </p:sld>
 </file>
@@ -6856,20 +7817,20 @@
         <a:gradFill rotWithShape="1">
           <a:gsLst>
             <a:gs pos="0">
-              <a:schemeClr val="bg1">
+              <a:schemeClr val="bg2">
                 <a:tint val="94000"/>
                 <a:satMod val="80000"/>
                 <a:lumMod val="106000"/>
               </a:schemeClr>
             </a:gs>
             <a:gs pos="100000">
-              <a:schemeClr val="bg1">
+              <a:schemeClr val="bg2">
                 <a:shade val="80000"/>
               </a:schemeClr>
             </a:gs>
           </a:gsLst>
           <a:path path="circle">
-            <a:fillToRect l="50000" t="50000" r="50000" b="50000"/>
+            <a:fillToRect l="43000" r="43000" b="100000"/>
           </a:path>
         </a:gradFill>
         <a:effectLst/>
@@ -6891,10 +7852,10 @@
       </p:grpSpPr>
       <p:sp>
         <p:nvSpPr>
-          <p:cNvPr id="10" name="Rectangle 9">
+          <p:cNvPr id="8" name="Rectangle 7">
             <a:extLst>
               <a:ext uri="{FF2B5EF4-FFF2-40B4-BE49-F238E27FC236}">
-                <a16:creationId xmlns:a16="http://schemas.microsoft.com/office/drawing/2014/main" id="{23522FE7-5A29-4EF6-B1EF-2CA55748A772}"/>
+                <a16:creationId xmlns:a16="http://schemas.microsoft.com/office/drawing/2014/main" id="{6738F172-08B9-4BA5-B753-7D93472C0B11}"/>
               </a:ext>
               <a:ext uri="{C183D7F6-B498-43B3-948B-1728B52AA6E4}">
                 <adec:decorative xmlns:adec="http://schemas.microsoft.com/office/drawing/2017/decorative" val="1"/>
@@ -6964,10 +7925,10 @@
       </p:sp>
       <p:pic>
         <p:nvPicPr>
-          <p:cNvPr id="12" name="Picture 11">
+          <p:cNvPr id="10" name="Picture 9">
             <a:extLst>
               <a:ext uri="{FF2B5EF4-FFF2-40B4-BE49-F238E27FC236}">
-                <a16:creationId xmlns:a16="http://schemas.microsoft.com/office/drawing/2014/main" id="{C2192E09-EBC7-416C-B887-DFF915D7F43D}"/>
+                <a16:creationId xmlns:a16="http://schemas.microsoft.com/office/drawing/2014/main" id="{C900681B-C4FD-40B3-B5BC-C33231614C91}"/>
               </a:ext>
               <a:ext uri="{C183D7F6-B498-43B3-948B-1728B52AA6E4}">
                 <adec:decorative xmlns:adec="http://schemas.microsoft.com/office/drawing/2017/decorative" val="1"/>
@@ -7008,10 +7969,10 @@
       </p:pic>
       <p:cxnSp>
         <p:nvCxnSpPr>
-          <p:cNvPr id="14" name="Straight Connector 13">
+          <p:cNvPr id="12" name="Straight Connector 11">
             <a:extLst>
               <a:ext uri="{FF2B5EF4-FFF2-40B4-BE49-F238E27FC236}">
-                <a16:creationId xmlns:a16="http://schemas.microsoft.com/office/drawing/2014/main" id="{2924498D-E084-44BE-A196-CFCE35564350}"/>
+                <a16:creationId xmlns:a16="http://schemas.microsoft.com/office/drawing/2014/main" id="{FEAACD67-2FB5-4530-9B74-8D946F1CE9E3}"/>
               </a:ext>
               <a:ext uri="{C183D7F6-B498-43B3-948B-1728B52AA6E4}">
                 <adec:decorative xmlns:adec="http://schemas.microsoft.com/office/drawing/2017/decorative" val="1"/>
@@ -7060,249 +8021,46 @@
           </a:fontRef>
         </p:style>
       </p:cxnSp>
-      <p:cxnSp>
-        <p:nvCxnSpPr>
-          <p:cNvPr id="16" name="Straight Connector 15">
+      <p:pic>
+        <p:nvPicPr>
+          <p:cNvPr id="3" name="Picture 2" descr="A screenshot of a computer&#10;&#10;AI-generated content may be incorrect.">
             <a:extLst>
               <a:ext uri="{FF2B5EF4-FFF2-40B4-BE49-F238E27FC236}">
-                <a16:creationId xmlns:a16="http://schemas.microsoft.com/office/drawing/2014/main" id="{14C12901-9FCC-461E-A64A-89B4791235E9}"/>
-              </a:ext>
-              <a:ext uri="{C183D7F6-B498-43B3-948B-1728B52AA6E4}">
-                <adec:decorative xmlns:adec="http://schemas.microsoft.com/office/drawing/2017/decorative" val="1"/>
+                <a16:creationId xmlns:a16="http://schemas.microsoft.com/office/drawing/2014/main" id="{680E4E30-D859-E7F1-E7A1-3AB2ACC61BBC}"/>
               </a:ext>
             </a:extLst>
           </p:cNvPr>
-          <p:cNvCxnSpPr>
-            <a:cxnSpLocks noGrp="1" noRot="1" noChangeAspect="1" noMove="1" noResize="1" noEditPoints="1" noAdjustHandles="1" noChangeArrowheads="1" noChangeShapeType="1"/>
-          </p:cNvCxnSpPr>
-          <p:nvPr>
-            <p:extLst>
-              <p:ext uri="{386F3935-93C4-4BCD-93E2-E3B085C9AB24}">
-                <p16:designElem xmlns:p16="http://schemas.microsoft.com/office/powerpoint/2015/main" val="1"/>
-              </p:ext>
-            </p:extLst>
-          </p:nvPr>
-        </p:nvCxnSpPr>
-        <p:spPr>
-          <a:xfrm>
-            <a:off x="1090422" y="1385316"/>
-            <a:ext cx="7205641" cy="0"/>
-          </a:xfrm>
-          <a:prstGeom prst="line">
-            <a:avLst/>
-          </a:prstGeom>
-          <a:ln w="31750"/>
-        </p:spPr>
-        <p:style>
-          <a:lnRef idx="3">
-            <a:schemeClr val="accent1"/>
-          </a:lnRef>
-          <a:fillRef idx="0">
-            <a:schemeClr val="accent1"/>
-          </a:fillRef>
-          <a:effectRef idx="2">
-            <a:schemeClr val="accent1"/>
-          </a:effectRef>
-          <a:fontRef idx="minor">
-            <a:schemeClr val="tx1"/>
-          </a:fontRef>
-        </p:style>
-      </p:cxnSp>
-      <p:sp>
-        <p:nvSpPr>
-          <p:cNvPr id="2" name="Text 0"/>
-          <p:cNvSpPr/>
+          <p:cNvPicPr>
+            <a:picLocks noChangeAspect="1"/>
+          </p:cNvPicPr>
           <p:nvPr/>
-        </p:nvSpPr>
-        <p:spPr>
-          <a:xfrm>
-            <a:off x="1088684" y="603389"/>
-            <a:ext cx="7202456" cy="786926"/>
+        </p:nvPicPr>
+        <p:blipFill>
+          <a:blip r:embed="rId4"/>
+          <a:srcRect t="23202" b="5581"/>
+          <a:stretch>
+            <a:fillRect/>
+          </a:stretch>
+        </p:blipFill>
+        <p:spPr>
+          <a:xfrm>
+            <a:off x="20" y="10"/>
+            <a:ext cx="9143980" cy="4590997"/>
           </a:xfrm>
           <a:prstGeom prst="rect">
             <a:avLst/>
           </a:prstGeom>
         </p:spPr>
-        <p:txBody>
-          <a:bodyPr vert="horz" lIns="91440" tIns="45720" rIns="91440" bIns="45720" rtlCol="0" anchor="t">
-            <a:normAutofit/>
-          </a:bodyPr>
-          <a:lstStyle/>
-          <a:p>
-            <a:pPr marL="0" indent="0" defTabSz="914400">
-              <a:lnSpc>
-                <a:spcPct val="90000"/>
-              </a:lnSpc>
-              <a:spcBef>
-                <a:spcPct val="0"/>
-              </a:spcBef>
-              <a:spcAft>
-                <a:spcPts val="600"/>
-              </a:spcAft>
-            </a:pPr>
-            <a:r>
-              <a:rPr lang="en-US" sz="3200" b="0" i="0" kern="1200" cap="all" dirty="0">
-                <a:solidFill>
-                  <a:schemeClr val="tx1"/>
-                </a:solidFill>
-                <a:effectLst/>
-                <a:latin typeface="+mj-lt"/>
-                <a:ea typeface="+mj-ea"/>
-                <a:cs typeface="+mj-cs"/>
-              </a:rPr>
-              <a:t>Findings Letters &amp; Citations</a:t>
-            </a:r>
-          </a:p>
-        </p:txBody>
-      </p:sp>
-      <p:sp>
-        <p:nvSpPr>
-          <p:cNvPr id="3" name="Text 1"/>
-          <p:cNvSpPr/>
-          <p:nvPr/>
-        </p:nvSpPr>
-        <p:spPr>
-          <a:xfrm>
-            <a:off x="1088684" y="1511799"/>
-            <a:ext cx="7202456" cy="2587959"/>
-          </a:xfrm>
-          <a:prstGeom prst="rect">
-            <a:avLst/>
-          </a:prstGeom>
-        </p:spPr>
-        <p:txBody>
-          <a:bodyPr vert="horz" lIns="91440" tIns="45720" rIns="91440" bIns="45720" rtlCol="0" anchor="t">
-            <a:normAutofit/>
-          </a:bodyPr>
-          <a:lstStyle/>
-          <a:p>
-            <a:pPr marL="342900" indent="-228600" defTabSz="914400">
-              <a:lnSpc>
-                <a:spcPct val="120000"/>
-              </a:lnSpc>
-              <a:spcAft>
-                <a:spcPts val="600"/>
-              </a:spcAft>
-              <a:buClr>
-                <a:schemeClr val="accent1"/>
-              </a:buClr>
-              <a:buSzPct val="100000"/>
-              <a:buFont typeface="Arial" panose="020B0604020202020204" pitchFamily="34" charset="0"/>
-              <a:buChar char="•"/>
-            </a:pPr>
-            <a:r>
-              <a:rPr lang="en-US"/>
-              <a:t>Professional format: Structured, attorney-style letters.</a:t>
-            </a:r>
-          </a:p>
-          <a:p>
-            <a:pPr marL="342900" indent="-228600" defTabSz="914400">
-              <a:lnSpc>
-                <a:spcPct val="120000"/>
-              </a:lnSpc>
-              <a:spcAft>
-                <a:spcPts val="600"/>
-              </a:spcAft>
-              <a:buClr>
-                <a:schemeClr val="accent1"/>
-              </a:buClr>
-              <a:buSzPct val="100000"/>
-              <a:buFont typeface="Arial" panose="020B0604020202020204" pitchFamily="34" charset="0"/>
-              <a:buChar char="•"/>
-            </a:pPr>
-            <a:r>
-              <a:rPr lang="en-US"/>
-              <a:t>Source linking: Every fact includes inline citation (e.g., [Client_Intake.pdf]).</a:t>
-            </a:r>
-          </a:p>
-          <a:p>
-            <a:pPr marL="342900" indent="-228600" defTabSz="914400">
-              <a:lnSpc>
-                <a:spcPct val="120000"/>
-              </a:lnSpc>
-              <a:spcAft>
-                <a:spcPts val="600"/>
-              </a:spcAft>
-              <a:buClr>
-                <a:schemeClr val="accent1"/>
-              </a:buClr>
-              <a:buSzPct val="100000"/>
-              <a:buFont typeface="Arial" panose="020B0604020202020204" pitchFamily="34" charset="0"/>
-              <a:buChar char="•"/>
-            </a:pPr>
-            <a:r>
-              <a:rPr lang="en-US"/>
-              <a:t>Instant verification: Click any citation to view the original source.</a:t>
-            </a:r>
-          </a:p>
-          <a:p>
-            <a:pPr marL="342900" indent="-228600" defTabSz="914400">
-              <a:lnSpc>
-                <a:spcPct val="120000"/>
-              </a:lnSpc>
-              <a:spcAft>
-                <a:spcPts val="600"/>
-              </a:spcAft>
-              <a:buClr>
-                <a:schemeClr val="accent1"/>
-              </a:buClr>
-              <a:buSzPct val="100000"/>
-              <a:buFont typeface="Arial" panose="020B0604020202020204" pitchFamily="34" charset="0"/>
-              <a:buChar char="•"/>
-            </a:pPr>
-            <a:r>
-              <a:rPr lang="en-US"/>
-              <a:t>Draft status: All outputs designed for attorney review</a:t>
-            </a:r>
-          </a:p>
-        </p:txBody>
-      </p:sp>
-      <p:sp>
-        <p:nvSpPr>
-          <p:cNvPr id="5" name="Text 3"/>
-          <p:cNvSpPr/>
-          <p:nvPr/>
-        </p:nvSpPr>
-        <p:spPr>
-          <a:xfrm>
-            <a:off x="758279" y="3963296"/>
-            <a:ext cx="7664825" cy="548640"/>
-          </a:xfrm>
-          <a:prstGeom prst="rect">
-            <a:avLst/>
-          </a:prstGeom>
-          <a:noFill/>
-          <a:ln/>
-        </p:spPr>
-        <p:txBody>
-          <a:bodyPr wrap="square" rtlCol="0" anchor="ctr"/>
-          <a:lstStyle/>
-          <a:p>
-            <a:pPr marL="0" indent="0" algn="ctr">
-              <a:spcAft>
-                <a:spcPts val="600"/>
-              </a:spcAft>
-              <a:buNone/>
-            </a:pPr>
-            <a:r>
-              <a:rPr lang="en-US" sz="2200" b="1" dirty="0">
-                <a:solidFill>
-                  <a:srgbClr val="181A31"/>
-                </a:solidFill>
-                <a:latin typeface="Calibri" pitchFamily="34" charset="0"/>
-                <a:ea typeface="Calibri" pitchFamily="34" charset="-122"/>
-                <a:cs typeface="Calibri" pitchFamily="34" charset="-120"/>
-              </a:rPr>
-              <a:t>You can audit the AI's work by clicking the citations.</a:t>
-            </a:r>
-            <a:endParaRPr lang="en-US" sz="2200"/>
-          </a:p>
-        </p:txBody>
-      </p:sp>
+      </p:pic>
     </p:spTree>
+    <p:extLst>
+      <p:ext uri="{BB962C8B-B14F-4D97-AF65-F5344CB8AC3E}">
+        <p14:creationId xmlns:p14="http://schemas.microsoft.com/office/powerpoint/2010/main" val="3920240266"/>
+      </p:ext>
+    </p:extLst>
   </p:cSld>
   <p:clrMapOvr>
-    <a:overrideClrMapping bg1="dk1" tx1="lt1" bg2="dk2" tx2="lt2" accent1="accent1" accent2="accent2" accent3="accent3" accent4="accent4" accent5="accent5" accent6="accent6" hlink="hlink" folHlink="folHlink"/>
+    <a:masterClrMapping/>
   </p:clrMapOvr>
 </p:sld>
 </file>
@@ -7315,20 +8073,20 @@
         <a:gradFill rotWithShape="1">
           <a:gsLst>
             <a:gs pos="0">
-              <a:schemeClr val="bg1">
+              <a:schemeClr val="bg2">
                 <a:tint val="94000"/>
                 <a:satMod val="80000"/>
                 <a:lumMod val="106000"/>
               </a:schemeClr>
             </a:gs>
             <a:gs pos="100000">
-              <a:schemeClr val="bg1">
+              <a:schemeClr val="bg2">
                 <a:shade val="80000"/>
               </a:schemeClr>
             </a:gs>
           </a:gsLst>
           <a:path path="circle">
-            <a:fillToRect l="50000" t="50000" r="50000" b="50000"/>
+            <a:fillToRect l="43000" r="43000" b="100000"/>
           </a:path>
         </a:gradFill>
         <a:effectLst/>
@@ -7350,10 +8108,10 @@
       </p:grpSpPr>
       <p:sp>
         <p:nvSpPr>
-          <p:cNvPr id="10" name="Rectangle 9">
+          <p:cNvPr id="8" name="Rectangle 7">
             <a:extLst>
               <a:ext uri="{FF2B5EF4-FFF2-40B4-BE49-F238E27FC236}">
-                <a16:creationId xmlns:a16="http://schemas.microsoft.com/office/drawing/2014/main" id="{23522FE7-5A29-4EF6-B1EF-2CA55748A772}"/>
+                <a16:creationId xmlns:a16="http://schemas.microsoft.com/office/drawing/2014/main" id="{6738F172-08B9-4BA5-B753-7D93472C0B11}"/>
               </a:ext>
               <a:ext uri="{C183D7F6-B498-43B3-948B-1728B52AA6E4}">
                 <adec:decorative xmlns:adec="http://schemas.microsoft.com/office/drawing/2017/decorative" val="1"/>
@@ -7423,10 +8181,10 @@
       </p:sp>
       <p:pic>
         <p:nvPicPr>
-          <p:cNvPr id="12" name="Picture 11">
+          <p:cNvPr id="10" name="Picture 9">
             <a:extLst>
               <a:ext uri="{FF2B5EF4-FFF2-40B4-BE49-F238E27FC236}">
-                <a16:creationId xmlns:a16="http://schemas.microsoft.com/office/drawing/2014/main" id="{C2192E09-EBC7-416C-B887-DFF915D7F43D}"/>
+                <a16:creationId xmlns:a16="http://schemas.microsoft.com/office/drawing/2014/main" id="{C900681B-C4FD-40B3-B5BC-C33231614C91}"/>
               </a:ext>
               <a:ext uri="{C183D7F6-B498-43B3-948B-1728B52AA6E4}">
                 <adec:decorative xmlns:adec="http://schemas.microsoft.com/office/drawing/2017/decorative" val="1"/>
@@ -7467,10 +8225,10 @@
       </p:pic>
       <p:cxnSp>
         <p:nvCxnSpPr>
-          <p:cNvPr id="14" name="Straight Connector 13">
+          <p:cNvPr id="12" name="Straight Connector 11">
             <a:extLst>
               <a:ext uri="{FF2B5EF4-FFF2-40B4-BE49-F238E27FC236}">
-                <a16:creationId xmlns:a16="http://schemas.microsoft.com/office/drawing/2014/main" id="{2924498D-E084-44BE-A196-CFCE35564350}"/>
+                <a16:creationId xmlns:a16="http://schemas.microsoft.com/office/drawing/2014/main" id="{FEAACD67-2FB5-4530-9B74-8D946F1CE9E3}"/>
               </a:ext>
               <a:ext uri="{C183D7F6-B498-43B3-948B-1728B52AA6E4}">
                 <adec:decorative xmlns:adec="http://schemas.microsoft.com/office/drawing/2017/decorative" val="1"/>
@@ -7519,249 +8277,46 @@
           </a:fontRef>
         </p:style>
       </p:cxnSp>
-      <p:cxnSp>
-        <p:nvCxnSpPr>
-          <p:cNvPr id="16" name="Straight Connector 15">
+      <p:pic>
+        <p:nvPicPr>
+          <p:cNvPr id="3" name="Picture 2" descr="A screenshot of a computer&#10;&#10;AI-generated content may be incorrect.">
             <a:extLst>
               <a:ext uri="{FF2B5EF4-FFF2-40B4-BE49-F238E27FC236}">
-                <a16:creationId xmlns:a16="http://schemas.microsoft.com/office/drawing/2014/main" id="{14C12901-9FCC-461E-A64A-89B4791235E9}"/>
-              </a:ext>
-              <a:ext uri="{C183D7F6-B498-43B3-948B-1728B52AA6E4}">
-                <adec:decorative xmlns:adec="http://schemas.microsoft.com/office/drawing/2017/decorative" val="1"/>
+                <a16:creationId xmlns:a16="http://schemas.microsoft.com/office/drawing/2014/main" id="{D0524FF6-0C80-9C03-E82D-B818DBD1235E}"/>
               </a:ext>
             </a:extLst>
           </p:cNvPr>
-          <p:cNvCxnSpPr>
-            <a:cxnSpLocks noGrp="1" noRot="1" noChangeAspect="1" noMove="1" noResize="1" noEditPoints="1" noAdjustHandles="1" noChangeArrowheads="1" noChangeShapeType="1"/>
-          </p:cNvCxnSpPr>
-          <p:nvPr>
-            <p:extLst>
-              <p:ext uri="{386F3935-93C4-4BCD-93E2-E3B085C9AB24}">
-                <p16:designElem xmlns:p16="http://schemas.microsoft.com/office/powerpoint/2015/main" val="1"/>
-              </p:ext>
-            </p:extLst>
-          </p:nvPr>
-        </p:nvCxnSpPr>
-        <p:spPr>
-          <a:xfrm>
-            <a:off x="1090422" y="1385316"/>
-            <a:ext cx="7205641" cy="0"/>
-          </a:xfrm>
-          <a:prstGeom prst="line">
-            <a:avLst/>
-          </a:prstGeom>
-          <a:ln w="31750"/>
-        </p:spPr>
-        <p:style>
-          <a:lnRef idx="3">
-            <a:schemeClr val="accent1"/>
-          </a:lnRef>
-          <a:fillRef idx="0">
-            <a:schemeClr val="accent1"/>
-          </a:fillRef>
-          <a:effectRef idx="2">
-            <a:schemeClr val="accent1"/>
-          </a:effectRef>
-          <a:fontRef idx="minor">
-            <a:schemeClr val="tx1"/>
-          </a:fontRef>
-        </p:style>
-      </p:cxnSp>
-      <p:sp>
-        <p:nvSpPr>
-          <p:cNvPr id="2" name="Text 0"/>
-          <p:cNvSpPr/>
+          <p:cNvPicPr>
+            <a:picLocks noChangeAspect="1"/>
+          </p:cNvPicPr>
           <p:nvPr/>
-        </p:nvSpPr>
-        <p:spPr>
-          <a:xfrm>
-            <a:off x="1088684" y="603389"/>
-            <a:ext cx="7202456" cy="786926"/>
+        </p:nvPicPr>
+        <p:blipFill>
+          <a:blip r:embed="rId4"/>
+          <a:srcRect t="13329" b="15454"/>
+          <a:stretch>
+            <a:fillRect/>
+          </a:stretch>
+        </p:blipFill>
+        <p:spPr>
+          <a:xfrm>
+            <a:off x="20" y="10"/>
+            <a:ext cx="9143980" cy="4590997"/>
           </a:xfrm>
           <a:prstGeom prst="rect">
             <a:avLst/>
           </a:prstGeom>
         </p:spPr>
-        <p:txBody>
-          <a:bodyPr vert="horz" lIns="91440" tIns="45720" rIns="91440" bIns="45720" rtlCol="0" anchor="t">
-            <a:normAutofit/>
-          </a:bodyPr>
-          <a:lstStyle/>
-          <a:p>
-            <a:pPr marL="0" indent="0" defTabSz="914400">
-              <a:lnSpc>
-                <a:spcPct val="90000"/>
-              </a:lnSpc>
-              <a:spcBef>
-                <a:spcPct val="0"/>
-              </a:spcBef>
-              <a:spcAft>
-                <a:spcPts val="600"/>
-              </a:spcAft>
-            </a:pPr>
-            <a:r>
-              <a:rPr lang="en-US" sz="3200" b="0" i="0" kern="1200" cap="all" dirty="0">
-                <a:solidFill>
-                  <a:schemeClr val="tx1"/>
-                </a:solidFill>
-                <a:effectLst/>
-                <a:latin typeface="+mj-lt"/>
-                <a:ea typeface="+mj-ea"/>
-                <a:cs typeface="+mj-cs"/>
-              </a:rPr>
-              <a:t>Quality, Accuracy &amp; Control</a:t>
-            </a:r>
-          </a:p>
-        </p:txBody>
-      </p:sp>
-      <p:sp>
-        <p:nvSpPr>
-          <p:cNvPr id="3" name="Text 1"/>
-          <p:cNvSpPr/>
-          <p:nvPr/>
-        </p:nvSpPr>
-        <p:spPr>
-          <a:xfrm>
-            <a:off x="1088684" y="1511799"/>
-            <a:ext cx="7202456" cy="2587959"/>
-          </a:xfrm>
-          <a:prstGeom prst="rect">
-            <a:avLst/>
-          </a:prstGeom>
-        </p:spPr>
-        <p:txBody>
-          <a:bodyPr vert="horz" lIns="91440" tIns="45720" rIns="91440" bIns="45720" rtlCol="0" anchor="t">
-            <a:normAutofit/>
-          </a:bodyPr>
-          <a:lstStyle/>
-          <a:p>
-            <a:pPr marL="342900" indent="-228600" defTabSz="914400">
-              <a:lnSpc>
-                <a:spcPct val="120000"/>
-              </a:lnSpc>
-              <a:spcAft>
-                <a:spcPts val="600"/>
-              </a:spcAft>
-              <a:buClr>
-                <a:schemeClr val="accent1"/>
-              </a:buClr>
-              <a:buSzPct val="100000"/>
-              <a:buFont typeface="Arial" panose="020B0604020202020204" pitchFamily="34" charset="0"/>
-              <a:buChar char="•"/>
-            </a:pPr>
-            <a:r>
-              <a:rPr lang="en-US"/>
-              <a:t>Verified legal corpus: AI checks citations against 51 FL + 42 NM statutes.</a:t>
-            </a:r>
-          </a:p>
-          <a:p>
-            <a:pPr marL="342900" indent="-228600" defTabSz="914400">
-              <a:lnSpc>
-                <a:spcPct val="120000"/>
-              </a:lnSpc>
-              <a:spcAft>
-                <a:spcPts val="600"/>
-              </a:spcAft>
-              <a:buClr>
-                <a:schemeClr val="accent1"/>
-              </a:buClr>
-              <a:buSzPct val="100000"/>
-              <a:buFont typeface="Arial" panose="020B0604020202020204" pitchFamily="34" charset="0"/>
-              <a:buChar char="•"/>
-            </a:pPr>
-            <a:r>
-              <a:rPr lang="en-US"/>
-              <a:t>Hallucination guardrails: Citations rejected if not in verified corpus.</a:t>
-            </a:r>
-          </a:p>
-          <a:p>
-            <a:pPr marL="342900" indent="-228600" defTabSz="914400">
-              <a:lnSpc>
-                <a:spcPct val="120000"/>
-              </a:lnSpc>
-              <a:spcAft>
-                <a:spcPts val="600"/>
-              </a:spcAft>
-              <a:buClr>
-                <a:schemeClr val="accent1"/>
-              </a:buClr>
-              <a:buSzPct val="100000"/>
-              <a:buFont typeface="Arial" panose="020B0604020202020204" pitchFamily="34" charset="0"/>
-              <a:buChar char="•"/>
-            </a:pPr>
-            <a:r>
-              <a:rPr lang="en-US"/>
-              <a:t>Jurisdiction limits: Optimized only for Florida and New Mexico civil litigation.</a:t>
-            </a:r>
-          </a:p>
-          <a:p>
-            <a:pPr marL="342900" indent="-228600" defTabSz="914400">
-              <a:lnSpc>
-                <a:spcPct val="120000"/>
-              </a:lnSpc>
-              <a:spcAft>
-                <a:spcPts val="600"/>
-              </a:spcAft>
-              <a:buClr>
-                <a:schemeClr val="accent1"/>
-              </a:buClr>
-              <a:buSzPct val="100000"/>
-              <a:buFont typeface="Arial" panose="020B0604020202020204" pitchFamily="34" charset="0"/>
-              <a:buChar char="•"/>
-            </a:pPr>
-            <a:r>
-              <a:rPr lang="en-US"/>
-              <a:t>Attorney responsibility: You verify cited statutes are strategically applicable</a:t>
-            </a:r>
-          </a:p>
-        </p:txBody>
-      </p:sp>
-      <p:sp>
-        <p:nvSpPr>
-          <p:cNvPr id="5" name="Text 3"/>
-          <p:cNvSpPr/>
-          <p:nvPr/>
-        </p:nvSpPr>
-        <p:spPr>
-          <a:xfrm>
-            <a:off x="1611761" y="4137660"/>
-            <a:ext cx="5920478" cy="548640"/>
-          </a:xfrm>
-          <a:prstGeom prst="rect">
-            <a:avLst/>
-          </a:prstGeom>
-          <a:noFill/>
-          <a:ln/>
-        </p:spPr>
-        <p:txBody>
-          <a:bodyPr wrap="square" rtlCol="0" anchor="ctr"/>
-          <a:lstStyle/>
-          <a:p>
-            <a:pPr marL="0" indent="0" algn="ctr">
-              <a:spcAft>
-                <a:spcPts val="600"/>
-              </a:spcAft>
-              <a:buNone/>
-            </a:pPr>
-            <a:r>
-              <a:rPr lang="en-US" sz="2200" b="1" dirty="0">
-                <a:solidFill>
-                  <a:srgbClr val="181A31"/>
-                </a:solidFill>
-                <a:latin typeface="Calibri" pitchFamily="34" charset="0"/>
-                <a:ea typeface="Calibri" pitchFamily="34" charset="-122"/>
-                <a:cs typeface="Calibri" pitchFamily="34" charset="-120"/>
-              </a:rPr>
-              <a:t>You are the final decision-maker.</a:t>
-            </a:r>
-            <a:endParaRPr lang="en-US" sz="2200"/>
-          </a:p>
-        </p:txBody>
-      </p:sp>
+      </p:pic>
     </p:spTree>
+    <p:extLst>
+      <p:ext uri="{BB962C8B-B14F-4D97-AF65-F5344CB8AC3E}">
+        <p14:creationId xmlns:p14="http://schemas.microsoft.com/office/powerpoint/2010/main" val="3522372011"/>
+      </p:ext>
+    </p:extLst>
   </p:cSld>
   <p:clrMapOvr>
-    <a:overrideClrMapping bg1="dk1" tx1="lt1" bg2="dk2" tx2="lt2" accent1="accent1" accent2="accent2" accent3="accent3" accent4="accent4" accent5="accent5" accent6="accent6" hlink="hlink" folHlink="folHlink"/>
+    <a:masterClrMapping/>
   </p:clrMapOvr>
 </p:sld>
 </file>
@@ -8068,7 +8623,7 @@
                 <a:ea typeface="+mj-ea"/>
                 <a:cs typeface="+mj-cs"/>
               </a:rPr>
-              <a:t>What Is Rolling Out Now</a:t>
+              <a:t>Supported Documents &amp; Intake</a:t>
             </a:r>
           </a:p>
         </p:txBody>
@@ -8110,7 +8665,7 @@
             </a:pPr>
             <a:r>
               <a:rPr lang="en-US"/>
-              <a:t>Live jurisdictions: Florida and New Mexico civil litigation.</a:t>
+              <a:t>Broad format support: PDF, DOCX, TXT, CSV, JPG, PNG, EML, HTML.</a:t>
             </a:r>
           </a:p>
           <a:p>
@@ -8130,7 +8685,7 @@
             </a:pPr>
             <a:r>
               <a:rPr lang="en-US"/>
-              <a:t>Included areas: Consumer protection, landlord-tenant, foreclosure, construction, contracts.</a:t>
+              <a:t>Integrated OCR processes scanned documents using GPT-4o Vision.</a:t>
             </a:r>
           </a:p>
           <a:p>
@@ -8150,7 +8705,7 @@
             </a:pPr>
             <a:r>
               <a:rPr lang="en-US"/>
-              <a:t>Explicit exclusions: No federal claims, criminal law, immigration, bankruptcy, family law.</a:t>
+              <a:t>Clio integration imports matters and documents directly.</a:t>
             </a:r>
           </a:p>
           <a:p>
@@ -8170,7 +8725,7 @@
             </a:pPr>
             <a:r>
               <a:rPr lang="en-US"/>
-              <a:t>Status: Version 3.1.0 is live and available for immediate use</a:t>
+              <a:t>Verification Hub fixes or excludes poor-quality documents</a:t>
             </a:r>
           </a:p>
         </p:txBody>
@@ -8183,8 +8738,8 @@
         </p:nvSpPr>
         <p:spPr>
           <a:xfrm>
-            <a:off x="1503179" y="4362562"/>
-            <a:ext cx="6137639" cy="414842"/>
+            <a:off x="804724" y="4631589"/>
+            <a:ext cx="7534552" cy="456528"/>
           </a:xfrm>
           <a:prstGeom prst="rect">
             <a:avLst/>
@@ -8204,16 +8759,13 @@
             </a:pPr>
             <a:r>
               <a:rPr lang="en-US" sz="2000" b="1" dirty="0">
-                <a:solidFill>
-                  <a:srgbClr val="181A31"/>
-                </a:solidFill>
                 <a:latin typeface="Calibri" pitchFamily="34" charset="0"/>
                 <a:ea typeface="Calibri" pitchFamily="34" charset="-122"/>
                 <a:cs typeface="Calibri" pitchFamily="34" charset="-120"/>
               </a:rPr>
-              <a:t>Do not use for federal cases or criminal law.</a:t>
-            </a:r>
-            <a:endParaRPr lang="en-US" sz="2000"/>
+              <a:t>Upload core documents first: intake forms, police reports, contracts</a:t>
+            </a:r>
+            <a:endParaRPr lang="en-US" sz="2000" dirty="0"/>
           </a:p>
         </p:txBody>
       </p:sp>
@@ -8527,7 +9079,7 @@
                 <a:ea typeface="+mj-ea"/>
                 <a:cs typeface="+mj-cs"/>
               </a:rPr>
-              <a:t>Adoption Plan &amp; Expectations</a:t>
+              <a:t>Findings Letters &amp; Citations</a:t>
             </a:r>
           </a:p>
         </p:txBody>
@@ -8569,7 +9121,7 @@
             </a:pPr>
             <a:r>
               <a:rPr lang="en-US"/>
-              <a:t>Immediate access: Your accounts are created; credentials distributed.</a:t>
+              <a:t>Professional format: Structured, attorney-style letters.</a:t>
             </a:r>
           </a:p>
           <a:p>
@@ -8589,7 +9141,7 @@
             </a:pPr>
             <a:r>
               <a:rPr lang="en-US"/>
-              <a:t>Resources: One-page Quickstart Guide emailed to you.</a:t>
+              <a:t>Source linking: Every fact includes inline citation (e.g., [Client_Intake.pdf]).</a:t>
             </a:r>
           </a:p>
           <a:p>
@@ -8609,7 +9161,7 @@
             </a:pPr>
             <a:r>
               <a:rPr lang="en-US"/>
-              <a:t>Training: Live Q&amp;A session next Wednesday for questions.</a:t>
+              <a:t>Instant verification: Click any citation to view the original source.</a:t>
             </a:r>
           </a:p>
           <a:p>
@@ -8629,7 +9181,7 @@
             </a:pPr>
             <a:r>
               <a:rPr lang="en-US"/>
-              <a:t>Support: Dedicated channels for technical issues and feature requests</a:t>
+              <a:t>Draft status: All outputs designed for attorney review</a:t>
             </a:r>
           </a:p>
         </p:txBody>
@@ -8642,8 +9194,8 @@
         </p:nvSpPr>
         <p:spPr>
           <a:xfrm>
-            <a:off x="1463177" y="4114800"/>
-            <a:ext cx="6217646" cy="403412"/>
+            <a:off x="739587" y="4594062"/>
+            <a:ext cx="7664825" cy="548640"/>
           </a:xfrm>
           <a:prstGeom prst="rect">
             <a:avLst/>
@@ -8662,17 +9214,14 @@
               <a:buNone/>
             </a:pPr>
             <a:r>
-              <a:rPr lang="en-US" sz="2000" b="1" dirty="0">
-                <a:solidFill>
-                  <a:srgbClr val="181A31"/>
-                </a:solidFill>
+              <a:rPr lang="en-US" sz="2200" b="1" dirty="0">
                 <a:latin typeface="Calibri" pitchFamily="34" charset="0"/>
                 <a:ea typeface="Calibri" pitchFamily="34" charset="-122"/>
                 <a:cs typeface="Calibri" pitchFamily="34" charset="-120"/>
               </a:rPr>
-              <a:t>Expectation: Log in and create a test case this week</a:t>
-            </a:r>
-            <a:endParaRPr lang="en-US" sz="2000"/>
+              <a:t>You can audit the AI's work by clicking the citations.</a:t>
+            </a:r>
+            <a:endParaRPr lang="en-US" sz="2200" dirty="0"/>
           </a:p>
         </p:txBody>
       </p:sp>
@@ -8686,12 +9235,28 @@
 
 <file path=ppt/slides/slide19.xml><?xml version="1.0" encoding="utf-8"?>
 <p:sld xmlns:a="http://schemas.openxmlformats.org/drawingml/2006/main" xmlns:r="http://schemas.openxmlformats.org/officeDocument/2006/relationships" xmlns:p="http://schemas.openxmlformats.org/presentationml/2006/main">
-  <p:cSld name="Slide 10">
+  <p:cSld>
     <p:bg>
       <p:bgPr>
-        <a:solidFill>
-          <a:srgbClr val="FFFFFF"/>
-        </a:solidFill>
+        <a:gradFill rotWithShape="1">
+          <a:gsLst>
+            <a:gs pos="0">
+              <a:schemeClr val="bg1">
+                <a:tint val="94000"/>
+                <a:satMod val="80000"/>
+                <a:lumMod val="106000"/>
+              </a:schemeClr>
+            </a:gs>
+            <a:gs pos="100000">
+              <a:schemeClr val="bg1">
+                <a:shade val="80000"/>
+              </a:schemeClr>
+            </a:gs>
+          </a:gsLst>
+          <a:path path="circle">
+            <a:fillToRect l="50000" t="50000" r="50000" b="50000"/>
+          </a:path>
+        </a:gradFill>
         <a:effectLst/>
       </p:bgPr>
     </p:bg>
@@ -8711,14 +9276,382 @@
       </p:grpSpPr>
       <p:sp>
         <p:nvSpPr>
+          <p:cNvPr id="10" name="Rectangle 9">
+            <a:extLst>
+              <a:ext uri="{FF2B5EF4-FFF2-40B4-BE49-F238E27FC236}">
+                <a16:creationId xmlns:a16="http://schemas.microsoft.com/office/drawing/2014/main" id="{23522FE7-5A29-4EF6-B1EF-2CA55748A772}"/>
+              </a:ext>
+              <a:ext uri="{C183D7F6-B498-43B3-948B-1728B52AA6E4}">
+                <adec:decorative xmlns:adec="http://schemas.microsoft.com/office/drawing/2017/decorative" val="1"/>
+              </a:ext>
+            </a:extLst>
+          </p:cNvPr>
+          <p:cNvSpPr>
+            <a:spLocks noGrp="1" noRot="1" noChangeAspect="1" noMove="1" noResize="1" noEditPoints="1" noAdjustHandles="1" noChangeArrowheads="1" noChangeShapeType="1" noTextEdit="1"/>
+          </p:cNvSpPr>
+          <p:nvPr>
+            <p:extLst>
+              <p:ext uri="{386F3935-93C4-4BCD-93E2-E3B085C9AB24}">
+                <p16:designElem xmlns:p16="http://schemas.microsoft.com/office/powerpoint/2015/main" val="1"/>
+              </p:ext>
+            </p:extLst>
+          </p:nvPr>
+        </p:nvSpPr>
+        <p:spPr>
+          <a:xfrm>
+            <a:off x="0" y="1514607"/>
+            <a:ext cx="9144000" cy="3079455"/>
+          </a:xfrm>
+          <a:prstGeom prst="rect">
+            <a:avLst/>
+          </a:prstGeom>
+          <a:gradFill flip="none" rotWithShape="1">
+            <a:gsLst>
+              <a:gs pos="0">
+                <a:schemeClr val="bg2">
+                  <a:alpha val="0"/>
+                </a:schemeClr>
+              </a:gs>
+              <a:gs pos="100000">
+                <a:schemeClr val="bg2"/>
+              </a:gs>
+            </a:gsLst>
+            <a:lin ang="5400000" scaled="0"/>
+            <a:tileRect/>
+          </a:gradFill>
+          <a:ln>
+            <a:noFill/>
+          </a:ln>
+        </p:spPr>
+        <p:style>
+          <a:lnRef idx="2">
+            <a:schemeClr val="accent1">
+              <a:shade val="50000"/>
+            </a:schemeClr>
+          </a:lnRef>
+          <a:fillRef idx="1">
+            <a:schemeClr val="accent1"/>
+          </a:fillRef>
+          <a:effectRef idx="0">
+            <a:schemeClr val="accent1"/>
+          </a:effectRef>
+          <a:fontRef idx="minor">
+            <a:schemeClr val="lt1"/>
+          </a:fontRef>
+        </p:style>
+        <p:txBody>
+          <a:bodyPr/>
+          <a:lstStyle/>
+          <a:p>
+            <a:endParaRPr lang="en-US"/>
+          </a:p>
+        </p:txBody>
+      </p:sp>
+      <p:pic>
+        <p:nvPicPr>
+          <p:cNvPr id="12" name="Picture 11">
+            <a:extLst>
+              <a:ext uri="{FF2B5EF4-FFF2-40B4-BE49-F238E27FC236}">
+                <a16:creationId xmlns:a16="http://schemas.microsoft.com/office/drawing/2014/main" id="{C2192E09-EBC7-416C-B887-DFF915D7F43D}"/>
+              </a:ext>
+              <a:ext uri="{C183D7F6-B498-43B3-948B-1728B52AA6E4}">
+                <adec:decorative xmlns:adec="http://schemas.microsoft.com/office/drawing/2017/decorative" val="1"/>
+              </a:ext>
+            </a:extLst>
+          </p:cNvPr>
+          <p:cNvPicPr>
+            <a:picLocks noGrp="1" noRot="1" noChangeAspect="1" noMove="1" noResize="1" noEditPoints="1" noAdjustHandles="1" noChangeArrowheads="1" noChangeShapeType="1" noCrop="1"/>
+          </p:cNvPicPr>
+          <p:nvPr>
+            <p:extLst>
+              <p:ext uri="{386F3935-93C4-4BCD-93E2-E3B085C9AB24}">
+                <p16:designElem xmlns:p16="http://schemas.microsoft.com/office/powerpoint/2015/main" val="1"/>
+              </p:ext>
+            </p:extLst>
+          </p:nvPr>
+        </p:nvPicPr>
+        <p:blipFill rotWithShape="1">
+          <a:blip r:embed="rId3">
+            <a:extLst>
+              <a:ext uri="{28A0092B-C50C-407E-A947-70E740481C1C}">
+                <a14:useLocalDpi xmlns:a14="http://schemas.microsoft.com/office/drawing/2010/main" val="0"/>
+              </a:ext>
+            </a:extLst>
+          </a:blip>
+          <a:srcRect t="1538" b="-1538"/>
+          <a:stretch/>
+        </p:blipFill>
+        <p:spPr bwMode="black">
+          <a:xfrm>
+            <a:off x="0" y="4594860"/>
+            <a:ext cx="9144000" cy="557212"/>
+          </a:xfrm>
+          <a:prstGeom prst="rect">
+            <a:avLst/>
+          </a:prstGeom>
+        </p:spPr>
+      </p:pic>
+      <p:cxnSp>
+        <p:nvCxnSpPr>
+          <p:cNvPr id="14" name="Straight Connector 13">
+            <a:extLst>
+              <a:ext uri="{FF2B5EF4-FFF2-40B4-BE49-F238E27FC236}">
+                <a16:creationId xmlns:a16="http://schemas.microsoft.com/office/drawing/2014/main" id="{2924498D-E084-44BE-A196-CFCE35564350}"/>
+              </a:ext>
+              <a:ext uri="{C183D7F6-B498-43B3-948B-1728B52AA6E4}">
+                <adec:decorative xmlns:adec="http://schemas.microsoft.com/office/drawing/2017/decorative" val="1"/>
+              </a:ext>
+            </a:extLst>
+          </p:cNvPr>
+          <p:cNvCxnSpPr>
+            <a:cxnSpLocks noGrp="1" noRot="1" noChangeAspect="1" noMove="1" noResize="1" noEditPoints="1" noAdjustHandles="1" noChangeArrowheads="1" noChangeShapeType="1"/>
+          </p:cNvCxnSpPr>
+          <p:nvPr>
+            <p:extLst>
+              <p:ext uri="{386F3935-93C4-4BCD-93E2-E3B085C9AB24}">
+                <p16:designElem xmlns:p16="http://schemas.microsoft.com/office/powerpoint/2015/main" val="1"/>
+              </p:ext>
+            </p:extLst>
+          </p:nvPr>
+        </p:nvCxnSpPr>
+        <p:spPr>
+          <a:xfrm>
+            <a:off x="0" y="4596309"/>
+            <a:ext cx="9144000" cy="0"/>
+          </a:xfrm>
+          <a:prstGeom prst="line">
+            <a:avLst/>
+          </a:prstGeom>
+          <a:ln w="12700">
+            <a:solidFill>
+              <a:srgbClr val="000001">
+                <a:alpha val="20000"/>
+              </a:srgbClr>
+            </a:solidFill>
+          </a:ln>
+        </p:spPr>
+        <p:style>
+          <a:lnRef idx="1">
+            <a:schemeClr val="accent1"/>
+          </a:lnRef>
+          <a:fillRef idx="0">
+            <a:schemeClr val="accent1"/>
+          </a:fillRef>
+          <a:effectRef idx="0">
+            <a:schemeClr val="accent1"/>
+          </a:effectRef>
+          <a:fontRef idx="minor">
+            <a:schemeClr val="tx1"/>
+          </a:fontRef>
+        </p:style>
+      </p:cxnSp>
+      <p:cxnSp>
+        <p:nvCxnSpPr>
+          <p:cNvPr id="16" name="Straight Connector 15">
+            <a:extLst>
+              <a:ext uri="{FF2B5EF4-FFF2-40B4-BE49-F238E27FC236}">
+                <a16:creationId xmlns:a16="http://schemas.microsoft.com/office/drawing/2014/main" id="{14C12901-9FCC-461E-A64A-89B4791235E9}"/>
+              </a:ext>
+              <a:ext uri="{C183D7F6-B498-43B3-948B-1728B52AA6E4}">
+                <adec:decorative xmlns:adec="http://schemas.microsoft.com/office/drawing/2017/decorative" val="1"/>
+              </a:ext>
+            </a:extLst>
+          </p:cNvPr>
+          <p:cNvCxnSpPr>
+            <a:cxnSpLocks noGrp="1" noRot="1" noChangeAspect="1" noMove="1" noResize="1" noEditPoints="1" noAdjustHandles="1" noChangeArrowheads="1" noChangeShapeType="1"/>
+          </p:cNvCxnSpPr>
+          <p:nvPr>
+            <p:extLst>
+              <p:ext uri="{386F3935-93C4-4BCD-93E2-E3B085C9AB24}">
+                <p16:designElem xmlns:p16="http://schemas.microsoft.com/office/powerpoint/2015/main" val="1"/>
+              </p:ext>
+            </p:extLst>
+          </p:nvPr>
+        </p:nvCxnSpPr>
+        <p:spPr>
+          <a:xfrm>
+            <a:off x="1090422" y="1385316"/>
+            <a:ext cx="7205641" cy="0"/>
+          </a:xfrm>
+          <a:prstGeom prst="line">
+            <a:avLst/>
+          </a:prstGeom>
+          <a:ln w="31750"/>
+        </p:spPr>
+        <p:style>
+          <a:lnRef idx="3">
+            <a:schemeClr val="accent1"/>
+          </a:lnRef>
+          <a:fillRef idx="0">
+            <a:schemeClr val="accent1"/>
+          </a:fillRef>
+          <a:effectRef idx="2">
+            <a:schemeClr val="accent1"/>
+          </a:effectRef>
+          <a:fontRef idx="minor">
+            <a:schemeClr val="tx1"/>
+          </a:fontRef>
+        </p:style>
+      </p:cxnSp>
+      <p:sp>
+        <p:nvSpPr>
           <p:cNvPr id="2" name="Text 0"/>
           <p:cNvSpPr/>
           <p:nvPr/>
         </p:nvSpPr>
         <p:spPr>
           <a:xfrm>
-            <a:off x="295836" y="0"/>
-            <a:ext cx="10360152" cy="1097280"/>
+            <a:off x="1088684" y="603389"/>
+            <a:ext cx="7202456" cy="786926"/>
+          </a:xfrm>
+          <a:prstGeom prst="rect">
+            <a:avLst/>
+          </a:prstGeom>
+        </p:spPr>
+        <p:txBody>
+          <a:bodyPr vert="horz" lIns="91440" tIns="45720" rIns="91440" bIns="45720" rtlCol="0" anchor="t">
+            <a:normAutofit/>
+          </a:bodyPr>
+          <a:lstStyle/>
+          <a:p>
+            <a:pPr marL="0" indent="0" defTabSz="914400">
+              <a:lnSpc>
+                <a:spcPct val="90000"/>
+              </a:lnSpc>
+              <a:spcBef>
+                <a:spcPct val="0"/>
+              </a:spcBef>
+              <a:spcAft>
+                <a:spcPts val="600"/>
+              </a:spcAft>
+            </a:pPr>
+            <a:r>
+              <a:rPr lang="en-US" sz="3200" b="0" i="0" kern="1200" cap="all" dirty="0">
+                <a:solidFill>
+                  <a:schemeClr val="tx1"/>
+                </a:solidFill>
+                <a:effectLst/>
+                <a:latin typeface="+mj-lt"/>
+                <a:ea typeface="+mj-ea"/>
+                <a:cs typeface="+mj-cs"/>
+              </a:rPr>
+              <a:t>Quality, Accuracy &amp; Control</a:t>
+            </a:r>
+          </a:p>
+        </p:txBody>
+      </p:sp>
+      <p:sp>
+        <p:nvSpPr>
+          <p:cNvPr id="3" name="Text 1"/>
+          <p:cNvSpPr/>
+          <p:nvPr/>
+        </p:nvSpPr>
+        <p:spPr>
+          <a:xfrm>
+            <a:off x="1088684" y="1511799"/>
+            <a:ext cx="7202456" cy="2587959"/>
+          </a:xfrm>
+          <a:prstGeom prst="rect">
+            <a:avLst/>
+          </a:prstGeom>
+        </p:spPr>
+        <p:txBody>
+          <a:bodyPr vert="horz" lIns="91440" tIns="45720" rIns="91440" bIns="45720" rtlCol="0" anchor="t">
+            <a:normAutofit/>
+          </a:bodyPr>
+          <a:lstStyle/>
+          <a:p>
+            <a:pPr marL="342900" indent="-228600" defTabSz="914400">
+              <a:lnSpc>
+                <a:spcPct val="120000"/>
+              </a:lnSpc>
+              <a:spcAft>
+                <a:spcPts val="600"/>
+              </a:spcAft>
+              <a:buClr>
+                <a:schemeClr val="accent1"/>
+              </a:buClr>
+              <a:buSzPct val="100000"/>
+              <a:buFont typeface="Arial" panose="020B0604020202020204" pitchFamily="34" charset="0"/>
+              <a:buChar char="•"/>
+            </a:pPr>
+            <a:r>
+              <a:rPr lang="en-US"/>
+              <a:t>Verified legal corpus: AI checks citations against 51 FL + 42 NM statutes.</a:t>
+            </a:r>
+          </a:p>
+          <a:p>
+            <a:pPr marL="342900" indent="-228600" defTabSz="914400">
+              <a:lnSpc>
+                <a:spcPct val="120000"/>
+              </a:lnSpc>
+              <a:spcAft>
+                <a:spcPts val="600"/>
+              </a:spcAft>
+              <a:buClr>
+                <a:schemeClr val="accent1"/>
+              </a:buClr>
+              <a:buSzPct val="100000"/>
+              <a:buFont typeface="Arial" panose="020B0604020202020204" pitchFamily="34" charset="0"/>
+              <a:buChar char="•"/>
+            </a:pPr>
+            <a:r>
+              <a:rPr lang="en-US"/>
+              <a:t>Hallucination guardrails: Citations rejected if not in verified corpus.</a:t>
+            </a:r>
+          </a:p>
+          <a:p>
+            <a:pPr marL="342900" indent="-228600" defTabSz="914400">
+              <a:lnSpc>
+                <a:spcPct val="120000"/>
+              </a:lnSpc>
+              <a:spcAft>
+                <a:spcPts val="600"/>
+              </a:spcAft>
+              <a:buClr>
+                <a:schemeClr val="accent1"/>
+              </a:buClr>
+              <a:buSzPct val="100000"/>
+              <a:buFont typeface="Arial" panose="020B0604020202020204" pitchFamily="34" charset="0"/>
+              <a:buChar char="•"/>
+            </a:pPr>
+            <a:r>
+              <a:rPr lang="en-US"/>
+              <a:t>Jurisdiction limits: Optimized only for Florida and New Mexico civil litigation.</a:t>
+            </a:r>
+          </a:p>
+          <a:p>
+            <a:pPr marL="342900" indent="-228600" defTabSz="914400">
+              <a:lnSpc>
+                <a:spcPct val="120000"/>
+              </a:lnSpc>
+              <a:spcAft>
+                <a:spcPts val="600"/>
+              </a:spcAft>
+              <a:buClr>
+                <a:schemeClr val="accent1"/>
+              </a:buClr>
+              <a:buSzPct val="100000"/>
+              <a:buFont typeface="Arial" panose="020B0604020202020204" pitchFamily="34" charset="0"/>
+              <a:buChar char="•"/>
+            </a:pPr>
+            <a:r>
+              <a:rPr lang="en-US"/>
+              <a:t>Attorney responsibility: You verify cited statutes are strategically applicable</a:t>
+            </a:r>
+          </a:p>
+        </p:txBody>
+      </p:sp>
+      <p:sp>
+        <p:nvSpPr>
+          <p:cNvPr id="5" name="Text 3"/>
+          <p:cNvSpPr/>
+          <p:nvPr/>
+        </p:nvSpPr>
+        <p:spPr>
+          <a:xfrm>
+            <a:off x="1611761" y="4578857"/>
+            <a:ext cx="5920478" cy="548640"/>
           </a:xfrm>
           <a:prstGeom prst="rect">
             <a:avLst/>
@@ -8730,484 +9663,28 @@
           <a:bodyPr wrap="square" rtlCol="0" anchor="ctr"/>
           <a:lstStyle/>
           <a:p>
-            <a:pPr marL="0" indent="0" algn="l">
+            <a:pPr marL="0" indent="0" algn="ctr">
+              <a:spcAft>
+                <a:spcPts val="600"/>
+              </a:spcAft>
               <a:buNone/>
             </a:pPr>
             <a:r>
-              <a:rPr lang="en-US" sz="3600" b="1" dirty="0">
-                <a:solidFill>
-                  <a:srgbClr val="181A31"/>
-                </a:solidFill>
+              <a:rPr lang="en-US" sz="2200" b="1" dirty="0">
                 <a:latin typeface="Calibri" pitchFamily="34" charset="0"/>
                 <a:ea typeface="Calibri" pitchFamily="34" charset="-122"/>
                 <a:cs typeface="Calibri" pitchFamily="34" charset="-120"/>
               </a:rPr>
-              <a:t>Immediate Next Steps</a:t>
-            </a:r>
-            <a:endParaRPr lang="en-US" sz="3600" dirty="0"/>
-          </a:p>
-        </p:txBody>
-      </p:sp>
-      <p:sp>
-        <p:nvSpPr>
-          <p:cNvPr id="3" name="Shape 1"/>
-          <p:cNvSpPr/>
-          <p:nvPr/>
-        </p:nvSpPr>
-        <p:spPr>
-          <a:xfrm>
-            <a:off x="478716" y="1143000"/>
-            <a:ext cx="365760" cy="365760"/>
-          </a:xfrm>
-          <a:prstGeom prst="rect">
-            <a:avLst/>
-          </a:prstGeom>
-          <a:solidFill>
-            <a:srgbClr val="5AB7A3"/>
-          </a:solidFill>
-          <a:ln/>
-        </p:spPr>
-        <p:txBody>
-          <a:bodyPr/>
-          <a:lstStyle/>
-          <a:p>
-            <a:endParaRPr lang="en-US"/>
-          </a:p>
-        </p:txBody>
-      </p:sp>
-      <p:sp>
-        <p:nvSpPr>
-          <p:cNvPr id="4" name="Text 2"/>
-          <p:cNvSpPr/>
-          <p:nvPr/>
-        </p:nvSpPr>
-        <p:spPr>
-          <a:xfrm>
-            <a:off x="478716" y="1143000"/>
-            <a:ext cx="365760" cy="365760"/>
-          </a:xfrm>
-          <a:prstGeom prst="rect">
-            <a:avLst/>
-          </a:prstGeom>
-          <a:noFill/>
-          <a:ln/>
-        </p:spPr>
-        <p:txBody>
-          <a:bodyPr wrap="square" rtlCol="0" anchor="ctr"/>
-          <a:lstStyle/>
-          <a:p>
-            <a:pPr marL="0" indent="0" algn="ctr">
-              <a:buNone/>
-            </a:pPr>
-            <a:r>
-              <a:rPr lang="en-US" sz="1800" b="1" dirty="0">
-                <a:solidFill>
-                  <a:srgbClr val="FFFFFF"/>
-                </a:solidFill>
-                <a:latin typeface="Calibri" pitchFamily="34" charset="0"/>
-                <a:ea typeface="Calibri" pitchFamily="34" charset="-122"/>
-                <a:cs typeface="Calibri" pitchFamily="34" charset="-120"/>
-              </a:rPr>
-              <a:t>1</a:t>
-            </a:r>
-            <a:endParaRPr lang="en-US" sz="1800" dirty="0"/>
-          </a:p>
-        </p:txBody>
-      </p:sp>
-      <p:sp>
-        <p:nvSpPr>
-          <p:cNvPr id="5" name="Text 3"/>
-          <p:cNvSpPr/>
-          <p:nvPr/>
-        </p:nvSpPr>
-        <p:spPr>
-          <a:xfrm>
-            <a:off x="1027356" y="1188720"/>
-            <a:ext cx="8686800" cy="457200"/>
-          </a:xfrm>
-          <a:prstGeom prst="rect">
-            <a:avLst/>
-          </a:prstGeom>
-          <a:noFill/>
-          <a:ln/>
-        </p:spPr>
-        <p:txBody>
-          <a:bodyPr wrap="square" rtlCol="0" anchor="t"/>
-          <a:lstStyle/>
-          <a:p>
-            <a:pPr marL="0" indent="0" algn="l">
-              <a:buNone/>
-            </a:pPr>
-            <a:r>
-              <a:rPr lang="en-US" sz="1800" dirty="0">
-                <a:solidFill>
-                  <a:srgbClr val="39428E"/>
-                </a:solidFill>
-                <a:latin typeface="Calibri" pitchFamily="34" charset="0"/>
-                <a:ea typeface="Calibri" pitchFamily="34" charset="-122"/>
-                <a:cs typeface="Calibri" pitchFamily="34" charset="-120"/>
-              </a:rPr>
-              <a:t>Verify Access: Log in to the portal today</a:t>
-            </a:r>
-            <a:endParaRPr lang="en-US" sz="1800" dirty="0"/>
-          </a:p>
-        </p:txBody>
-      </p:sp>
-      <p:sp>
-        <p:nvSpPr>
-          <p:cNvPr id="6" name="Shape 4"/>
-          <p:cNvSpPr/>
-          <p:nvPr/>
-        </p:nvSpPr>
-        <p:spPr>
-          <a:xfrm>
-            <a:off x="478716" y="1874520"/>
-            <a:ext cx="365760" cy="365760"/>
-          </a:xfrm>
-          <a:prstGeom prst="rect">
-            <a:avLst/>
-          </a:prstGeom>
-          <a:solidFill>
-            <a:srgbClr val="5AB7A3"/>
-          </a:solidFill>
-          <a:ln/>
-        </p:spPr>
-        <p:txBody>
-          <a:bodyPr/>
-          <a:lstStyle/>
-          <a:p>
-            <a:endParaRPr lang="en-US"/>
-          </a:p>
-        </p:txBody>
-      </p:sp>
-      <p:sp>
-        <p:nvSpPr>
-          <p:cNvPr id="7" name="Text 5"/>
-          <p:cNvSpPr/>
-          <p:nvPr/>
-        </p:nvSpPr>
-        <p:spPr>
-          <a:xfrm>
-            <a:off x="478716" y="1874520"/>
-            <a:ext cx="365760" cy="365760"/>
-          </a:xfrm>
-          <a:prstGeom prst="rect">
-            <a:avLst/>
-          </a:prstGeom>
-          <a:noFill/>
-          <a:ln/>
-        </p:spPr>
-        <p:txBody>
-          <a:bodyPr wrap="square" rtlCol="0" anchor="ctr"/>
-          <a:lstStyle/>
-          <a:p>
-            <a:pPr marL="0" indent="0" algn="ctr">
-              <a:buNone/>
-            </a:pPr>
-            <a:r>
-              <a:rPr lang="en-US" sz="1800" b="1" dirty="0">
-                <a:solidFill>
-                  <a:srgbClr val="FFFFFF"/>
-                </a:solidFill>
-                <a:latin typeface="Calibri" pitchFamily="34" charset="0"/>
-                <a:ea typeface="Calibri" pitchFamily="34" charset="-122"/>
-                <a:cs typeface="Calibri" pitchFamily="34" charset="-120"/>
-              </a:rPr>
-              <a:t>2</a:t>
-            </a:r>
-            <a:endParaRPr lang="en-US" sz="1800" dirty="0"/>
-          </a:p>
-        </p:txBody>
-      </p:sp>
-      <p:sp>
-        <p:nvSpPr>
-          <p:cNvPr id="8" name="Text 6"/>
-          <p:cNvSpPr/>
-          <p:nvPr/>
-        </p:nvSpPr>
-        <p:spPr>
-          <a:xfrm>
-            <a:off x="1027356" y="1920240"/>
-            <a:ext cx="8686800" cy="457200"/>
-          </a:xfrm>
-          <a:prstGeom prst="rect">
-            <a:avLst/>
-          </a:prstGeom>
-          <a:noFill/>
-          <a:ln/>
-        </p:spPr>
-        <p:txBody>
-          <a:bodyPr wrap="square" rtlCol="0" anchor="t"/>
-          <a:lstStyle/>
-          <a:p>
-            <a:pPr marL="0" indent="0" algn="l">
-              <a:buNone/>
-            </a:pPr>
-            <a:r>
-              <a:rPr lang="en-US" sz="1800" dirty="0">
-                <a:solidFill>
-                  <a:srgbClr val="39428E"/>
-                </a:solidFill>
-                <a:latin typeface="Calibri" pitchFamily="34" charset="0"/>
-                <a:ea typeface="Calibri" pitchFamily="34" charset="-122"/>
-                <a:cs typeface="Calibri" pitchFamily="34" charset="-120"/>
-              </a:rPr>
-              <a:t>Create Test Case: Upload sample documents to familiarize yourself</a:t>
-            </a:r>
-            <a:endParaRPr lang="en-US" sz="1800" dirty="0"/>
-          </a:p>
-        </p:txBody>
-      </p:sp>
-      <p:sp>
-        <p:nvSpPr>
-          <p:cNvPr id="9" name="Shape 7"/>
-          <p:cNvSpPr/>
-          <p:nvPr/>
-        </p:nvSpPr>
-        <p:spPr>
-          <a:xfrm>
-            <a:off x="478716" y="2606040"/>
-            <a:ext cx="365760" cy="365760"/>
-          </a:xfrm>
-          <a:prstGeom prst="rect">
-            <a:avLst/>
-          </a:prstGeom>
-          <a:solidFill>
-            <a:srgbClr val="5AB7A3"/>
-          </a:solidFill>
-          <a:ln/>
-        </p:spPr>
-        <p:txBody>
-          <a:bodyPr/>
-          <a:lstStyle/>
-          <a:p>
-            <a:endParaRPr lang="en-US"/>
-          </a:p>
-        </p:txBody>
-      </p:sp>
-      <p:sp>
-        <p:nvSpPr>
-          <p:cNvPr id="10" name="Text 8"/>
-          <p:cNvSpPr/>
-          <p:nvPr/>
-        </p:nvSpPr>
-        <p:spPr>
-          <a:xfrm>
-            <a:off x="478716" y="2606040"/>
-            <a:ext cx="365760" cy="365760"/>
-          </a:xfrm>
-          <a:prstGeom prst="rect">
-            <a:avLst/>
-          </a:prstGeom>
-          <a:noFill/>
-          <a:ln/>
-        </p:spPr>
-        <p:txBody>
-          <a:bodyPr wrap="square" rtlCol="0" anchor="ctr"/>
-          <a:lstStyle/>
-          <a:p>
-            <a:pPr marL="0" indent="0" algn="ctr">
-              <a:buNone/>
-            </a:pPr>
-            <a:r>
-              <a:rPr lang="en-US" sz="1800" b="1" dirty="0">
-                <a:solidFill>
-                  <a:srgbClr val="FFFFFF"/>
-                </a:solidFill>
-                <a:latin typeface="Calibri" pitchFamily="34" charset="0"/>
-                <a:ea typeface="Calibri" pitchFamily="34" charset="-122"/>
-                <a:cs typeface="Calibri" pitchFamily="34" charset="-120"/>
-              </a:rPr>
-              <a:t>3</a:t>
-            </a:r>
-            <a:endParaRPr lang="en-US" sz="1800" dirty="0"/>
-          </a:p>
-        </p:txBody>
-      </p:sp>
-      <p:sp>
-        <p:nvSpPr>
-          <p:cNvPr id="11" name="Text 9"/>
-          <p:cNvSpPr/>
-          <p:nvPr/>
-        </p:nvSpPr>
-        <p:spPr>
-          <a:xfrm>
-            <a:off x="1027356" y="2651760"/>
-            <a:ext cx="8686800" cy="457200"/>
-          </a:xfrm>
-          <a:prstGeom prst="rect">
-            <a:avLst/>
-          </a:prstGeom>
-          <a:noFill/>
-          <a:ln/>
-        </p:spPr>
-        <p:txBody>
-          <a:bodyPr wrap="square" rtlCol="0" anchor="t"/>
-          <a:lstStyle/>
-          <a:p>
-            <a:pPr marL="0" indent="0" algn="l">
-              <a:buNone/>
-            </a:pPr>
-            <a:r>
-              <a:rPr lang="en-US" sz="1800" dirty="0">
-                <a:solidFill>
-                  <a:srgbClr val="39428E"/>
-                </a:solidFill>
-                <a:latin typeface="Calibri" pitchFamily="34" charset="0"/>
-                <a:ea typeface="Calibri" pitchFamily="34" charset="-122"/>
-                <a:cs typeface="Calibri" pitchFamily="34" charset="-120"/>
-              </a:rPr>
-              <a:t>Real Intake: Use Harvey AI for your next eligible case</a:t>
-            </a:r>
-            <a:endParaRPr lang="en-US" sz="1800" dirty="0"/>
-          </a:p>
-        </p:txBody>
-      </p:sp>
-      <p:sp>
-        <p:nvSpPr>
-          <p:cNvPr id="12" name="Shape 10"/>
-          <p:cNvSpPr/>
-          <p:nvPr/>
-        </p:nvSpPr>
-        <p:spPr>
-          <a:xfrm>
-            <a:off x="478716" y="3337560"/>
-            <a:ext cx="365760" cy="365760"/>
-          </a:xfrm>
-          <a:prstGeom prst="rect">
-            <a:avLst/>
-          </a:prstGeom>
-          <a:solidFill>
-            <a:srgbClr val="5AB7A3"/>
-          </a:solidFill>
-          <a:ln/>
-        </p:spPr>
-        <p:txBody>
-          <a:bodyPr/>
-          <a:lstStyle/>
-          <a:p>
-            <a:endParaRPr lang="en-US"/>
-          </a:p>
-        </p:txBody>
-      </p:sp>
-      <p:sp>
-        <p:nvSpPr>
-          <p:cNvPr id="13" name="Text 11"/>
-          <p:cNvSpPr/>
-          <p:nvPr/>
-        </p:nvSpPr>
-        <p:spPr>
-          <a:xfrm>
-            <a:off x="478716" y="3337560"/>
-            <a:ext cx="365760" cy="365760"/>
-          </a:xfrm>
-          <a:prstGeom prst="rect">
-            <a:avLst/>
-          </a:prstGeom>
-          <a:noFill/>
-          <a:ln/>
-        </p:spPr>
-        <p:txBody>
-          <a:bodyPr wrap="square" rtlCol="0" anchor="ctr"/>
-          <a:lstStyle/>
-          <a:p>
-            <a:pPr marL="0" indent="0" algn="ctr">
-              <a:buNone/>
-            </a:pPr>
-            <a:r>
-              <a:rPr lang="en-US" sz="1800" b="1" dirty="0">
-                <a:solidFill>
-                  <a:srgbClr val="FFFFFF"/>
-                </a:solidFill>
-                <a:latin typeface="Calibri" pitchFamily="34" charset="0"/>
-                <a:ea typeface="Calibri" pitchFamily="34" charset="-122"/>
-                <a:cs typeface="Calibri" pitchFamily="34" charset="-120"/>
-              </a:rPr>
-              <a:t>4</a:t>
-            </a:r>
-            <a:endParaRPr lang="en-US" sz="1800" dirty="0"/>
-          </a:p>
-        </p:txBody>
-      </p:sp>
-      <p:sp>
-        <p:nvSpPr>
-          <p:cNvPr id="14" name="Text 12"/>
-          <p:cNvSpPr/>
-          <p:nvPr/>
-        </p:nvSpPr>
-        <p:spPr>
-          <a:xfrm>
-            <a:off x="1027356" y="3383280"/>
-            <a:ext cx="8686800" cy="457200"/>
-          </a:xfrm>
-          <a:prstGeom prst="rect">
-            <a:avLst/>
-          </a:prstGeom>
-          <a:noFill/>
-          <a:ln/>
-        </p:spPr>
-        <p:txBody>
-          <a:bodyPr wrap="square" rtlCol="0" anchor="t"/>
-          <a:lstStyle/>
-          <a:p>
-            <a:pPr marL="0" indent="0" algn="l">
-              <a:buNone/>
-            </a:pPr>
-            <a:r>
-              <a:rPr lang="en-US" sz="1800" dirty="0">
-                <a:solidFill>
-                  <a:srgbClr val="39428E"/>
-                </a:solidFill>
-                <a:latin typeface="Calibri" pitchFamily="34" charset="0"/>
-                <a:ea typeface="Calibri" pitchFamily="34" charset="-122"/>
-                <a:cs typeface="Calibri" pitchFamily="34" charset="-120"/>
-              </a:rPr>
-              <a:t>Attend Q&amp;A: Bring questions and feedback to next Wednesday's session</a:t>
-            </a:r>
-            <a:endParaRPr lang="en-US" sz="1800" dirty="0"/>
-          </a:p>
-        </p:txBody>
-      </p:sp>
-      <p:sp>
-        <p:nvSpPr>
-          <p:cNvPr id="16" name="Text 14"/>
-          <p:cNvSpPr/>
-          <p:nvPr/>
-        </p:nvSpPr>
-        <p:spPr>
-          <a:xfrm>
-            <a:off x="1977929" y="3848548"/>
-            <a:ext cx="4677155" cy="640080"/>
-          </a:xfrm>
-          <a:prstGeom prst="rect">
-            <a:avLst/>
-          </a:prstGeom>
-          <a:noFill/>
-          <a:ln/>
-        </p:spPr>
-        <p:txBody>
-          <a:bodyPr wrap="square" rtlCol="0" anchor="ctr"/>
-          <a:lstStyle/>
-          <a:p>
-            <a:pPr marL="0" indent="0" algn="ctr">
-              <a:buNone/>
-            </a:pPr>
-            <a:r>
-              <a:rPr lang="en-US" sz="2000" b="1" dirty="0">
-                <a:latin typeface="Calibri" pitchFamily="34" charset="0"/>
-                <a:ea typeface="Calibri" pitchFamily="34" charset="-122"/>
-                <a:cs typeface="Calibri" pitchFamily="34" charset="-120"/>
-              </a:rPr>
-              <a:t>This is live. Use it on your next intake.</a:t>
-            </a:r>
-            <a:endParaRPr lang="en-US" sz="2000" dirty="0"/>
+              <a:t>You are the final decision-maker.</a:t>
+            </a:r>
+            <a:endParaRPr lang="en-US" sz="2200" dirty="0"/>
           </a:p>
         </p:txBody>
       </p:sp>
     </p:spTree>
   </p:cSld>
   <p:clrMapOvr>
-    <a:masterClrMapping/>
+    <a:overrideClrMapping bg1="dk1" tx1="lt1" bg2="dk2" tx2="lt2" accent1="accent1" accent2="accent2" accent3="accent3" accent4="accent4" accent5="accent5" accent6="accent6" hlink="hlink" folHlink="folHlink"/>
   </p:clrMapOvr>
 </p:sld>
 </file>
@@ -9629,7 +10106,7 @@
         </p:nvSpPr>
         <p:spPr>
           <a:xfrm>
-            <a:off x="914399" y="3858051"/>
+            <a:off x="977423" y="4718354"/>
             <a:ext cx="7189153" cy="293146"/>
           </a:xfrm>
           <a:prstGeom prst="rect">
@@ -9650,6 +10127,987 @@
             </a:pPr>
             <a:r>
               <a:rPr lang="en-US" sz="2200" b="1" dirty="0">
+                <a:latin typeface="Calibri" pitchFamily="34" charset="0"/>
+                <a:ea typeface="Calibri" pitchFamily="34" charset="-122"/>
+                <a:cs typeface="Calibri" pitchFamily="34" charset="-120"/>
+              </a:rPr>
+              <a:t>This tool removes the busywork, not your judgment.</a:t>
+            </a:r>
+            <a:endParaRPr lang="en-US" sz="2200" dirty="0"/>
+          </a:p>
+        </p:txBody>
+      </p:sp>
+    </p:spTree>
+  </p:cSld>
+  <p:clrMapOvr>
+    <a:overrideClrMapping bg1="dk1" tx1="lt1" bg2="dk2" tx2="lt2" accent1="accent1" accent2="accent2" accent3="accent3" accent4="accent4" accent5="accent5" accent6="accent6" hlink="hlink" folHlink="folHlink"/>
+  </p:clrMapOvr>
+</p:sld>
+</file>
+
+<file path=ppt/slides/slide20.xml><?xml version="1.0" encoding="utf-8"?>
+<p:sld xmlns:a="http://schemas.openxmlformats.org/drawingml/2006/main" xmlns:r="http://schemas.openxmlformats.org/officeDocument/2006/relationships" xmlns:p="http://schemas.openxmlformats.org/presentationml/2006/main">
+  <p:cSld>
+    <p:bg>
+      <p:bgPr>
+        <a:gradFill rotWithShape="1">
+          <a:gsLst>
+            <a:gs pos="0">
+              <a:schemeClr val="bg1">
+                <a:tint val="94000"/>
+                <a:satMod val="80000"/>
+                <a:lumMod val="106000"/>
+              </a:schemeClr>
+            </a:gs>
+            <a:gs pos="100000">
+              <a:schemeClr val="bg1">
+                <a:shade val="80000"/>
+              </a:schemeClr>
+            </a:gs>
+          </a:gsLst>
+          <a:path path="circle">
+            <a:fillToRect l="50000" t="50000" r="50000" b="50000"/>
+          </a:path>
+        </a:gradFill>
+        <a:effectLst/>
+      </p:bgPr>
+    </p:bg>
+    <p:spTree>
+      <p:nvGrpSpPr>
+        <p:cNvPr id="1" name=""/>
+        <p:cNvGrpSpPr/>
+        <p:nvPr/>
+      </p:nvGrpSpPr>
+      <p:grpSpPr>
+        <a:xfrm>
+          <a:off x="0" y="0"/>
+          <a:ext cx="0" cy="0"/>
+          <a:chOff x="0" y="0"/>
+          <a:chExt cx="0" cy="0"/>
+        </a:xfrm>
+      </p:grpSpPr>
+      <p:sp>
+        <p:nvSpPr>
+          <p:cNvPr id="10" name="Rectangle 9">
+            <a:extLst>
+              <a:ext uri="{FF2B5EF4-FFF2-40B4-BE49-F238E27FC236}">
+                <a16:creationId xmlns:a16="http://schemas.microsoft.com/office/drawing/2014/main" id="{23522FE7-5A29-4EF6-B1EF-2CA55748A772}"/>
+              </a:ext>
+              <a:ext uri="{C183D7F6-B498-43B3-948B-1728B52AA6E4}">
+                <adec:decorative xmlns:adec="http://schemas.microsoft.com/office/drawing/2017/decorative" val="1"/>
+              </a:ext>
+            </a:extLst>
+          </p:cNvPr>
+          <p:cNvSpPr>
+            <a:spLocks noGrp="1" noRot="1" noChangeAspect="1" noMove="1" noResize="1" noEditPoints="1" noAdjustHandles="1" noChangeArrowheads="1" noChangeShapeType="1" noTextEdit="1"/>
+          </p:cNvSpPr>
+          <p:nvPr>
+            <p:extLst>
+              <p:ext uri="{386F3935-93C4-4BCD-93E2-E3B085C9AB24}">
+                <p16:designElem xmlns:p16="http://schemas.microsoft.com/office/powerpoint/2015/main" val="1"/>
+              </p:ext>
+            </p:extLst>
+          </p:nvPr>
+        </p:nvSpPr>
+        <p:spPr>
+          <a:xfrm>
+            <a:off x="0" y="1514607"/>
+            <a:ext cx="9144000" cy="3079455"/>
+          </a:xfrm>
+          <a:prstGeom prst="rect">
+            <a:avLst/>
+          </a:prstGeom>
+          <a:gradFill flip="none" rotWithShape="1">
+            <a:gsLst>
+              <a:gs pos="0">
+                <a:schemeClr val="bg2">
+                  <a:alpha val="0"/>
+                </a:schemeClr>
+              </a:gs>
+              <a:gs pos="100000">
+                <a:schemeClr val="bg2"/>
+              </a:gs>
+            </a:gsLst>
+            <a:lin ang="5400000" scaled="0"/>
+            <a:tileRect/>
+          </a:gradFill>
+          <a:ln>
+            <a:noFill/>
+          </a:ln>
+        </p:spPr>
+        <p:style>
+          <a:lnRef idx="2">
+            <a:schemeClr val="accent1">
+              <a:shade val="50000"/>
+            </a:schemeClr>
+          </a:lnRef>
+          <a:fillRef idx="1">
+            <a:schemeClr val="accent1"/>
+          </a:fillRef>
+          <a:effectRef idx="0">
+            <a:schemeClr val="accent1"/>
+          </a:effectRef>
+          <a:fontRef idx="minor">
+            <a:schemeClr val="lt1"/>
+          </a:fontRef>
+        </p:style>
+        <p:txBody>
+          <a:bodyPr/>
+          <a:lstStyle/>
+          <a:p>
+            <a:endParaRPr lang="en-US"/>
+          </a:p>
+        </p:txBody>
+      </p:sp>
+      <p:pic>
+        <p:nvPicPr>
+          <p:cNvPr id="12" name="Picture 11">
+            <a:extLst>
+              <a:ext uri="{FF2B5EF4-FFF2-40B4-BE49-F238E27FC236}">
+                <a16:creationId xmlns:a16="http://schemas.microsoft.com/office/drawing/2014/main" id="{C2192E09-EBC7-416C-B887-DFF915D7F43D}"/>
+              </a:ext>
+              <a:ext uri="{C183D7F6-B498-43B3-948B-1728B52AA6E4}">
+                <adec:decorative xmlns:adec="http://schemas.microsoft.com/office/drawing/2017/decorative" val="1"/>
+              </a:ext>
+            </a:extLst>
+          </p:cNvPr>
+          <p:cNvPicPr>
+            <a:picLocks noGrp="1" noRot="1" noChangeAspect="1" noMove="1" noResize="1" noEditPoints="1" noAdjustHandles="1" noChangeArrowheads="1" noChangeShapeType="1" noCrop="1"/>
+          </p:cNvPicPr>
+          <p:nvPr>
+            <p:extLst>
+              <p:ext uri="{386F3935-93C4-4BCD-93E2-E3B085C9AB24}">
+                <p16:designElem xmlns:p16="http://schemas.microsoft.com/office/powerpoint/2015/main" val="1"/>
+              </p:ext>
+            </p:extLst>
+          </p:nvPr>
+        </p:nvPicPr>
+        <p:blipFill rotWithShape="1">
+          <a:blip r:embed="rId3">
+            <a:extLst>
+              <a:ext uri="{28A0092B-C50C-407E-A947-70E740481C1C}">
+                <a14:useLocalDpi xmlns:a14="http://schemas.microsoft.com/office/drawing/2010/main" val="0"/>
+              </a:ext>
+            </a:extLst>
+          </a:blip>
+          <a:srcRect t="1538" b="-1538"/>
+          <a:stretch/>
+        </p:blipFill>
+        <p:spPr bwMode="black">
+          <a:xfrm>
+            <a:off x="0" y="4594860"/>
+            <a:ext cx="9144000" cy="557212"/>
+          </a:xfrm>
+          <a:prstGeom prst="rect">
+            <a:avLst/>
+          </a:prstGeom>
+        </p:spPr>
+      </p:pic>
+      <p:cxnSp>
+        <p:nvCxnSpPr>
+          <p:cNvPr id="14" name="Straight Connector 13">
+            <a:extLst>
+              <a:ext uri="{FF2B5EF4-FFF2-40B4-BE49-F238E27FC236}">
+                <a16:creationId xmlns:a16="http://schemas.microsoft.com/office/drawing/2014/main" id="{2924498D-E084-44BE-A196-CFCE35564350}"/>
+              </a:ext>
+              <a:ext uri="{C183D7F6-B498-43B3-948B-1728B52AA6E4}">
+                <adec:decorative xmlns:adec="http://schemas.microsoft.com/office/drawing/2017/decorative" val="1"/>
+              </a:ext>
+            </a:extLst>
+          </p:cNvPr>
+          <p:cNvCxnSpPr>
+            <a:cxnSpLocks noGrp="1" noRot="1" noChangeAspect="1" noMove="1" noResize="1" noEditPoints="1" noAdjustHandles="1" noChangeArrowheads="1" noChangeShapeType="1"/>
+          </p:cNvCxnSpPr>
+          <p:nvPr>
+            <p:extLst>
+              <p:ext uri="{386F3935-93C4-4BCD-93E2-E3B085C9AB24}">
+                <p16:designElem xmlns:p16="http://schemas.microsoft.com/office/powerpoint/2015/main" val="1"/>
+              </p:ext>
+            </p:extLst>
+          </p:nvPr>
+        </p:nvCxnSpPr>
+        <p:spPr>
+          <a:xfrm>
+            <a:off x="0" y="4596309"/>
+            <a:ext cx="9144000" cy="0"/>
+          </a:xfrm>
+          <a:prstGeom prst="line">
+            <a:avLst/>
+          </a:prstGeom>
+          <a:ln w="12700">
+            <a:solidFill>
+              <a:srgbClr val="000001">
+                <a:alpha val="20000"/>
+              </a:srgbClr>
+            </a:solidFill>
+          </a:ln>
+        </p:spPr>
+        <p:style>
+          <a:lnRef idx="1">
+            <a:schemeClr val="accent1"/>
+          </a:lnRef>
+          <a:fillRef idx="0">
+            <a:schemeClr val="accent1"/>
+          </a:fillRef>
+          <a:effectRef idx="0">
+            <a:schemeClr val="accent1"/>
+          </a:effectRef>
+          <a:fontRef idx="minor">
+            <a:schemeClr val="tx1"/>
+          </a:fontRef>
+        </p:style>
+      </p:cxnSp>
+      <p:cxnSp>
+        <p:nvCxnSpPr>
+          <p:cNvPr id="16" name="Straight Connector 15">
+            <a:extLst>
+              <a:ext uri="{FF2B5EF4-FFF2-40B4-BE49-F238E27FC236}">
+                <a16:creationId xmlns:a16="http://schemas.microsoft.com/office/drawing/2014/main" id="{14C12901-9FCC-461E-A64A-89B4791235E9}"/>
+              </a:ext>
+              <a:ext uri="{C183D7F6-B498-43B3-948B-1728B52AA6E4}">
+                <adec:decorative xmlns:adec="http://schemas.microsoft.com/office/drawing/2017/decorative" val="1"/>
+              </a:ext>
+            </a:extLst>
+          </p:cNvPr>
+          <p:cNvCxnSpPr>
+            <a:cxnSpLocks noGrp="1" noRot="1" noChangeAspect="1" noMove="1" noResize="1" noEditPoints="1" noAdjustHandles="1" noChangeArrowheads="1" noChangeShapeType="1"/>
+          </p:cNvCxnSpPr>
+          <p:nvPr>
+            <p:extLst>
+              <p:ext uri="{386F3935-93C4-4BCD-93E2-E3B085C9AB24}">
+                <p16:designElem xmlns:p16="http://schemas.microsoft.com/office/powerpoint/2015/main" val="1"/>
+              </p:ext>
+            </p:extLst>
+          </p:nvPr>
+        </p:nvCxnSpPr>
+        <p:spPr>
+          <a:xfrm>
+            <a:off x="1090422" y="1385316"/>
+            <a:ext cx="7205641" cy="0"/>
+          </a:xfrm>
+          <a:prstGeom prst="line">
+            <a:avLst/>
+          </a:prstGeom>
+          <a:ln w="31750"/>
+        </p:spPr>
+        <p:style>
+          <a:lnRef idx="3">
+            <a:schemeClr val="accent1"/>
+          </a:lnRef>
+          <a:fillRef idx="0">
+            <a:schemeClr val="accent1"/>
+          </a:fillRef>
+          <a:effectRef idx="2">
+            <a:schemeClr val="accent1"/>
+          </a:effectRef>
+          <a:fontRef idx="minor">
+            <a:schemeClr val="tx1"/>
+          </a:fontRef>
+        </p:style>
+      </p:cxnSp>
+      <p:sp>
+        <p:nvSpPr>
+          <p:cNvPr id="2" name="Text 0"/>
+          <p:cNvSpPr/>
+          <p:nvPr/>
+        </p:nvSpPr>
+        <p:spPr>
+          <a:xfrm>
+            <a:off x="1088684" y="603389"/>
+            <a:ext cx="7202456" cy="786926"/>
+          </a:xfrm>
+          <a:prstGeom prst="rect">
+            <a:avLst/>
+          </a:prstGeom>
+        </p:spPr>
+        <p:txBody>
+          <a:bodyPr vert="horz" lIns="91440" tIns="45720" rIns="91440" bIns="45720" rtlCol="0" anchor="t">
+            <a:normAutofit/>
+          </a:bodyPr>
+          <a:lstStyle/>
+          <a:p>
+            <a:pPr marL="0" indent="0" defTabSz="914400">
+              <a:lnSpc>
+                <a:spcPct val="90000"/>
+              </a:lnSpc>
+              <a:spcBef>
+                <a:spcPct val="0"/>
+              </a:spcBef>
+              <a:spcAft>
+                <a:spcPts val="600"/>
+              </a:spcAft>
+            </a:pPr>
+            <a:r>
+              <a:rPr lang="en-US" sz="3200" b="0" i="0" kern="1200" cap="all" dirty="0">
+                <a:solidFill>
+                  <a:schemeClr val="tx1"/>
+                </a:solidFill>
+                <a:effectLst/>
+                <a:latin typeface="+mj-lt"/>
+                <a:ea typeface="+mj-ea"/>
+                <a:cs typeface="+mj-cs"/>
+              </a:rPr>
+              <a:t>What Is Rolling Out Now</a:t>
+            </a:r>
+          </a:p>
+        </p:txBody>
+      </p:sp>
+      <p:sp>
+        <p:nvSpPr>
+          <p:cNvPr id="3" name="Text 1"/>
+          <p:cNvSpPr/>
+          <p:nvPr/>
+        </p:nvSpPr>
+        <p:spPr>
+          <a:xfrm>
+            <a:off x="1088684" y="1511799"/>
+            <a:ext cx="7202456" cy="2587959"/>
+          </a:xfrm>
+          <a:prstGeom prst="rect">
+            <a:avLst/>
+          </a:prstGeom>
+        </p:spPr>
+        <p:txBody>
+          <a:bodyPr vert="horz" lIns="91440" tIns="45720" rIns="91440" bIns="45720" rtlCol="0" anchor="t">
+            <a:normAutofit/>
+          </a:bodyPr>
+          <a:lstStyle/>
+          <a:p>
+            <a:pPr marL="342900" indent="-228600" defTabSz="914400">
+              <a:lnSpc>
+                <a:spcPct val="120000"/>
+              </a:lnSpc>
+              <a:spcAft>
+                <a:spcPts val="600"/>
+              </a:spcAft>
+              <a:buClr>
+                <a:schemeClr val="accent1"/>
+              </a:buClr>
+              <a:buSzPct val="100000"/>
+              <a:buFont typeface="Arial" panose="020B0604020202020204" pitchFamily="34" charset="0"/>
+              <a:buChar char="•"/>
+            </a:pPr>
+            <a:r>
+              <a:rPr lang="en-US"/>
+              <a:t>Live jurisdictions: Florida and New Mexico civil litigation.</a:t>
+            </a:r>
+          </a:p>
+          <a:p>
+            <a:pPr marL="342900" indent="-228600" defTabSz="914400">
+              <a:lnSpc>
+                <a:spcPct val="120000"/>
+              </a:lnSpc>
+              <a:spcAft>
+                <a:spcPts val="600"/>
+              </a:spcAft>
+              <a:buClr>
+                <a:schemeClr val="accent1"/>
+              </a:buClr>
+              <a:buSzPct val="100000"/>
+              <a:buFont typeface="Arial" panose="020B0604020202020204" pitchFamily="34" charset="0"/>
+              <a:buChar char="•"/>
+            </a:pPr>
+            <a:r>
+              <a:rPr lang="en-US"/>
+              <a:t>Included areas: Consumer protection, landlord-tenant, foreclosure, construction, contracts.</a:t>
+            </a:r>
+          </a:p>
+          <a:p>
+            <a:pPr marL="342900" indent="-228600" defTabSz="914400">
+              <a:lnSpc>
+                <a:spcPct val="120000"/>
+              </a:lnSpc>
+              <a:spcAft>
+                <a:spcPts val="600"/>
+              </a:spcAft>
+              <a:buClr>
+                <a:schemeClr val="accent1"/>
+              </a:buClr>
+              <a:buSzPct val="100000"/>
+              <a:buFont typeface="Arial" panose="020B0604020202020204" pitchFamily="34" charset="0"/>
+              <a:buChar char="•"/>
+            </a:pPr>
+            <a:r>
+              <a:rPr lang="en-US"/>
+              <a:t>Explicit exclusions: No federal claims, criminal law, immigration, bankruptcy, family law.</a:t>
+            </a:r>
+          </a:p>
+          <a:p>
+            <a:pPr marL="342900" indent="-228600" defTabSz="914400">
+              <a:lnSpc>
+                <a:spcPct val="120000"/>
+              </a:lnSpc>
+              <a:spcAft>
+                <a:spcPts val="600"/>
+              </a:spcAft>
+              <a:buClr>
+                <a:schemeClr val="accent1"/>
+              </a:buClr>
+              <a:buSzPct val="100000"/>
+              <a:buFont typeface="Arial" panose="020B0604020202020204" pitchFamily="34" charset="0"/>
+              <a:buChar char="•"/>
+            </a:pPr>
+            <a:r>
+              <a:rPr lang="en-US"/>
+              <a:t>Status: Version 3.1.0 is live and available for immediate use</a:t>
+            </a:r>
+          </a:p>
+        </p:txBody>
+      </p:sp>
+      <p:sp>
+        <p:nvSpPr>
+          <p:cNvPr id="5" name="Text 3"/>
+          <p:cNvSpPr/>
+          <p:nvPr/>
+        </p:nvSpPr>
+        <p:spPr>
+          <a:xfrm>
+            <a:off x="1503180" y="4666045"/>
+            <a:ext cx="6137639" cy="414842"/>
+          </a:xfrm>
+          <a:prstGeom prst="rect">
+            <a:avLst/>
+          </a:prstGeom>
+          <a:noFill/>
+          <a:ln/>
+        </p:spPr>
+        <p:txBody>
+          <a:bodyPr wrap="square" rtlCol="0" anchor="ctr"/>
+          <a:lstStyle/>
+          <a:p>
+            <a:pPr marL="0" indent="0" algn="ctr">
+              <a:spcAft>
+                <a:spcPts val="600"/>
+              </a:spcAft>
+              <a:buNone/>
+            </a:pPr>
+            <a:r>
+              <a:rPr lang="en-US" sz="2000" b="1" dirty="0">
+                <a:latin typeface="Calibri" pitchFamily="34" charset="0"/>
+                <a:ea typeface="Calibri" pitchFamily="34" charset="-122"/>
+                <a:cs typeface="Calibri" pitchFamily="34" charset="-120"/>
+              </a:rPr>
+              <a:t>Do not use for federal cases or criminal law.</a:t>
+            </a:r>
+            <a:endParaRPr lang="en-US" sz="2000" dirty="0"/>
+          </a:p>
+        </p:txBody>
+      </p:sp>
+    </p:spTree>
+  </p:cSld>
+  <p:clrMapOvr>
+    <a:overrideClrMapping bg1="dk1" tx1="lt1" bg2="dk2" tx2="lt2" accent1="accent1" accent2="accent2" accent3="accent3" accent4="accent4" accent5="accent5" accent6="accent6" hlink="hlink" folHlink="folHlink"/>
+  </p:clrMapOvr>
+</p:sld>
+</file>
+
+<file path=ppt/slides/slide21.xml><?xml version="1.0" encoding="utf-8"?>
+<p:sld xmlns:a="http://schemas.openxmlformats.org/drawingml/2006/main" xmlns:r="http://schemas.openxmlformats.org/officeDocument/2006/relationships" xmlns:p="http://schemas.openxmlformats.org/presentationml/2006/main">
+  <p:cSld>
+    <p:bg>
+      <p:bgPr>
+        <a:gradFill rotWithShape="1">
+          <a:gsLst>
+            <a:gs pos="0">
+              <a:schemeClr val="bg1">
+                <a:tint val="94000"/>
+                <a:satMod val="80000"/>
+                <a:lumMod val="106000"/>
+              </a:schemeClr>
+            </a:gs>
+            <a:gs pos="100000">
+              <a:schemeClr val="bg1">
+                <a:shade val="80000"/>
+              </a:schemeClr>
+            </a:gs>
+          </a:gsLst>
+          <a:path path="circle">
+            <a:fillToRect l="50000" t="50000" r="50000" b="50000"/>
+          </a:path>
+        </a:gradFill>
+        <a:effectLst/>
+      </p:bgPr>
+    </p:bg>
+    <p:spTree>
+      <p:nvGrpSpPr>
+        <p:cNvPr id="1" name=""/>
+        <p:cNvGrpSpPr/>
+        <p:nvPr/>
+      </p:nvGrpSpPr>
+      <p:grpSpPr>
+        <a:xfrm>
+          <a:off x="0" y="0"/>
+          <a:ext cx="0" cy="0"/>
+          <a:chOff x="0" y="0"/>
+          <a:chExt cx="0" cy="0"/>
+        </a:xfrm>
+      </p:grpSpPr>
+      <p:sp>
+        <p:nvSpPr>
+          <p:cNvPr id="10" name="Rectangle 9">
+            <a:extLst>
+              <a:ext uri="{FF2B5EF4-FFF2-40B4-BE49-F238E27FC236}">
+                <a16:creationId xmlns:a16="http://schemas.microsoft.com/office/drawing/2014/main" id="{23522FE7-5A29-4EF6-B1EF-2CA55748A772}"/>
+              </a:ext>
+              <a:ext uri="{C183D7F6-B498-43B3-948B-1728B52AA6E4}">
+                <adec:decorative xmlns:adec="http://schemas.microsoft.com/office/drawing/2017/decorative" val="1"/>
+              </a:ext>
+            </a:extLst>
+          </p:cNvPr>
+          <p:cNvSpPr>
+            <a:spLocks noGrp="1" noRot="1" noChangeAspect="1" noMove="1" noResize="1" noEditPoints="1" noAdjustHandles="1" noChangeArrowheads="1" noChangeShapeType="1" noTextEdit="1"/>
+          </p:cNvSpPr>
+          <p:nvPr>
+            <p:extLst>
+              <p:ext uri="{386F3935-93C4-4BCD-93E2-E3B085C9AB24}">
+                <p16:designElem xmlns:p16="http://schemas.microsoft.com/office/powerpoint/2015/main" val="1"/>
+              </p:ext>
+            </p:extLst>
+          </p:nvPr>
+        </p:nvSpPr>
+        <p:spPr>
+          <a:xfrm>
+            <a:off x="0" y="1514607"/>
+            <a:ext cx="9144000" cy="3079455"/>
+          </a:xfrm>
+          <a:prstGeom prst="rect">
+            <a:avLst/>
+          </a:prstGeom>
+          <a:gradFill flip="none" rotWithShape="1">
+            <a:gsLst>
+              <a:gs pos="0">
+                <a:schemeClr val="bg2">
+                  <a:alpha val="0"/>
+                </a:schemeClr>
+              </a:gs>
+              <a:gs pos="100000">
+                <a:schemeClr val="bg2"/>
+              </a:gs>
+            </a:gsLst>
+            <a:lin ang="5400000" scaled="0"/>
+            <a:tileRect/>
+          </a:gradFill>
+          <a:ln>
+            <a:noFill/>
+          </a:ln>
+        </p:spPr>
+        <p:style>
+          <a:lnRef idx="2">
+            <a:schemeClr val="accent1">
+              <a:shade val="50000"/>
+            </a:schemeClr>
+          </a:lnRef>
+          <a:fillRef idx="1">
+            <a:schemeClr val="accent1"/>
+          </a:fillRef>
+          <a:effectRef idx="0">
+            <a:schemeClr val="accent1"/>
+          </a:effectRef>
+          <a:fontRef idx="minor">
+            <a:schemeClr val="lt1"/>
+          </a:fontRef>
+        </p:style>
+        <p:txBody>
+          <a:bodyPr/>
+          <a:lstStyle/>
+          <a:p>
+            <a:endParaRPr lang="en-US"/>
+          </a:p>
+        </p:txBody>
+      </p:sp>
+      <p:pic>
+        <p:nvPicPr>
+          <p:cNvPr id="12" name="Picture 11">
+            <a:extLst>
+              <a:ext uri="{FF2B5EF4-FFF2-40B4-BE49-F238E27FC236}">
+                <a16:creationId xmlns:a16="http://schemas.microsoft.com/office/drawing/2014/main" id="{C2192E09-EBC7-416C-B887-DFF915D7F43D}"/>
+              </a:ext>
+              <a:ext uri="{C183D7F6-B498-43B3-948B-1728B52AA6E4}">
+                <adec:decorative xmlns:adec="http://schemas.microsoft.com/office/drawing/2017/decorative" val="1"/>
+              </a:ext>
+            </a:extLst>
+          </p:cNvPr>
+          <p:cNvPicPr>
+            <a:picLocks noGrp="1" noRot="1" noChangeAspect="1" noMove="1" noResize="1" noEditPoints="1" noAdjustHandles="1" noChangeArrowheads="1" noChangeShapeType="1" noCrop="1"/>
+          </p:cNvPicPr>
+          <p:nvPr>
+            <p:extLst>
+              <p:ext uri="{386F3935-93C4-4BCD-93E2-E3B085C9AB24}">
+                <p16:designElem xmlns:p16="http://schemas.microsoft.com/office/powerpoint/2015/main" val="1"/>
+              </p:ext>
+            </p:extLst>
+          </p:nvPr>
+        </p:nvPicPr>
+        <p:blipFill rotWithShape="1">
+          <a:blip r:embed="rId3">
+            <a:extLst>
+              <a:ext uri="{28A0092B-C50C-407E-A947-70E740481C1C}">
+                <a14:useLocalDpi xmlns:a14="http://schemas.microsoft.com/office/drawing/2010/main" val="0"/>
+              </a:ext>
+            </a:extLst>
+          </a:blip>
+          <a:srcRect t="1538" b="-1538"/>
+          <a:stretch/>
+        </p:blipFill>
+        <p:spPr bwMode="black">
+          <a:xfrm>
+            <a:off x="0" y="4594860"/>
+            <a:ext cx="9144000" cy="557212"/>
+          </a:xfrm>
+          <a:prstGeom prst="rect">
+            <a:avLst/>
+          </a:prstGeom>
+        </p:spPr>
+      </p:pic>
+      <p:cxnSp>
+        <p:nvCxnSpPr>
+          <p:cNvPr id="14" name="Straight Connector 13">
+            <a:extLst>
+              <a:ext uri="{FF2B5EF4-FFF2-40B4-BE49-F238E27FC236}">
+                <a16:creationId xmlns:a16="http://schemas.microsoft.com/office/drawing/2014/main" id="{2924498D-E084-44BE-A196-CFCE35564350}"/>
+              </a:ext>
+              <a:ext uri="{C183D7F6-B498-43B3-948B-1728B52AA6E4}">
+                <adec:decorative xmlns:adec="http://schemas.microsoft.com/office/drawing/2017/decorative" val="1"/>
+              </a:ext>
+            </a:extLst>
+          </p:cNvPr>
+          <p:cNvCxnSpPr>
+            <a:cxnSpLocks noGrp="1" noRot="1" noChangeAspect="1" noMove="1" noResize="1" noEditPoints="1" noAdjustHandles="1" noChangeArrowheads="1" noChangeShapeType="1"/>
+          </p:cNvCxnSpPr>
+          <p:nvPr>
+            <p:extLst>
+              <p:ext uri="{386F3935-93C4-4BCD-93E2-E3B085C9AB24}">
+                <p16:designElem xmlns:p16="http://schemas.microsoft.com/office/powerpoint/2015/main" val="1"/>
+              </p:ext>
+            </p:extLst>
+          </p:nvPr>
+        </p:nvCxnSpPr>
+        <p:spPr>
+          <a:xfrm>
+            <a:off x="0" y="4596309"/>
+            <a:ext cx="9144000" cy="0"/>
+          </a:xfrm>
+          <a:prstGeom prst="line">
+            <a:avLst/>
+          </a:prstGeom>
+          <a:ln w="12700">
+            <a:solidFill>
+              <a:srgbClr val="000001">
+                <a:alpha val="20000"/>
+              </a:srgbClr>
+            </a:solidFill>
+          </a:ln>
+        </p:spPr>
+        <p:style>
+          <a:lnRef idx="1">
+            <a:schemeClr val="accent1"/>
+          </a:lnRef>
+          <a:fillRef idx="0">
+            <a:schemeClr val="accent1"/>
+          </a:fillRef>
+          <a:effectRef idx="0">
+            <a:schemeClr val="accent1"/>
+          </a:effectRef>
+          <a:fontRef idx="minor">
+            <a:schemeClr val="tx1"/>
+          </a:fontRef>
+        </p:style>
+      </p:cxnSp>
+      <p:cxnSp>
+        <p:nvCxnSpPr>
+          <p:cNvPr id="16" name="Straight Connector 15">
+            <a:extLst>
+              <a:ext uri="{FF2B5EF4-FFF2-40B4-BE49-F238E27FC236}">
+                <a16:creationId xmlns:a16="http://schemas.microsoft.com/office/drawing/2014/main" id="{14C12901-9FCC-461E-A64A-89B4791235E9}"/>
+              </a:ext>
+              <a:ext uri="{C183D7F6-B498-43B3-948B-1728B52AA6E4}">
+                <adec:decorative xmlns:adec="http://schemas.microsoft.com/office/drawing/2017/decorative" val="1"/>
+              </a:ext>
+            </a:extLst>
+          </p:cNvPr>
+          <p:cNvCxnSpPr>
+            <a:cxnSpLocks noGrp="1" noRot="1" noChangeAspect="1" noMove="1" noResize="1" noEditPoints="1" noAdjustHandles="1" noChangeArrowheads="1" noChangeShapeType="1"/>
+          </p:cNvCxnSpPr>
+          <p:nvPr>
+            <p:extLst>
+              <p:ext uri="{386F3935-93C4-4BCD-93E2-E3B085C9AB24}">
+                <p16:designElem xmlns:p16="http://schemas.microsoft.com/office/powerpoint/2015/main" val="1"/>
+              </p:ext>
+            </p:extLst>
+          </p:nvPr>
+        </p:nvCxnSpPr>
+        <p:spPr>
+          <a:xfrm>
+            <a:off x="1090422" y="1385316"/>
+            <a:ext cx="7205641" cy="0"/>
+          </a:xfrm>
+          <a:prstGeom prst="line">
+            <a:avLst/>
+          </a:prstGeom>
+          <a:ln w="31750"/>
+        </p:spPr>
+        <p:style>
+          <a:lnRef idx="3">
+            <a:schemeClr val="accent1"/>
+          </a:lnRef>
+          <a:fillRef idx="0">
+            <a:schemeClr val="accent1"/>
+          </a:fillRef>
+          <a:effectRef idx="2">
+            <a:schemeClr val="accent1"/>
+          </a:effectRef>
+          <a:fontRef idx="minor">
+            <a:schemeClr val="tx1"/>
+          </a:fontRef>
+        </p:style>
+      </p:cxnSp>
+      <p:sp>
+        <p:nvSpPr>
+          <p:cNvPr id="2" name="Text 0"/>
+          <p:cNvSpPr/>
+          <p:nvPr/>
+        </p:nvSpPr>
+        <p:spPr>
+          <a:xfrm>
+            <a:off x="1088684" y="603389"/>
+            <a:ext cx="7202456" cy="786926"/>
+          </a:xfrm>
+          <a:prstGeom prst="rect">
+            <a:avLst/>
+          </a:prstGeom>
+        </p:spPr>
+        <p:txBody>
+          <a:bodyPr vert="horz" lIns="91440" tIns="45720" rIns="91440" bIns="45720" rtlCol="0" anchor="t">
+            <a:normAutofit/>
+          </a:bodyPr>
+          <a:lstStyle/>
+          <a:p>
+            <a:pPr marL="0" indent="0" defTabSz="914400">
+              <a:lnSpc>
+                <a:spcPct val="90000"/>
+              </a:lnSpc>
+              <a:spcBef>
+                <a:spcPct val="0"/>
+              </a:spcBef>
+              <a:spcAft>
+                <a:spcPts val="600"/>
+              </a:spcAft>
+            </a:pPr>
+            <a:r>
+              <a:rPr lang="en-US" sz="3200" b="0" i="0" kern="1200" cap="all" dirty="0">
+                <a:solidFill>
+                  <a:schemeClr val="tx1"/>
+                </a:solidFill>
+                <a:effectLst/>
+                <a:latin typeface="+mj-lt"/>
+                <a:ea typeface="+mj-ea"/>
+                <a:cs typeface="+mj-cs"/>
+              </a:rPr>
+              <a:t>Adoption Plan &amp; Expectations</a:t>
+            </a:r>
+          </a:p>
+        </p:txBody>
+      </p:sp>
+      <p:sp>
+        <p:nvSpPr>
+          <p:cNvPr id="3" name="Text 1"/>
+          <p:cNvSpPr/>
+          <p:nvPr/>
+        </p:nvSpPr>
+        <p:spPr>
+          <a:xfrm>
+            <a:off x="1088684" y="1511799"/>
+            <a:ext cx="7202456" cy="2587959"/>
+          </a:xfrm>
+          <a:prstGeom prst="rect">
+            <a:avLst/>
+          </a:prstGeom>
+        </p:spPr>
+        <p:txBody>
+          <a:bodyPr vert="horz" lIns="91440" tIns="45720" rIns="91440" bIns="45720" rtlCol="0" anchor="t">
+            <a:normAutofit/>
+          </a:bodyPr>
+          <a:lstStyle/>
+          <a:p>
+            <a:pPr marL="342900" indent="-228600" defTabSz="914400">
+              <a:lnSpc>
+                <a:spcPct val="120000"/>
+              </a:lnSpc>
+              <a:spcAft>
+                <a:spcPts val="600"/>
+              </a:spcAft>
+              <a:buClr>
+                <a:schemeClr val="accent1"/>
+              </a:buClr>
+              <a:buSzPct val="100000"/>
+              <a:buFont typeface="Arial" panose="020B0604020202020204" pitchFamily="34" charset="0"/>
+              <a:buChar char="•"/>
+            </a:pPr>
+            <a:r>
+              <a:rPr lang="en-US"/>
+              <a:t>Immediate access: Your accounts are created; credentials distributed.</a:t>
+            </a:r>
+          </a:p>
+          <a:p>
+            <a:pPr marL="342900" indent="-228600" defTabSz="914400">
+              <a:lnSpc>
+                <a:spcPct val="120000"/>
+              </a:lnSpc>
+              <a:spcAft>
+                <a:spcPts val="600"/>
+              </a:spcAft>
+              <a:buClr>
+                <a:schemeClr val="accent1"/>
+              </a:buClr>
+              <a:buSzPct val="100000"/>
+              <a:buFont typeface="Arial" panose="020B0604020202020204" pitchFamily="34" charset="0"/>
+              <a:buChar char="•"/>
+            </a:pPr>
+            <a:r>
+              <a:rPr lang="en-US"/>
+              <a:t>Resources: One-page Quickstart Guide emailed to you.</a:t>
+            </a:r>
+          </a:p>
+          <a:p>
+            <a:pPr marL="342900" indent="-228600" defTabSz="914400">
+              <a:lnSpc>
+                <a:spcPct val="120000"/>
+              </a:lnSpc>
+              <a:spcAft>
+                <a:spcPts val="600"/>
+              </a:spcAft>
+              <a:buClr>
+                <a:schemeClr val="accent1"/>
+              </a:buClr>
+              <a:buSzPct val="100000"/>
+              <a:buFont typeface="Arial" panose="020B0604020202020204" pitchFamily="34" charset="0"/>
+              <a:buChar char="•"/>
+            </a:pPr>
+            <a:r>
+              <a:rPr lang="en-US"/>
+              <a:t>Training: Live Q&amp;A session next Wednesday for questions.</a:t>
+            </a:r>
+          </a:p>
+          <a:p>
+            <a:pPr marL="342900" indent="-228600" defTabSz="914400">
+              <a:lnSpc>
+                <a:spcPct val="120000"/>
+              </a:lnSpc>
+              <a:spcAft>
+                <a:spcPts val="600"/>
+              </a:spcAft>
+              <a:buClr>
+                <a:schemeClr val="accent1"/>
+              </a:buClr>
+              <a:buSzPct val="100000"/>
+              <a:buFont typeface="Arial" panose="020B0604020202020204" pitchFamily="34" charset="0"/>
+              <a:buChar char="•"/>
+            </a:pPr>
+            <a:r>
+              <a:rPr lang="en-US"/>
+              <a:t>Support: Dedicated channels for technical issues and feature requests</a:t>
+            </a:r>
+          </a:p>
+        </p:txBody>
+      </p:sp>
+      <p:sp>
+        <p:nvSpPr>
+          <p:cNvPr id="5" name="Text 3"/>
+          <p:cNvSpPr/>
+          <p:nvPr/>
+        </p:nvSpPr>
+        <p:spPr>
+          <a:xfrm>
+            <a:off x="1463177" y="4646255"/>
+            <a:ext cx="6217646" cy="403412"/>
+          </a:xfrm>
+          <a:prstGeom prst="rect">
+            <a:avLst/>
+          </a:prstGeom>
+          <a:noFill/>
+          <a:ln/>
+        </p:spPr>
+        <p:txBody>
+          <a:bodyPr wrap="square" rtlCol="0" anchor="ctr"/>
+          <a:lstStyle/>
+          <a:p>
+            <a:pPr marL="0" indent="0" algn="ctr">
+              <a:spcAft>
+                <a:spcPts val="600"/>
+              </a:spcAft>
+              <a:buNone/>
+            </a:pPr>
+            <a:r>
+              <a:rPr lang="en-US" sz="2000" b="1" dirty="0">
+                <a:latin typeface="Calibri" pitchFamily="34" charset="0"/>
+                <a:ea typeface="Calibri" pitchFamily="34" charset="-122"/>
+                <a:cs typeface="Calibri" pitchFamily="34" charset="-120"/>
+              </a:rPr>
+              <a:t>Expectation: Log in and create a test case this week</a:t>
+            </a:r>
+            <a:endParaRPr lang="en-US" sz="2000" dirty="0"/>
+          </a:p>
+        </p:txBody>
+      </p:sp>
+    </p:spTree>
+  </p:cSld>
+  <p:clrMapOvr>
+    <a:overrideClrMapping bg1="dk1" tx1="lt1" bg2="dk2" tx2="lt2" accent1="accent1" accent2="accent2" accent3="accent3" accent4="accent4" accent5="accent5" accent6="accent6" hlink="hlink" folHlink="folHlink"/>
+  </p:clrMapOvr>
+</p:sld>
+</file>
+
+<file path=ppt/slides/slide22.xml><?xml version="1.0" encoding="utf-8"?>
+<p:sld xmlns:a="http://schemas.openxmlformats.org/drawingml/2006/main" xmlns:r="http://schemas.openxmlformats.org/officeDocument/2006/relationships" xmlns:p="http://schemas.openxmlformats.org/presentationml/2006/main">
+  <p:cSld name="Slide 10">
+    <p:bg>
+      <p:bgPr>
+        <a:solidFill>
+          <a:srgbClr val="FFFFFF"/>
+        </a:solidFill>
+        <a:effectLst/>
+      </p:bgPr>
+    </p:bg>
+    <p:spTree>
+      <p:nvGrpSpPr>
+        <p:cNvPr id="1" name=""/>
+        <p:cNvGrpSpPr/>
+        <p:nvPr/>
+      </p:nvGrpSpPr>
+      <p:grpSpPr>
+        <a:xfrm>
+          <a:off x="0" y="0"/>
+          <a:ext cx="0" cy="0"/>
+          <a:chOff x="0" y="0"/>
+          <a:chExt cx="0" cy="0"/>
+        </a:xfrm>
+      </p:grpSpPr>
+      <p:sp>
+        <p:nvSpPr>
+          <p:cNvPr id="2" name="Text 0"/>
+          <p:cNvSpPr/>
+          <p:nvPr/>
+        </p:nvSpPr>
+        <p:spPr>
+          <a:xfrm>
+            <a:off x="295836" y="0"/>
+            <a:ext cx="10360152" cy="1097280"/>
+          </a:xfrm>
+          <a:prstGeom prst="rect">
+            <a:avLst/>
+          </a:prstGeom>
+          <a:noFill/>
+          <a:ln/>
+        </p:spPr>
+        <p:txBody>
+          <a:bodyPr wrap="square" rtlCol="0" anchor="ctr"/>
+          <a:lstStyle/>
+          <a:p>
+            <a:pPr marL="0" indent="0" algn="l">
+              <a:buNone/>
+            </a:pPr>
+            <a:r>
+              <a:rPr lang="en-US" sz="3600" b="1" dirty="0">
                 <a:solidFill>
                   <a:srgbClr val="181A31"/>
                 </a:solidFill>
@@ -9657,16 +11115,479 @@
                 <a:ea typeface="Calibri" pitchFamily="34" charset="-122"/>
                 <a:cs typeface="Calibri" pitchFamily="34" charset="-120"/>
               </a:rPr>
-              <a:t>This tool removes the busywork, not your judgment.</a:t>
-            </a:r>
-            <a:endParaRPr lang="en-US" sz="2200" dirty="0"/>
+              <a:t>Immediate Next Steps</a:t>
+            </a:r>
+            <a:endParaRPr lang="en-US" sz="3600" dirty="0"/>
+          </a:p>
+        </p:txBody>
+      </p:sp>
+      <p:sp>
+        <p:nvSpPr>
+          <p:cNvPr id="3" name="Shape 1"/>
+          <p:cNvSpPr/>
+          <p:nvPr/>
+        </p:nvSpPr>
+        <p:spPr>
+          <a:xfrm>
+            <a:off x="478716" y="1143000"/>
+            <a:ext cx="365760" cy="365760"/>
+          </a:xfrm>
+          <a:prstGeom prst="rect">
+            <a:avLst/>
+          </a:prstGeom>
+          <a:solidFill>
+            <a:srgbClr val="5AB7A3"/>
+          </a:solidFill>
+          <a:ln/>
+        </p:spPr>
+        <p:txBody>
+          <a:bodyPr/>
+          <a:lstStyle/>
+          <a:p>
+            <a:endParaRPr lang="en-US"/>
+          </a:p>
+        </p:txBody>
+      </p:sp>
+      <p:sp>
+        <p:nvSpPr>
+          <p:cNvPr id="4" name="Text 2"/>
+          <p:cNvSpPr/>
+          <p:nvPr/>
+        </p:nvSpPr>
+        <p:spPr>
+          <a:xfrm>
+            <a:off x="478716" y="1143000"/>
+            <a:ext cx="365760" cy="365760"/>
+          </a:xfrm>
+          <a:prstGeom prst="rect">
+            <a:avLst/>
+          </a:prstGeom>
+          <a:noFill/>
+          <a:ln/>
+        </p:spPr>
+        <p:txBody>
+          <a:bodyPr wrap="square" rtlCol="0" anchor="ctr"/>
+          <a:lstStyle/>
+          <a:p>
+            <a:pPr marL="0" indent="0" algn="ctr">
+              <a:buNone/>
+            </a:pPr>
+            <a:r>
+              <a:rPr lang="en-US" sz="1800" b="1" dirty="0">
+                <a:solidFill>
+                  <a:srgbClr val="FFFFFF"/>
+                </a:solidFill>
+                <a:latin typeface="Calibri" pitchFamily="34" charset="0"/>
+                <a:ea typeface="Calibri" pitchFamily="34" charset="-122"/>
+                <a:cs typeface="Calibri" pitchFamily="34" charset="-120"/>
+              </a:rPr>
+              <a:t>1</a:t>
+            </a:r>
+            <a:endParaRPr lang="en-US" sz="1800" dirty="0"/>
+          </a:p>
+        </p:txBody>
+      </p:sp>
+      <p:sp>
+        <p:nvSpPr>
+          <p:cNvPr id="5" name="Text 3"/>
+          <p:cNvSpPr/>
+          <p:nvPr/>
+        </p:nvSpPr>
+        <p:spPr>
+          <a:xfrm>
+            <a:off x="1027356" y="1188720"/>
+            <a:ext cx="8686800" cy="457200"/>
+          </a:xfrm>
+          <a:prstGeom prst="rect">
+            <a:avLst/>
+          </a:prstGeom>
+          <a:noFill/>
+          <a:ln/>
+        </p:spPr>
+        <p:txBody>
+          <a:bodyPr wrap="square" rtlCol="0" anchor="t"/>
+          <a:lstStyle/>
+          <a:p>
+            <a:pPr marL="0" indent="0" algn="l">
+              <a:buNone/>
+            </a:pPr>
+            <a:r>
+              <a:rPr lang="en-US" sz="1800" dirty="0">
+                <a:solidFill>
+                  <a:srgbClr val="39428E"/>
+                </a:solidFill>
+                <a:latin typeface="Calibri" pitchFamily="34" charset="0"/>
+                <a:ea typeface="Calibri" pitchFamily="34" charset="-122"/>
+                <a:cs typeface="Calibri" pitchFamily="34" charset="-120"/>
+              </a:rPr>
+              <a:t>Verify Access: Log in to the portal today</a:t>
+            </a:r>
+            <a:endParaRPr lang="en-US" sz="1800" dirty="0"/>
+          </a:p>
+        </p:txBody>
+      </p:sp>
+      <p:sp>
+        <p:nvSpPr>
+          <p:cNvPr id="6" name="Shape 4"/>
+          <p:cNvSpPr/>
+          <p:nvPr/>
+        </p:nvSpPr>
+        <p:spPr>
+          <a:xfrm>
+            <a:off x="478716" y="1874520"/>
+            <a:ext cx="365760" cy="365760"/>
+          </a:xfrm>
+          <a:prstGeom prst="rect">
+            <a:avLst/>
+          </a:prstGeom>
+          <a:solidFill>
+            <a:srgbClr val="5AB7A3"/>
+          </a:solidFill>
+          <a:ln/>
+        </p:spPr>
+        <p:txBody>
+          <a:bodyPr/>
+          <a:lstStyle/>
+          <a:p>
+            <a:endParaRPr lang="en-US"/>
+          </a:p>
+        </p:txBody>
+      </p:sp>
+      <p:sp>
+        <p:nvSpPr>
+          <p:cNvPr id="7" name="Text 5"/>
+          <p:cNvSpPr/>
+          <p:nvPr/>
+        </p:nvSpPr>
+        <p:spPr>
+          <a:xfrm>
+            <a:off x="478716" y="1874520"/>
+            <a:ext cx="365760" cy="365760"/>
+          </a:xfrm>
+          <a:prstGeom prst="rect">
+            <a:avLst/>
+          </a:prstGeom>
+          <a:noFill/>
+          <a:ln/>
+        </p:spPr>
+        <p:txBody>
+          <a:bodyPr wrap="square" rtlCol="0" anchor="ctr"/>
+          <a:lstStyle/>
+          <a:p>
+            <a:pPr marL="0" indent="0" algn="ctr">
+              <a:buNone/>
+            </a:pPr>
+            <a:r>
+              <a:rPr lang="en-US" sz="1800" b="1" dirty="0">
+                <a:solidFill>
+                  <a:srgbClr val="FFFFFF"/>
+                </a:solidFill>
+                <a:latin typeface="Calibri" pitchFamily="34" charset="0"/>
+                <a:ea typeface="Calibri" pitchFamily="34" charset="-122"/>
+                <a:cs typeface="Calibri" pitchFamily="34" charset="-120"/>
+              </a:rPr>
+              <a:t>2</a:t>
+            </a:r>
+            <a:endParaRPr lang="en-US" sz="1800" dirty="0"/>
+          </a:p>
+        </p:txBody>
+      </p:sp>
+      <p:sp>
+        <p:nvSpPr>
+          <p:cNvPr id="8" name="Text 6"/>
+          <p:cNvSpPr/>
+          <p:nvPr/>
+        </p:nvSpPr>
+        <p:spPr>
+          <a:xfrm>
+            <a:off x="1027356" y="1920240"/>
+            <a:ext cx="8686800" cy="457200"/>
+          </a:xfrm>
+          <a:prstGeom prst="rect">
+            <a:avLst/>
+          </a:prstGeom>
+          <a:noFill/>
+          <a:ln/>
+        </p:spPr>
+        <p:txBody>
+          <a:bodyPr wrap="square" rtlCol="0" anchor="t"/>
+          <a:lstStyle/>
+          <a:p>
+            <a:pPr marL="0" indent="0" algn="l">
+              <a:buNone/>
+            </a:pPr>
+            <a:r>
+              <a:rPr lang="en-US" sz="1800" dirty="0">
+                <a:solidFill>
+                  <a:srgbClr val="39428E"/>
+                </a:solidFill>
+                <a:latin typeface="Calibri" pitchFamily="34" charset="0"/>
+                <a:ea typeface="Calibri" pitchFamily="34" charset="-122"/>
+                <a:cs typeface="Calibri" pitchFamily="34" charset="-120"/>
+              </a:rPr>
+              <a:t>Create Test Case: Upload sample documents to familiarize yourself</a:t>
+            </a:r>
+            <a:endParaRPr lang="en-US" sz="1800" dirty="0"/>
+          </a:p>
+        </p:txBody>
+      </p:sp>
+      <p:sp>
+        <p:nvSpPr>
+          <p:cNvPr id="9" name="Shape 7"/>
+          <p:cNvSpPr/>
+          <p:nvPr/>
+        </p:nvSpPr>
+        <p:spPr>
+          <a:xfrm>
+            <a:off x="478716" y="2606040"/>
+            <a:ext cx="365760" cy="365760"/>
+          </a:xfrm>
+          <a:prstGeom prst="rect">
+            <a:avLst/>
+          </a:prstGeom>
+          <a:solidFill>
+            <a:srgbClr val="5AB7A3"/>
+          </a:solidFill>
+          <a:ln/>
+        </p:spPr>
+        <p:txBody>
+          <a:bodyPr/>
+          <a:lstStyle/>
+          <a:p>
+            <a:endParaRPr lang="en-US"/>
+          </a:p>
+        </p:txBody>
+      </p:sp>
+      <p:sp>
+        <p:nvSpPr>
+          <p:cNvPr id="10" name="Text 8"/>
+          <p:cNvSpPr/>
+          <p:nvPr/>
+        </p:nvSpPr>
+        <p:spPr>
+          <a:xfrm>
+            <a:off x="478716" y="2606040"/>
+            <a:ext cx="365760" cy="365760"/>
+          </a:xfrm>
+          <a:prstGeom prst="rect">
+            <a:avLst/>
+          </a:prstGeom>
+          <a:noFill/>
+          <a:ln/>
+        </p:spPr>
+        <p:txBody>
+          <a:bodyPr wrap="square" rtlCol="0" anchor="ctr"/>
+          <a:lstStyle/>
+          <a:p>
+            <a:pPr marL="0" indent="0" algn="ctr">
+              <a:buNone/>
+            </a:pPr>
+            <a:r>
+              <a:rPr lang="en-US" sz="1800" b="1" dirty="0">
+                <a:solidFill>
+                  <a:srgbClr val="FFFFFF"/>
+                </a:solidFill>
+                <a:latin typeface="Calibri" pitchFamily="34" charset="0"/>
+                <a:ea typeface="Calibri" pitchFamily="34" charset="-122"/>
+                <a:cs typeface="Calibri" pitchFamily="34" charset="-120"/>
+              </a:rPr>
+              <a:t>3</a:t>
+            </a:r>
+            <a:endParaRPr lang="en-US" sz="1800" dirty="0"/>
+          </a:p>
+        </p:txBody>
+      </p:sp>
+      <p:sp>
+        <p:nvSpPr>
+          <p:cNvPr id="11" name="Text 9"/>
+          <p:cNvSpPr/>
+          <p:nvPr/>
+        </p:nvSpPr>
+        <p:spPr>
+          <a:xfrm>
+            <a:off x="1027356" y="2651760"/>
+            <a:ext cx="8686800" cy="457200"/>
+          </a:xfrm>
+          <a:prstGeom prst="rect">
+            <a:avLst/>
+          </a:prstGeom>
+          <a:noFill/>
+          <a:ln/>
+        </p:spPr>
+        <p:txBody>
+          <a:bodyPr wrap="square" rtlCol="0" anchor="t"/>
+          <a:lstStyle/>
+          <a:p>
+            <a:pPr marL="0" indent="0" algn="l">
+              <a:buNone/>
+            </a:pPr>
+            <a:r>
+              <a:rPr lang="en-US" sz="1800" dirty="0">
+                <a:solidFill>
+                  <a:srgbClr val="39428E"/>
+                </a:solidFill>
+                <a:latin typeface="Calibri" pitchFamily="34" charset="0"/>
+                <a:ea typeface="Calibri" pitchFamily="34" charset="-122"/>
+                <a:cs typeface="Calibri" pitchFamily="34" charset="-120"/>
+              </a:rPr>
+              <a:t>Real Intake: Use Harvey AI for your next eligible case</a:t>
+            </a:r>
+            <a:endParaRPr lang="en-US" sz="1800" dirty="0"/>
+          </a:p>
+        </p:txBody>
+      </p:sp>
+      <p:sp>
+        <p:nvSpPr>
+          <p:cNvPr id="12" name="Shape 10"/>
+          <p:cNvSpPr/>
+          <p:nvPr/>
+        </p:nvSpPr>
+        <p:spPr>
+          <a:xfrm>
+            <a:off x="478716" y="3337560"/>
+            <a:ext cx="365760" cy="365760"/>
+          </a:xfrm>
+          <a:prstGeom prst="rect">
+            <a:avLst/>
+          </a:prstGeom>
+          <a:solidFill>
+            <a:srgbClr val="5AB7A3"/>
+          </a:solidFill>
+          <a:ln/>
+        </p:spPr>
+        <p:txBody>
+          <a:bodyPr/>
+          <a:lstStyle/>
+          <a:p>
+            <a:endParaRPr lang="en-US"/>
+          </a:p>
+        </p:txBody>
+      </p:sp>
+      <p:sp>
+        <p:nvSpPr>
+          <p:cNvPr id="13" name="Text 11"/>
+          <p:cNvSpPr/>
+          <p:nvPr/>
+        </p:nvSpPr>
+        <p:spPr>
+          <a:xfrm>
+            <a:off x="478716" y="3337560"/>
+            <a:ext cx="365760" cy="365760"/>
+          </a:xfrm>
+          <a:prstGeom prst="rect">
+            <a:avLst/>
+          </a:prstGeom>
+          <a:noFill/>
+          <a:ln/>
+        </p:spPr>
+        <p:txBody>
+          <a:bodyPr wrap="square" rtlCol="0" anchor="ctr"/>
+          <a:lstStyle/>
+          <a:p>
+            <a:pPr marL="0" indent="0" algn="ctr">
+              <a:buNone/>
+            </a:pPr>
+            <a:r>
+              <a:rPr lang="en-US" sz="1800" b="1" dirty="0">
+                <a:solidFill>
+                  <a:srgbClr val="FFFFFF"/>
+                </a:solidFill>
+                <a:latin typeface="Calibri" pitchFamily="34" charset="0"/>
+                <a:ea typeface="Calibri" pitchFamily="34" charset="-122"/>
+                <a:cs typeface="Calibri" pitchFamily="34" charset="-120"/>
+              </a:rPr>
+              <a:t>4</a:t>
+            </a:r>
+            <a:endParaRPr lang="en-US" sz="1800" dirty="0"/>
+          </a:p>
+        </p:txBody>
+      </p:sp>
+      <p:sp>
+        <p:nvSpPr>
+          <p:cNvPr id="14" name="Text 12"/>
+          <p:cNvSpPr/>
+          <p:nvPr/>
+        </p:nvSpPr>
+        <p:spPr>
+          <a:xfrm>
+            <a:off x="1027356" y="3383280"/>
+            <a:ext cx="8686800" cy="457200"/>
+          </a:xfrm>
+          <a:prstGeom prst="rect">
+            <a:avLst/>
+          </a:prstGeom>
+          <a:noFill/>
+          <a:ln/>
+        </p:spPr>
+        <p:txBody>
+          <a:bodyPr wrap="square" rtlCol="0" anchor="t"/>
+          <a:lstStyle/>
+          <a:p>
+            <a:pPr marL="0" indent="0" algn="l">
+              <a:buNone/>
+            </a:pPr>
+            <a:r>
+              <a:rPr lang="en-US" sz="1800" dirty="0">
+                <a:solidFill>
+                  <a:srgbClr val="39428E"/>
+                </a:solidFill>
+                <a:latin typeface="Calibri" pitchFamily="34" charset="0"/>
+                <a:ea typeface="Calibri" pitchFamily="34" charset="-122"/>
+                <a:cs typeface="Calibri" pitchFamily="34" charset="-120"/>
+              </a:rPr>
+              <a:t>Attend Q&amp;A: Bring questions and feedback to next Wednesday's session</a:t>
+            </a:r>
+            <a:endParaRPr lang="en-US" sz="1800" dirty="0"/>
+          </a:p>
+        </p:txBody>
+      </p:sp>
+      <p:sp>
+        <p:nvSpPr>
+          <p:cNvPr id="16" name="Text 14"/>
+          <p:cNvSpPr/>
+          <p:nvPr/>
+        </p:nvSpPr>
+        <p:spPr>
+          <a:xfrm>
+            <a:off x="2112400" y="4503420"/>
+            <a:ext cx="4677155" cy="640080"/>
+          </a:xfrm>
+          <a:prstGeom prst="rect">
+            <a:avLst/>
+          </a:prstGeom>
+          <a:noFill/>
+          <a:ln/>
+        </p:spPr>
+        <p:txBody>
+          <a:bodyPr wrap="square" rtlCol="0" anchor="ctr"/>
+          <a:lstStyle/>
+          <a:p>
+            <a:pPr marL="0" indent="0" algn="ctr">
+              <a:buNone/>
+            </a:pPr>
+            <a:r>
+              <a:rPr lang="en-US" sz="2000" b="1" dirty="0">
+                <a:solidFill>
+                  <a:schemeClr val="bg1"/>
+                </a:solidFill>
+                <a:latin typeface="Calibri" pitchFamily="34" charset="0"/>
+                <a:ea typeface="Calibri" pitchFamily="34" charset="-122"/>
+                <a:cs typeface="Calibri" pitchFamily="34" charset="-120"/>
+              </a:rPr>
+              <a:t>This is live. Use it on your next intake.</a:t>
+            </a:r>
+            <a:endParaRPr lang="en-US" sz="2000" dirty="0">
+              <a:solidFill>
+                <a:schemeClr val="bg1"/>
+              </a:solidFill>
+            </a:endParaRPr>
           </a:p>
         </p:txBody>
       </p:sp>
     </p:spTree>
   </p:cSld>
   <p:clrMapOvr>
-    <a:overrideClrMapping bg1="dk1" tx1="lt1" bg2="dk2" tx2="lt2" accent1="accent1" accent2="accent2" accent3="accent3" accent4="accent4" accent5="accent5" accent6="accent6" hlink="hlink" folHlink="folHlink"/>
+    <a:masterClrMapping/>
   </p:clrMapOvr>
 </p:sld>
 </file>
@@ -10318,7 +12239,7 @@
         </p:nvSpPr>
         <p:spPr>
           <a:xfrm>
-            <a:off x="748834" y="4561913"/>
+            <a:off x="748834" y="4723531"/>
             <a:ext cx="7646332" cy="299870"/>
           </a:xfrm>
           <a:prstGeom prst="rect">
@@ -10339,16 +12260,13 @@
             </a:pPr>
             <a:r>
               <a:rPr lang="en-US" sz="2200" b="1" dirty="0">
-                <a:solidFill>
-                  <a:srgbClr val="181A31"/>
-                </a:solidFill>
                 <a:latin typeface="Calibri" pitchFamily="34" charset="0"/>
                 <a:ea typeface="Calibri" pitchFamily="34" charset="-122"/>
                 <a:cs typeface="Calibri" pitchFamily="34" charset="-120"/>
               </a:rPr>
               <a:t>Think of this as a tireless junior associate.</a:t>
             </a:r>
-            <a:endParaRPr lang="en-US" sz="2200"/>
+            <a:endParaRPr lang="en-US" sz="2200" dirty="0"/>
           </a:p>
         </p:txBody>
       </p:sp>
@@ -11000,7 +12918,7 @@
       </p:grpSpPr>
       <p:sp>
         <p:nvSpPr>
-          <p:cNvPr id="18" name="Rectangle 17">
+          <p:cNvPr id="8" name="Rectangle 7">
             <a:extLst>
               <a:ext uri="{FF2B5EF4-FFF2-40B4-BE49-F238E27FC236}">
                 <a16:creationId xmlns:a16="http://schemas.microsoft.com/office/drawing/2014/main" id="{6738F172-08B9-4BA5-B753-7D93472C0B11}"/>
@@ -11073,7 +12991,7 @@
       </p:sp>
       <p:pic>
         <p:nvPicPr>
-          <p:cNvPr id="19" name="Picture 18">
+          <p:cNvPr id="10" name="Picture 9">
             <a:extLst>
               <a:ext uri="{FF2B5EF4-FFF2-40B4-BE49-F238E27FC236}">
                 <a16:creationId xmlns:a16="http://schemas.microsoft.com/office/drawing/2014/main" id="{C900681B-C4FD-40B3-B5BC-C33231614C91}"/>
@@ -11095,7 +13013,7 @@
           </p:nvPr>
         </p:nvPicPr>
         <p:blipFill rotWithShape="1">
-          <a:blip r:embed="rId2">
+          <a:blip r:embed="rId3">
             <a:extLst>
               <a:ext uri="{28A0092B-C50C-407E-A947-70E740481C1C}">
                 <a14:useLocalDpi xmlns:a14="http://schemas.microsoft.com/office/drawing/2010/main" val="0"/>
@@ -11117,7 +13035,7 @@
       </p:pic>
       <p:cxnSp>
         <p:nvCxnSpPr>
-          <p:cNvPr id="20" name="Straight Connector 19">
+          <p:cNvPr id="12" name="Straight Connector 11">
             <a:extLst>
               <a:ext uri="{FF2B5EF4-FFF2-40B4-BE49-F238E27FC236}">
                 <a16:creationId xmlns:a16="http://schemas.microsoft.com/office/drawing/2014/main" id="{FEAACD67-2FB5-4530-9B74-8D946F1CE9E3}"/>
@@ -11171,10 +13089,10 @@
       </p:cxnSp>
       <p:pic>
         <p:nvPicPr>
-          <p:cNvPr id="3" name="Picture 2" descr="A screenshot of a web page&#10;&#10;AI-generated content may be incorrect.">
+          <p:cNvPr id="3" name="Picture 2" descr="A screenshot of a computer&#10;&#10;AI-generated content may be incorrect.">
             <a:extLst>
               <a:ext uri="{FF2B5EF4-FFF2-40B4-BE49-F238E27FC236}">
-                <a16:creationId xmlns:a16="http://schemas.microsoft.com/office/drawing/2014/main" id="{E7787325-3544-8577-0AB3-752143048F4B}"/>
+                <a16:creationId xmlns:a16="http://schemas.microsoft.com/office/drawing/2014/main" id="{61DE5317-9DD3-9513-1E05-777D523E49E2}"/>
               </a:ext>
             </a:extLst>
           </p:cNvPr>
@@ -11184,7 +13102,7 @@
           <p:nvPr/>
         </p:nvPicPr>
         <p:blipFill>
-          <a:blip r:embed="rId3"/>
+          <a:blip r:embed="rId4"/>
           <a:srcRect b="28783"/>
           <a:stretch>
             <a:fillRect/>
@@ -11203,7 +13121,7 @@
     </p:spTree>
     <p:extLst>
       <p:ext uri="{BB962C8B-B14F-4D97-AF65-F5344CB8AC3E}">
-        <p14:creationId xmlns:p14="http://schemas.microsoft.com/office/powerpoint/2010/main" val="4099791727"/>
+        <p14:creationId xmlns:p14="http://schemas.microsoft.com/office/powerpoint/2010/main" val="3093487813"/>
       </p:ext>
     </p:extLst>
   </p:cSld>
@@ -11256,7 +13174,7 @@
       </p:grpSpPr>
       <p:sp>
         <p:nvSpPr>
-          <p:cNvPr id="8" name="Rectangle 7">
+          <p:cNvPr id="18" name="Rectangle 17">
             <a:extLst>
               <a:ext uri="{FF2B5EF4-FFF2-40B4-BE49-F238E27FC236}">
                 <a16:creationId xmlns:a16="http://schemas.microsoft.com/office/drawing/2014/main" id="{6738F172-08B9-4BA5-B753-7D93472C0B11}"/>
@@ -11329,7 +13247,7 @@
       </p:sp>
       <p:pic>
         <p:nvPicPr>
-          <p:cNvPr id="10" name="Picture 9">
+          <p:cNvPr id="19" name="Picture 18">
             <a:extLst>
               <a:ext uri="{FF2B5EF4-FFF2-40B4-BE49-F238E27FC236}">
                 <a16:creationId xmlns:a16="http://schemas.microsoft.com/office/drawing/2014/main" id="{C900681B-C4FD-40B3-B5BC-C33231614C91}"/>
@@ -11351,7 +13269,7 @@
           </p:nvPr>
         </p:nvPicPr>
         <p:blipFill rotWithShape="1">
-          <a:blip r:embed="rId2">
+          <a:blip r:embed="rId3">
             <a:extLst>
               <a:ext uri="{28A0092B-C50C-407E-A947-70E740481C1C}">
                 <a14:useLocalDpi xmlns:a14="http://schemas.microsoft.com/office/drawing/2010/main" val="0"/>
@@ -11373,7 +13291,7 @@
       </p:pic>
       <p:cxnSp>
         <p:nvCxnSpPr>
-          <p:cNvPr id="12" name="Straight Connector 11">
+          <p:cNvPr id="20" name="Straight Connector 19">
             <a:extLst>
               <a:ext uri="{FF2B5EF4-FFF2-40B4-BE49-F238E27FC236}">
                 <a16:creationId xmlns:a16="http://schemas.microsoft.com/office/drawing/2014/main" id="{FEAACD67-2FB5-4530-9B74-8D946F1CE9E3}"/>
@@ -11427,10 +13345,10 @@
       </p:cxnSp>
       <p:pic>
         <p:nvPicPr>
-          <p:cNvPr id="3" name="Picture 2" descr="A screenshot of a computer&#10;&#10;AI-generated content may be incorrect.">
+          <p:cNvPr id="3" name="Picture 2" descr="A screenshot of a web page&#10;&#10;AI-generated content may be incorrect.">
             <a:extLst>
               <a:ext uri="{FF2B5EF4-FFF2-40B4-BE49-F238E27FC236}">
-                <a16:creationId xmlns:a16="http://schemas.microsoft.com/office/drawing/2014/main" id="{0429847A-151B-CD63-A01D-D869F0E12483}"/>
+                <a16:creationId xmlns:a16="http://schemas.microsoft.com/office/drawing/2014/main" id="{E7787325-3544-8577-0AB3-752143048F4B}"/>
               </a:ext>
             </a:extLst>
           </p:cNvPr>
@@ -11440,8 +13358,8 @@
           <p:nvPr/>
         </p:nvPicPr>
         <p:blipFill>
-          <a:blip r:embed="rId3"/>
-          <a:srcRect t="14440" b="14343"/>
+          <a:blip r:embed="rId4"/>
+          <a:srcRect b="28783"/>
           <a:stretch>
             <a:fillRect/>
           </a:stretch>
@@ -11459,7 +13377,7 @@
     </p:spTree>
     <p:extLst>
       <p:ext uri="{BB962C8B-B14F-4D97-AF65-F5344CB8AC3E}">
-        <p14:creationId xmlns:p14="http://schemas.microsoft.com/office/powerpoint/2010/main" val="3493365885"/>
+        <p14:creationId xmlns:p14="http://schemas.microsoft.com/office/powerpoint/2010/main" val="4099791727"/>
       </p:ext>
     </p:extLst>
   </p:cSld>
@@ -11512,7 +13430,7 @@
       </p:grpSpPr>
       <p:sp>
         <p:nvSpPr>
-          <p:cNvPr id="24" name="Rectangle 23">
+          <p:cNvPr id="8" name="Rectangle 7">
             <a:extLst>
               <a:ext uri="{FF2B5EF4-FFF2-40B4-BE49-F238E27FC236}">
                 <a16:creationId xmlns:a16="http://schemas.microsoft.com/office/drawing/2014/main" id="{6738F172-08B9-4BA5-B753-7D93472C0B11}"/>
@@ -11585,7 +13503,7 @@
       </p:sp>
       <p:pic>
         <p:nvPicPr>
-          <p:cNvPr id="25" name="Picture 24">
+          <p:cNvPr id="10" name="Picture 9">
             <a:extLst>
               <a:ext uri="{FF2B5EF4-FFF2-40B4-BE49-F238E27FC236}">
                 <a16:creationId xmlns:a16="http://schemas.microsoft.com/office/drawing/2014/main" id="{C900681B-C4FD-40B3-B5BC-C33231614C91}"/>
@@ -11607,7 +13525,7 @@
           </p:nvPr>
         </p:nvPicPr>
         <p:blipFill rotWithShape="1">
-          <a:blip r:embed="rId2">
+          <a:blip r:embed="rId3">
             <a:extLst>
               <a:ext uri="{28A0092B-C50C-407E-A947-70E740481C1C}">
                 <a14:useLocalDpi xmlns:a14="http://schemas.microsoft.com/office/drawing/2010/main" val="0"/>
@@ -11629,7 +13547,7 @@
       </p:pic>
       <p:cxnSp>
         <p:nvCxnSpPr>
-          <p:cNvPr id="26" name="Straight Connector 25">
+          <p:cNvPr id="12" name="Straight Connector 11">
             <a:extLst>
               <a:ext uri="{FF2B5EF4-FFF2-40B4-BE49-F238E27FC236}">
                 <a16:creationId xmlns:a16="http://schemas.microsoft.com/office/drawing/2014/main" id="{FEAACD67-2FB5-4530-9B74-8D946F1CE9E3}"/>
@@ -11686,7 +13604,7 @@
           <p:cNvPr id="3" name="Picture 2" descr="A screenshot of a computer&#10;&#10;AI-generated content may be incorrect.">
             <a:extLst>
               <a:ext uri="{FF2B5EF4-FFF2-40B4-BE49-F238E27FC236}">
-                <a16:creationId xmlns:a16="http://schemas.microsoft.com/office/drawing/2014/main" id="{F5D982E9-D893-FAC4-9D1F-3382ED83D16F}"/>
+                <a16:creationId xmlns:a16="http://schemas.microsoft.com/office/drawing/2014/main" id="{0429847A-151B-CD63-A01D-D869F0E12483}"/>
               </a:ext>
             </a:extLst>
           </p:cNvPr>
@@ -11696,8 +13614,8 @@
           <p:nvPr/>
         </p:nvPicPr>
         <p:blipFill>
-          <a:blip r:embed="rId3"/>
-          <a:srcRect t="7586" b="21197"/>
+          <a:blip r:embed="rId4"/>
+          <a:srcRect t="14440" b="14343"/>
           <a:stretch>
             <a:fillRect/>
           </a:stretch>
@@ -11715,7 +13633,7 @@
     </p:spTree>
     <p:extLst>
       <p:ext uri="{BB962C8B-B14F-4D97-AF65-F5344CB8AC3E}">
-        <p14:creationId xmlns:p14="http://schemas.microsoft.com/office/powerpoint/2010/main" val="553091738"/>
+        <p14:creationId xmlns:p14="http://schemas.microsoft.com/office/powerpoint/2010/main" val="3493365885"/>
       </p:ext>
     </p:extLst>
   </p:cSld>
@@ -11768,7 +13686,7 @@
       </p:grpSpPr>
       <p:sp>
         <p:nvSpPr>
-          <p:cNvPr id="8" name="Rectangle 7">
+          <p:cNvPr id="31" name="Rectangle 30">
             <a:extLst>
               <a:ext uri="{FF2B5EF4-FFF2-40B4-BE49-F238E27FC236}">
                 <a16:creationId xmlns:a16="http://schemas.microsoft.com/office/drawing/2014/main" id="{6738F172-08B9-4BA5-B753-7D93472C0B11}"/>
@@ -11841,7 +13759,7 @@
       </p:sp>
       <p:pic>
         <p:nvPicPr>
-          <p:cNvPr id="10" name="Picture 9">
+          <p:cNvPr id="33" name="Picture 32">
             <a:extLst>
               <a:ext uri="{FF2B5EF4-FFF2-40B4-BE49-F238E27FC236}">
                 <a16:creationId xmlns:a16="http://schemas.microsoft.com/office/drawing/2014/main" id="{C900681B-C4FD-40B3-B5BC-C33231614C91}"/>
@@ -11863,7 +13781,7 @@
           </p:nvPr>
         </p:nvPicPr>
         <p:blipFill rotWithShape="1">
-          <a:blip r:embed="rId2">
+          <a:blip r:embed="rId3">
             <a:extLst>
               <a:ext uri="{28A0092B-C50C-407E-A947-70E740481C1C}">
                 <a14:useLocalDpi xmlns:a14="http://schemas.microsoft.com/office/drawing/2010/main" val="0"/>
@@ -11885,7 +13803,7 @@
       </p:pic>
       <p:cxnSp>
         <p:nvCxnSpPr>
-          <p:cNvPr id="12" name="Straight Connector 11">
+          <p:cNvPr id="35" name="Straight Connector 34">
             <a:extLst>
               <a:ext uri="{FF2B5EF4-FFF2-40B4-BE49-F238E27FC236}">
                 <a16:creationId xmlns:a16="http://schemas.microsoft.com/office/drawing/2014/main" id="{FEAACD67-2FB5-4530-9B74-8D946F1CE9E3}"/>
@@ -11939,10 +13857,10 @@
       </p:cxnSp>
       <p:pic>
         <p:nvPicPr>
-          <p:cNvPr id="3" name="Picture 2" descr="A screenshot of a computer&#10;&#10;AI-generated content may be incorrect.">
+          <p:cNvPr id="5" name="Picture 4" descr="A screenshot of a computer&#10;&#10;AI-generated content may be incorrect.">
             <a:extLst>
               <a:ext uri="{FF2B5EF4-FFF2-40B4-BE49-F238E27FC236}">
-                <a16:creationId xmlns:a16="http://schemas.microsoft.com/office/drawing/2014/main" id="{70704360-527B-CD3D-CB6A-20BF12D05754}"/>
+                <a16:creationId xmlns:a16="http://schemas.microsoft.com/office/drawing/2014/main" id="{A02200B1-D258-C585-2A35-818CE16705CB}"/>
               </a:ext>
             </a:extLst>
           </p:cNvPr>
@@ -11952,8 +13870,8 @@
           <p:nvPr/>
         </p:nvPicPr>
         <p:blipFill>
-          <a:blip r:embed="rId3"/>
-          <a:srcRect t="14363" b="14420"/>
+          <a:blip r:embed="rId4"/>
+          <a:srcRect t="18394" b="10390"/>
           <a:stretch>
             <a:fillRect/>
           </a:stretch>
@@ -11971,7 +13889,7 @@
     </p:spTree>
     <p:extLst>
       <p:ext uri="{BB962C8B-B14F-4D97-AF65-F5344CB8AC3E}">
-        <p14:creationId xmlns:p14="http://schemas.microsoft.com/office/powerpoint/2010/main" val="1975128909"/>
+        <p14:creationId xmlns:p14="http://schemas.microsoft.com/office/powerpoint/2010/main" val="553091738"/>
       </p:ext>
     </p:extLst>
   </p:cSld>
@@ -12119,7 +14037,7 @@
           </p:nvPr>
         </p:nvPicPr>
         <p:blipFill rotWithShape="1">
-          <a:blip r:embed="rId2">
+          <a:blip r:embed="rId3">
             <a:extLst>
               <a:ext uri="{28A0092B-C50C-407E-A947-70E740481C1C}">
                 <a14:useLocalDpi xmlns:a14="http://schemas.microsoft.com/office/drawing/2010/main" val="0"/>
@@ -12195,10 +14113,10 @@
       </p:cxnSp>
       <p:pic>
         <p:nvPicPr>
-          <p:cNvPr id="3" name="Picture 2" descr="A screenshot of a computer&#10;&#10;AI-generated content may be incorrect.">
+          <p:cNvPr id="3" name="Picture 2" descr="A screenshot of a chat&#10;&#10;AI-generated content may be incorrect.">
             <a:extLst>
               <a:ext uri="{FF2B5EF4-FFF2-40B4-BE49-F238E27FC236}">
-                <a16:creationId xmlns:a16="http://schemas.microsoft.com/office/drawing/2014/main" id="{1AEEA920-9C91-F17C-F60B-1C8612806B4C}"/>
+                <a16:creationId xmlns:a16="http://schemas.microsoft.com/office/drawing/2014/main" id="{D5A7E6C9-6262-8E66-592D-7F61F571F94B}"/>
               </a:ext>
             </a:extLst>
           </p:cNvPr>
@@ -12208,8 +14126,8 @@
           <p:nvPr/>
         </p:nvPicPr>
         <p:blipFill>
-          <a:blip r:embed="rId3"/>
-          <a:srcRect b="28783"/>
+          <a:blip r:embed="rId4"/>
+          <a:srcRect t="18214" b="10569"/>
           <a:stretch>
             <a:fillRect/>
           </a:stretch>
@@ -12227,7 +14145,7 @@
     </p:spTree>
     <p:extLst>
       <p:ext uri="{BB962C8B-B14F-4D97-AF65-F5344CB8AC3E}">
-        <p14:creationId xmlns:p14="http://schemas.microsoft.com/office/powerpoint/2010/main" val="649173382"/>
+        <p14:creationId xmlns:p14="http://schemas.microsoft.com/office/powerpoint/2010/main" val="3338118917"/>
       </p:ext>
     </p:extLst>
   </p:cSld>
